--- a/outputs/GFCC21Jun2026_12thSundayinOrdinaryTime.pptx
+++ b/outputs/GFCC21Jun2026_12thSundayinOrdinaryTime.pptx
@@ -87,6 +87,7 @@
     <p:sldId id="335" r:id="rId86"/>
     <p:sldId id="336" r:id="rId87"/>
     <p:sldId id="337" r:id="rId88"/>
+    <p:sldId id="338" r:id="rId89"/>
   </p:sldIdLst>
   <p:sldSz cx="18288000" cy="10287000" type="screen4x3"/>
   <p:notesSz cx="6858000" cy="9144000"/>
@@ -6268,7 +6269,7 @@
               <a:lnSpc>
                 <a:spcPct val="108000"/>
               </a:lnSpc>
-              <a:defRPr sz="3600" b="1" i="0" u="none">
+              <a:defRPr sz="3400" b="1" i="0" u="none">
                 <a:solidFill>
                   <a:srgbClr val="FFFFFF"/>
                 </a:solidFill>
@@ -6276,7 +6277,7 @@
               </a:defRPr>
             </a:pPr>
             <a:r>
-              <a:t>Rev. Fr. Jonrey Lauron, RCJ</a:t>
+              <a:t>Rev. Fr. Jonrey Lauron, RCJ · Divino Gabriel</a:t>
             </a:r>
           </a:p>
         </p:txBody>
@@ -7597,7 +7598,7 @@
               <a:lnSpc>
                 <a:spcPct val="108000"/>
               </a:lnSpc>
-              <a:defRPr sz="3600" b="1" i="0" u="none">
+              <a:defRPr sz="3400" b="1" i="0" u="none">
                 <a:solidFill>
                   <a:srgbClr val="FFFFFF"/>
                 </a:solidFill>
@@ -7605,7 +7606,7 @@
               </a:defRPr>
             </a:pPr>
             <a:r>
-              <a:t>Rev. Fr. Jonrey Lauron, RCJ</a:t>
+              <a:t>Rev. Fr. Jonrey Lauron, RCJ · Divino Gabriel</a:t>
             </a:r>
           </a:p>
         </p:txBody>
@@ -9008,7 +9009,7 @@
               <a:lnSpc>
                 <a:spcPct val="108000"/>
               </a:lnSpc>
-              <a:defRPr sz="3600" b="1" i="0" u="none">
+              <a:defRPr sz="3400" b="1" i="0" u="none">
                 <a:solidFill>
                   <a:srgbClr val="FFFFFF"/>
                 </a:solidFill>
@@ -9016,7 +9017,7 @@
               </a:defRPr>
             </a:pPr>
             <a:r>
-              <a:t>Rev. Fr. Jonrey Lauron, RCJ</a:t>
+              <a:t>Rev. Fr. Jonrey Lauron, RCJ · Divino Gabriel</a:t>
             </a:r>
           </a:p>
         </p:txBody>
@@ -9651,7 +9652,7 @@
               <a:lnSpc>
                 <a:spcPct val="108000"/>
               </a:lnSpc>
-              <a:defRPr sz="3600" b="1" i="0" u="none">
+              <a:defRPr sz="3400" b="1" i="0" u="none">
                 <a:solidFill>
                   <a:srgbClr val="FFFFFF"/>
                 </a:solidFill>
@@ -9659,7 +9660,7 @@
               </a:defRPr>
             </a:pPr>
             <a:r>
-              <a:t>Rev. Fr. Jonrey Lauron, RCJ</a:t>
+              <a:t>Rev. Fr. Jonrey Lauron, RCJ · Divino Gabriel</a:t>
             </a:r>
           </a:p>
         </p:txBody>
@@ -12794,7 +12795,7 @@
               <a:lnSpc>
                 <a:spcPct val="108000"/>
               </a:lnSpc>
-              <a:defRPr sz="3600" b="1" i="0" u="none">
+              <a:defRPr sz="3400" b="1" i="0" u="none">
                 <a:solidFill>
                   <a:srgbClr val="FFFFFF"/>
                 </a:solidFill>
@@ -12802,7 +12803,7 @@
               </a:defRPr>
             </a:pPr>
             <a:r>
-              <a:t>Rev. Fr. Jonrey Lauron, RCJ</a:t>
+              <a:t>Rev. Fr. Jonrey Lauron, RCJ · Divino Gabriel</a:t>
             </a:r>
           </a:p>
         </p:txBody>
@@ -14071,7 +14072,7 @@
               <a:lnSpc>
                 <a:spcPct val="108000"/>
               </a:lnSpc>
-              <a:defRPr sz="3600" b="1" i="0" u="none">
+              <a:defRPr sz="3400" b="1" i="0" u="none">
                 <a:solidFill>
                   <a:srgbClr val="FFFFFF"/>
                 </a:solidFill>
@@ -14079,7 +14080,7 @@
               </a:defRPr>
             </a:pPr>
             <a:r>
-              <a:t>Rev. Fr. Jonrey Lauron, RCJ</a:t>
+              <a:t>Rev. Fr. Jonrey Lauron, RCJ · Divino Gabriel</a:t>
             </a:r>
           </a:p>
         </p:txBody>
@@ -16234,7 +16235,7 @@
               <a:lnSpc>
                 <a:spcPct val="108000"/>
               </a:lnSpc>
-              <a:defRPr sz="3600" b="1" i="0" u="none">
+              <a:defRPr sz="3400" b="1" i="0" u="none">
                 <a:solidFill>
                   <a:srgbClr val="FFFFFF"/>
                 </a:solidFill>
@@ -16242,7 +16243,7 @@
               </a:defRPr>
             </a:pPr>
             <a:r>
-              <a:t>Rev. Fr. Jonrey Lauron, RCJ</a:t>
+              <a:t>Rev. Fr. Jonrey Lauron, RCJ · Divino Gabriel</a:t>
             </a:r>
           </a:p>
         </p:txBody>
@@ -16496,7 +16497,7 @@
               </a:defRPr>
             </a:pPr>
             <a:r>
-              <a:t>(Enter collection amount in Mass Builder.)</a:t>
+              <a:t>₱9,000</a:t>
             </a:r>
           </a:p>
         </p:txBody>
@@ -16656,7 +16657,39 @@
               </a:defRPr>
             </a:pPr>
             <a:r>
-              <a:t>CHURCH ANNOUNCEMENTS</a:t>
+              <a:t>FOOD SPONSORS</a:t>
+            </a:r>
+          </a:p>
+          <a:p>
+            <a:pPr algn="ctr">
+              <a:spcAft>
+                <a:spcPts val="500"/>
+              </a:spcAft>
+              <a:defRPr sz="5500" b="0" i="0" u="none">
+                <a:solidFill>
+                  <a:srgbClr val="FFFFFF"/>
+                </a:solidFill>
+                <a:latin typeface="Georgia"/>
+              </a:defRPr>
+            </a:pPr>
+            <a:r>
+              <a:t>The community thanks our food sponsors.</a:t>
+            </a:r>
+          </a:p>
+          <a:p>
+            <a:pPr algn="ctr">
+              <a:spcAft>
+                <a:spcPts val="500"/>
+              </a:spcAft>
+              <a:defRPr sz="5500" b="0" i="0" u="none">
+                <a:solidFill>
+                  <a:srgbClr val="FFFFFF"/>
+                </a:solidFill>
+                <a:latin typeface="Georgia"/>
+              </a:defRPr>
+            </a:pPr>
+            <a:r>
+              <a:t>• keshi</a:t>
             </a:r>
           </a:p>
         </p:txBody>
@@ -16696,7 +16729,7 @@
               </a:defRPr>
             </a:pPr>
             <a:r>
-              <a:t>Announcements</a:t>
+              <a:t>Food Sponsors</a:t>
             </a:r>
           </a:p>
         </p:txBody>
@@ -16930,7 +16963,7 @@
               </a:defRPr>
             </a:pPr>
             <a:r>
-              <a:t>Welcome newcomers!</a:t>
+              <a:t>CHURCH ANNOUNCEMENTS</a:t>
             </a:r>
           </a:p>
         </p:txBody>
@@ -17035,7 +17068,7 @@
               </a:defRPr>
             </a:pPr>
             <a:r>
-              <a:t>Sacrament of Confession</a:t>
+              <a:t>Welcome newcomers!</a:t>
             </a:r>
           </a:p>
         </p:txBody>
@@ -17140,7 +17173,7 @@
               </a:defRPr>
             </a:pPr>
             <a:r>
-              <a:t>Updates and Announcements</a:t>
+              <a:t>Sacrament of Confession</a:t>
             </a:r>
           </a:p>
         </p:txBody>
@@ -17220,7 +17253,7 @@
         <p:spPr>
           <a:xfrm>
             <a:off x="914400" y="530352"/>
-            <a:ext cx="16459200" cy="8613648"/>
+            <a:ext cx="16459200" cy="8750808"/>
           </a:xfrm>
           <a:prstGeom prst="rect">
             <a:avLst/>
@@ -17228,176 +17261,24 @@
           <a:noFill/>
         </p:spPr>
         <p:txBody>
-          <a:bodyPr wrap="square" lIns="109728" rIns="109728" tIns="73152" bIns="73152" anchor="ctr">
-            <a:noAutofit/>
-          </a:bodyPr>
-          <a:lstStyle/>
-          <a:p>
-            <a:pPr algn="ctr">
-              <a:spcBef>
-                <a:spcPts val="600"/>
-              </a:spcBef>
+          <a:bodyPr wrap="square" lIns="109728" rIns="109728" tIns="73152" bIns="73152">
+            <a:noAutofit/>
+          </a:bodyPr>
+          <a:lstStyle/>
+          <a:p>
+            <a:pPr algn="ctr">
               <a:spcAft>
-                <a:spcPts val="800"/>
+                <a:spcPts val="500"/>
               </a:spcAft>
-            </a:pPr>
-            <a:r>
-              <a:rPr sz="5500" b="1">
-                <a:solidFill>
-                  <a:srgbClr val="F8B300"/>
+              <a:defRPr sz="5500" b="1" i="0" u="none">
+                <a:solidFill>
+                  <a:srgbClr val="FFFFFF"/>
                 </a:solidFill>
                 <a:latin typeface="Georgia"/>
-              </a:rPr>
-              <a:t>Priest: </a:t>
-            </a:r>
-            <a:r>
-              <a:rPr sz="5500" b="1">
-                <a:solidFill>
-                  <a:srgbClr val="FFFFFF"/>
-                </a:solidFill>
-                <a:latin typeface="Georgia"/>
-              </a:rPr>
-              <a:t>The Lord be with you.</a:t>
-            </a:r>
-          </a:p>
-          <a:p>
-            <a:pPr algn="ctr">
-              <a:spcBef>
-                <a:spcPts val="600"/>
-              </a:spcBef>
-              <a:spcAft>
-                <a:spcPts val="800"/>
-              </a:spcAft>
-            </a:pPr>
-            <a:r>
-              <a:rPr sz="5500" b="1">
-                <a:solidFill>
-                  <a:srgbClr val="FFFFFF"/>
-                </a:solidFill>
-                <a:latin typeface="Georgia"/>
-              </a:rPr>
-              <a:t>All: </a:t>
-            </a:r>
-            <a:r>
-              <a:rPr sz="5500" b="1">
-                <a:solidFill>
-                  <a:srgbClr val="FFFFFF"/>
-                </a:solidFill>
-                <a:latin typeface="Georgia"/>
-              </a:rPr>
-              <a:t>And with your spirit.</a:t>
-            </a:r>
-          </a:p>
-          <a:p>
-            <a:pPr algn="ctr">
-              <a:spcBef>
-                <a:spcPts val="600"/>
-              </a:spcBef>
-              <a:spcAft>
-                <a:spcPts val="800"/>
-              </a:spcAft>
-            </a:pPr>
-            <a:r>
-              <a:rPr sz="5500" b="1">
-                <a:solidFill>
-                  <a:srgbClr val="F8B300"/>
-                </a:solidFill>
-                <a:latin typeface="Georgia"/>
-              </a:rPr>
-              <a:t>Priest: </a:t>
-            </a:r>
-            <a:r>
-              <a:rPr sz="5500" b="1">
-                <a:solidFill>
-                  <a:srgbClr val="FFFFFF"/>
-                </a:solidFill>
-                <a:latin typeface="Georgia"/>
-              </a:rPr>
-              <a:t>May almighty God bless you, the Father, and the Son, and the Holy Spirit.</a:t>
-            </a:r>
-          </a:p>
-          <a:p>
-            <a:pPr algn="ctr">
-              <a:spcBef>
-                <a:spcPts val="600"/>
-              </a:spcBef>
-              <a:spcAft>
-                <a:spcPts val="800"/>
-              </a:spcAft>
-            </a:pPr>
-            <a:r>
-              <a:rPr sz="5500" b="1">
-                <a:solidFill>
-                  <a:srgbClr val="FFFFFF"/>
-                </a:solidFill>
-                <a:latin typeface="Georgia"/>
-              </a:rPr>
-              <a:t>All: </a:t>
-            </a:r>
-            <a:r>
-              <a:rPr sz="5500" b="1">
-                <a:solidFill>
-                  <a:srgbClr val="FFFFFF"/>
-                </a:solidFill>
-                <a:latin typeface="Georgia"/>
-              </a:rPr>
-              <a:t>Amen.</a:t>
-            </a:r>
-          </a:p>
-          <a:p>
-            <a:pPr algn="ctr">
-              <a:spcBef>
-                <a:spcPts val="600"/>
-              </a:spcBef>
-              <a:spcAft>
-                <a:spcPts val="800"/>
-              </a:spcAft>
-            </a:pPr>
-            <a:r>
-              <a:rPr sz="5500" b="1">
-                <a:solidFill>
-                  <a:srgbClr val="F8B300"/>
-                </a:solidFill>
-                <a:latin typeface="Georgia"/>
-              </a:rPr>
-              <a:t>Priest: </a:t>
-            </a:r>
-            <a:r>
-              <a:rPr sz="5500" b="1">
-                <a:solidFill>
-                  <a:srgbClr val="FFFFFF"/>
-                </a:solidFill>
-                <a:latin typeface="Georgia"/>
-              </a:rPr>
-              <a:t>Go in peace, glorifying the Lord by your life.</a:t>
-            </a:r>
-          </a:p>
-          <a:p>
-            <a:pPr algn="ctr">
-              <a:spcBef>
-                <a:spcPts val="600"/>
-              </a:spcBef>
-              <a:spcAft>
-                <a:spcPts val="800"/>
-              </a:spcAft>
-            </a:pPr>
-            <a:r>
-              <a:rPr sz="5500" b="1">
-                <a:solidFill>
-                  <a:srgbClr val="FFFFFF"/>
-                </a:solidFill>
-                <a:latin typeface="Georgia"/>
-              </a:rPr>
-              <a:t>All: </a:t>
-            </a:r>
-            <a:r>
-              <a:rPr sz="5500" b="1">
-                <a:solidFill>
-                  <a:srgbClr val="FFFFFF"/>
-                </a:solidFill>
-                <a:latin typeface="Georgia"/>
-              </a:rPr>
-              <a:t>Thanks be to God.</a:t>
+              </a:defRPr>
+            </a:pPr>
+            <a:r>
+              <a:t>Updates and Announcements</a:t>
             </a:r>
           </a:p>
         </p:txBody>
@@ -17437,7 +17318,7 @@
               </a:defRPr>
             </a:pPr>
             <a:r>
-              <a:t>Final Blessing</a:t>
+              <a:t>Announcements</a:t>
             </a:r>
           </a:p>
         </p:txBody>
@@ -17456,7 +17337,7 @@
     <p:bg>
       <p:bgPr>
         <a:solidFill>
-          <a:srgbClr val="000000"/>
+          <a:srgbClr val="211733"/>
         </a:solidFill>
         <a:effectLst/>
       </p:bgPr>
@@ -17476,8 +17357,8 @@
         </p:nvSpPr>
         <p:spPr>
           <a:xfrm>
-            <a:off x="914400" y="109728"/>
-            <a:ext cx="16459200" cy="868680"/>
+            <a:off x="914400" y="530352"/>
+            <a:ext cx="16459200" cy="8613648"/>
           </a:xfrm>
           <a:prstGeom prst="rect">
             <a:avLst/>
@@ -17485,20 +17366,176 @@
           <a:noFill/>
         </p:spPr>
         <p:txBody>
-          <a:bodyPr wrap="square" lIns="109728" rIns="109728" tIns="73152" bIns="73152">
-            <a:noAutofit/>
-          </a:bodyPr>
-          <a:lstStyle/>
-          <a:p>
-            <a:pPr algn="ctr"/>
-            <a:r>
-              <a:rPr sz="3850" b="1" u="sng">
-                <a:solidFill>
-                  <a:srgbClr val="FFCC4D"/>
+          <a:bodyPr wrap="square" lIns="109728" rIns="109728" tIns="73152" bIns="73152" anchor="ctr">
+            <a:noAutofit/>
+          </a:bodyPr>
+          <a:lstStyle/>
+          <a:p>
+            <a:pPr algn="ctr">
+              <a:spcBef>
+                <a:spcPts val="600"/>
+              </a:spcBef>
+              <a:spcAft>
+                <a:spcPts val="800"/>
+              </a:spcAft>
+            </a:pPr>
+            <a:r>
+              <a:rPr sz="5500" b="1">
+                <a:solidFill>
+                  <a:srgbClr val="F8B300"/>
                 </a:solidFill>
                 <a:latin typeface="Georgia"/>
               </a:rPr>
-              <a:t>We Are Called</a:t>
+              <a:t>Priest: </a:t>
+            </a:r>
+            <a:r>
+              <a:rPr sz="5500" b="1">
+                <a:solidFill>
+                  <a:srgbClr val="FFFFFF"/>
+                </a:solidFill>
+                <a:latin typeface="Georgia"/>
+              </a:rPr>
+              <a:t>The Lord be with you.</a:t>
+            </a:r>
+          </a:p>
+          <a:p>
+            <a:pPr algn="ctr">
+              <a:spcBef>
+                <a:spcPts val="600"/>
+              </a:spcBef>
+              <a:spcAft>
+                <a:spcPts val="800"/>
+              </a:spcAft>
+            </a:pPr>
+            <a:r>
+              <a:rPr sz="5500" b="1">
+                <a:solidFill>
+                  <a:srgbClr val="FFFFFF"/>
+                </a:solidFill>
+                <a:latin typeface="Georgia"/>
+              </a:rPr>
+              <a:t>All: </a:t>
+            </a:r>
+            <a:r>
+              <a:rPr sz="5500" b="1">
+                <a:solidFill>
+                  <a:srgbClr val="FFFFFF"/>
+                </a:solidFill>
+                <a:latin typeface="Georgia"/>
+              </a:rPr>
+              <a:t>And with your spirit.</a:t>
+            </a:r>
+          </a:p>
+          <a:p>
+            <a:pPr algn="ctr">
+              <a:spcBef>
+                <a:spcPts val="600"/>
+              </a:spcBef>
+              <a:spcAft>
+                <a:spcPts val="800"/>
+              </a:spcAft>
+            </a:pPr>
+            <a:r>
+              <a:rPr sz="5500" b="1">
+                <a:solidFill>
+                  <a:srgbClr val="F8B300"/>
+                </a:solidFill>
+                <a:latin typeface="Georgia"/>
+              </a:rPr>
+              <a:t>Priest: </a:t>
+            </a:r>
+            <a:r>
+              <a:rPr sz="5500" b="1">
+                <a:solidFill>
+                  <a:srgbClr val="FFFFFF"/>
+                </a:solidFill>
+                <a:latin typeface="Georgia"/>
+              </a:rPr>
+              <a:t>May almighty God bless you, the Father, and the Son, and the Holy Spirit.</a:t>
+            </a:r>
+          </a:p>
+          <a:p>
+            <a:pPr algn="ctr">
+              <a:spcBef>
+                <a:spcPts val="600"/>
+              </a:spcBef>
+              <a:spcAft>
+                <a:spcPts val="800"/>
+              </a:spcAft>
+            </a:pPr>
+            <a:r>
+              <a:rPr sz="5500" b="1">
+                <a:solidFill>
+                  <a:srgbClr val="FFFFFF"/>
+                </a:solidFill>
+                <a:latin typeface="Georgia"/>
+              </a:rPr>
+              <a:t>All: </a:t>
+            </a:r>
+            <a:r>
+              <a:rPr sz="5500" b="1">
+                <a:solidFill>
+                  <a:srgbClr val="FFFFFF"/>
+                </a:solidFill>
+                <a:latin typeface="Georgia"/>
+              </a:rPr>
+              <a:t>Amen.</a:t>
+            </a:r>
+          </a:p>
+          <a:p>
+            <a:pPr algn="ctr">
+              <a:spcBef>
+                <a:spcPts val="600"/>
+              </a:spcBef>
+              <a:spcAft>
+                <a:spcPts val="800"/>
+              </a:spcAft>
+            </a:pPr>
+            <a:r>
+              <a:rPr sz="5500" b="1">
+                <a:solidFill>
+                  <a:srgbClr val="F8B300"/>
+                </a:solidFill>
+                <a:latin typeface="Georgia"/>
+              </a:rPr>
+              <a:t>Priest: </a:t>
+            </a:r>
+            <a:r>
+              <a:rPr sz="5500" b="1">
+                <a:solidFill>
+                  <a:srgbClr val="FFFFFF"/>
+                </a:solidFill>
+                <a:latin typeface="Georgia"/>
+              </a:rPr>
+              <a:t>Go in peace, glorifying the Lord by your life.</a:t>
+            </a:r>
+          </a:p>
+          <a:p>
+            <a:pPr algn="ctr">
+              <a:spcBef>
+                <a:spcPts val="600"/>
+              </a:spcBef>
+              <a:spcAft>
+                <a:spcPts val="800"/>
+              </a:spcAft>
+            </a:pPr>
+            <a:r>
+              <a:rPr sz="5500" b="1">
+                <a:solidFill>
+                  <a:srgbClr val="FFFFFF"/>
+                </a:solidFill>
+                <a:latin typeface="Georgia"/>
+              </a:rPr>
+              <a:t>All: </a:t>
+            </a:r>
+            <a:r>
+              <a:rPr sz="5500" b="1">
+                <a:solidFill>
+                  <a:srgbClr val="FFFFFF"/>
+                </a:solidFill>
+                <a:latin typeface="Georgia"/>
+              </a:rPr>
+              <a:t>Thanks be to God.</a:t>
             </a:r>
           </a:p>
         </p:txBody>
@@ -17511,93 +17548,6 @@
         </p:nvSpPr>
         <p:spPr>
           <a:xfrm>
-            <a:off x="0" y="1069848"/>
-            <a:ext cx="18288000" cy="8348472"/>
-          </a:xfrm>
-          <a:prstGeom prst="rect">
-            <a:avLst/>
-          </a:prstGeom>
-          <a:noFill/>
-        </p:spPr>
-        <p:txBody>
-          <a:bodyPr wrap="square" lIns="0" rIns="0" tIns="73152" bIns="73152" anchor="ctr">
-            <a:noAutofit/>
-          </a:bodyPr>
-          <a:lstStyle/>
-          <a:p>
-            <a:pPr algn="ctr">
-              <a:lnSpc>
-                <a:spcPct val="70000"/>
-              </a:lnSpc>
-            </a:pPr>
-            <a:r>
-              <a:rPr sz="7500" b="1" i="0">
-                <a:solidFill>
-                  <a:srgbClr val="FFFFFF"/>
-                </a:solidFill>
-                <a:latin typeface="Poppins"/>
-              </a:rPr>
-              <a:t>WE ARE CALLED TO ACT WITH JUSTICE,</a:t>
-            </a:r>
-          </a:p>
-          <a:p>
-            <a:pPr algn="ctr">
-              <a:lnSpc>
-                <a:spcPct val="70000"/>
-              </a:lnSpc>
-            </a:pPr>
-            <a:r>
-              <a:rPr sz="7500" b="1" i="0">
-                <a:solidFill>
-                  <a:srgbClr val="FFFFFF"/>
-                </a:solidFill>
-                <a:latin typeface="Poppins"/>
-              </a:rPr>
-              <a:t>WE ARE CALLED TO LOVE TENDERLY;</a:t>
-            </a:r>
-          </a:p>
-          <a:p>
-            <a:pPr algn="ctr">
-              <a:lnSpc>
-                <a:spcPct val="70000"/>
-              </a:lnSpc>
-            </a:pPr>
-            <a:r>
-              <a:rPr sz="7500" b="1" i="0">
-                <a:solidFill>
-                  <a:srgbClr val="FFFFFF"/>
-                </a:solidFill>
-                <a:latin typeface="Poppins"/>
-              </a:rPr>
-              <a:t>WE ARE CALLED TO SERVE ONE ANOTHER,</a:t>
-            </a:r>
-          </a:p>
-          <a:p>
-            <a:pPr algn="ctr">
-              <a:lnSpc>
-                <a:spcPct val="70000"/>
-              </a:lnSpc>
-            </a:pPr>
-            <a:r>
-              <a:rPr sz="7500" b="1" i="0">
-                <a:solidFill>
-                  <a:srgbClr val="FFFFFF"/>
-                </a:solidFill>
-                <a:latin typeface="Poppins"/>
-              </a:rPr>
-              <a:t>TO WALK HUMBLY WITH GOD.</a:t>
-            </a:r>
-          </a:p>
-        </p:txBody>
-      </p:sp>
-      <p:sp>
-        <p:nvSpPr>
-          <p:cNvPr id="4" name="TextBox 3"/>
-          <p:cNvSpPr txBox="1"/>
-          <p:nvPr/>
-        </p:nvSpPr>
-        <p:spPr>
-          <a:xfrm>
             <a:off x="914400" y="9418320"/>
             <a:ext cx="16459200" cy="777240"/>
           </a:xfrm>
@@ -17613,19 +17563,19 @@
           <a:lstStyle/>
           <a:p/>
           <a:p>
-            <a:pPr>
+            <a:pPr algn="l">
               <a:spcBef>
                 <a:spcPts val="200"/>
               </a:spcBef>
               <a:defRPr sz="1200" b="0" i="0" u="none">
                 <a:solidFill>
-                  <a:srgbClr val="FFCC4D"/>
+                  <a:srgbClr val="D8B4FE"/>
                 </a:solidFill>
                 <a:latin typeface="Georgia"/>
               </a:defRPr>
             </a:pPr>
             <a:r>
-              <a:t>Recessional</a:t>
+              <a:t>Final Blessing</a:t>
             </a:r>
           </a:p>
         </p:txBody>
@@ -17664,8 +17614,8 @@
         </p:nvSpPr>
         <p:spPr>
           <a:xfrm>
-            <a:off x="0" y="0"/>
-            <a:ext cx="18288000" cy="10287000"/>
+            <a:off x="914400" y="109728"/>
+            <a:ext cx="16459200" cy="868680"/>
           </a:xfrm>
           <a:prstGeom prst="rect">
             <a:avLst/>
@@ -17673,6 +17623,41 @@
           <a:noFill/>
         </p:spPr>
         <p:txBody>
+          <a:bodyPr wrap="square" lIns="109728" rIns="109728" tIns="73152" bIns="73152">
+            <a:noAutofit/>
+          </a:bodyPr>
+          <a:lstStyle/>
+          <a:p>
+            <a:pPr algn="ctr"/>
+            <a:r>
+              <a:rPr sz="3850" b="1" u="sng">
+                <a:solidFill>
+                  <a:srgbClr val="FFCC4D"/>
+                </a:solidFill>
+                <a:latin typeface="Georgia"/>
+              </a:rPr>
+              <a:t>We Are Called</a:t>
+            </a:r>
+          </a:p>
+        </p:txBody>
+      </p:sp>
+      <p:sp>
+        <p:nvSpPr>
+          <p:cNvPr id="3" name="TextBox 2"/>
+          <p:cNvSpPr txBox="1"/>
+          <p:nvPr/>
+        </p:nvSpPr>
+        <p:spPr>
+          <a:xfrm>
+            <a:off x="0" y="1069848"/>
+            <a:ext cx="18288000" cy="8348472"/>
+          </a:xfrm>
+          <a:prstGeom prst="rect">
+            <a:avLst/>
+          </a:prstGeom>
+          <a:noFill/>
+        </p:spPr>
+        <p:txBody>
           <a:bodyPr wrap="square" lIns="0" rIns="0" tIns="73152" bIns="73152" anchor="ctr">
             <a:noAutofit/>
           </a:bodyPr>
@@ -17684,13 +17669,13 @@
               </a:lnSpc>
             </a:pPr>
             <a:r>
-              <a:rPr sz="6600" b="1" i="0">
+              <a:rPr sz="7500" b="1" i="0">
                 <a:solidFill>
                   <a:srgbClr val="FFFFFF"/>
                 </a:solidFill>
                 <a:latin typeface="Poppins"/>
               </a:rPr>
-              <a:t>COME! LIVE IN THE LIGHT!</a:t>
+              <a:t>WE ARE CALLED TO ACT WITH JUSTICE,</a:t>
             </a:r>
           </a:p>
           <a:p>
@@ -17700,20 +17685,52 @@
               </a:lnSpc>
             </a:pPr>
             <a:r>
-              <a:rPr sz="6600" b="1" i="0">
+              <a:rPr sz="7500" b="1" i="0">
                 <a:solidFill>
                   <a:srgbClr val="FFFFFF"/>
                 </a:solidFill>
                 <a:latin typeface="Poppins"/>
               </a:rPr>
-              <a:t>SHINE WITH THE JOY AND THE LOVE OF THE LORD!</a:t>
-            </a:r>
-          </a:p>
-        </p:txBody>
-      </p:sp>
-      <p:sp>
-        <p:nvSpPr>
-          <p:cNvPr id="3" name="TextBox 2"/>
+              <a:t>WE ARE CALLED TO LOVE TENDERLY;</a:t>
+            </a:r>
+          </a:p>
+          <a:p>
+            <a:pPr algn="ctr">
+              <a:lnSpc>
+                <a:spcPct val="70000"/>
+              </a:lnSpc>
+            </a:pPr>
+            <a:r>
+              <a:rPr sz="7500" b="1" i="0">
+                <a:solidFill>
+                  <a:srgbClr val="FFFFFF"/>
+                </a:solidFill>
+                <a:latin typeface="Poppins"/>
+              </a:rPr>
+              <a:t>WE ARE CALLED TO SERVE ONE ANOTHER,</a:t>
+            </a:r>
+          </a:p>
+          <a:p>
+            <a:pPr algn="ctr">
+              <a:lnSpc>
+                <a:spcPct val="70000"/>
+              </a:lnSpc>
+            </a:pPr>
+            <a:r>
+              <a:rPr sz="7500" b="1" i="0">
+                <a:solidFill>
+                  <a:srgbClr val="FFFFFF"/>
+                </a:solidFill>
+                <a:latin typeface="Poppins"/>
+              </a:rPr>
+              <a:t>TO WALK HUMBLY WITH GOD.</a:t>
+            </a:r>
+          </a:p>
+        </p:txBody>
+      </p:sp>
+      <p:sp>
+        <p:nvSpPr>
+          <p:cNvPr id="4" name="TextBox 3"/>
           <p:cNvSpPr txBox="1"/>
           <p:nvPr/>
         </p:nvSpPr>
@@ -17805,13 +17822,13 @@
               </a:lnSpc>
             </a:pPr>
             <a:r>
-              <a:rPr sz="7500" b="1" i="0">
+              <a:rPr sz="6600" b="1" i="0">
                 <a:solidFill>
                   <a:srgbClr val="FFFFFF"/>
                 </a:solidFill>
                 <a:latin typeface="Poppins"/>
               </a:rPr>
-              <a:t>GOD OF DAYBREAK, GOD OF SHADOW,</a:t>
+              <a:t>COME! LIVE IN THE LIGHT!</a:t>
             </a:r>
           </a:p>
           <a:p>
@@ -17821,45 +17838,13 @@
               </a:lnSpc>
             </a:pPr>
             <a:r>
-              <a:rPr sz="7500" b="1" i="0">
+              <a:rPr sz="6600" b="1" i="0">
                 <a:solidFill>
                   <a:srgbClr val="FFFFFF"/>
                 </a:solidFill>
                 <a:latin typeface="Poppins"/>
               </a:rPr>
-              <a:t>COME INTO OUR RESTLESS LIVES;</a:t>
-            </a:r>
-          </a:p>
-          <a:p>
-            <a:pPr algn="ctr">
-              <a:lnSpc>
-                <a:spcPct val="70000"/>
-              </a:lnSpc>
-            </a:pPr>
-            <a:r>
-              <a:rPr sz="7500" b="1" i="0">
-                <a:solidFill>
-                  <a:srgbClr val="FFFFFF"/>
-                </a:solidFill>
-                <a:latin typeface="Poppins"/>
-              </a:rPr>
-              <a:t>LIFT FROM US THE FEAR OF SHADOWS,</a:t>
-            </a:r>
-          </a:p>
-          <a:p>
-            <a:pPr algn="ctr">
-              <a:lnSpc>
-                <a:spcPct val="70000"/>
-              </a:lnSpc>
-            </a:pPr>
-            <a:r>
-              <a:rPr sz="7500" b="1" i="0">
-                <a:solidFill>
-                  <a:srgbClr val="FFFFFF"/>
-                </a:solidFill>
-                <a:latin typeface="Poppins"/>
-              </a:rPr>
-              <a:t>THAT WE MAY ARISE WITH LIGHT.</a:t>
+              <a:t>SHINE WITH THE JOY AND THE LOVE OF THE LORD!</a:t>
             </a:r>
           </a:p>
         </p:txBody>
@@ -17964,7 +17949,55 @@
                 </a:solidFill>
                 <a:latin typeface="Poppins"/>
               </a:rPr>
-              <a:t>WE ARE CALLED TO ACT WITH JUSTICE...</a:t>
+              <a:t>GOD OF DAYBREAK, GOD OF SHADOW,</a:t>
+            </a:r>
+          </a:p>
+          <a:p>
+            <a:pPr algn="ctr">
+              <a:lnSpc>
+                <a:spcPct val="70000"/>
+              </a:lnSpc>
+            </a:pPr>
+            <a:r>
+              <a:rPr sz="7500" b="1" i="0">
+                <a:solidFill>
+                  <a:srgbClr val="FFFFFF"/>
+                </a:solidFill>
+                <a:latin typeface="Poppins"/>
+              </a:rPr>
+              <a:t>COME INTO OUR RESTLESS LIVES;</a:t>
+            </a:r>
+          </a:p>
+          <a:p>
+            <a:pPr algn="ctr">
+              <a:lnSpc>
+                <a:spcPct val="70000"/>
+              </a:lnSpc>
+            </a:pPr>
+            <a:r>
+              <a:rPr sz="7500" b="1" i="0">
+                <a:solidFill>
+                  <a:srgbClr val="FFFFFF"/>
+                </a:solidFill>
+                <a:latin typeface="Poppins"/>
+              </a:rPr>
+              <a:t>LIFT FROM US THE FEAR OF SHADOWS,</a:t>
+            </a:r>
+          </a:p>
+          <a:p>
+            <a:pPr algn="ctr">
+              <a:lnSpc>
+                <a:spcPct val="70000"/>
+              </a:lnSpc>
+            </a:pPr>
+            <a:r>
+              <a:rPr sz="7500" b="1" i="0">
+                <a:solidFill>
+                  <a:srgbClr val="FFFFFF"/>
+                </a:solidFill>
+                <a:latin typeface="Poppins"/>
+              </a:rPr>
+              <a:t>THAT WE MAY ARISE WITH LIGHT.</a:t>
             </a:r>
           </a:p>
         </p:txBody>
@@ -18069,7 +18102,7 @@
                 </a:solidFill>
                 <a:latin typeface="Poppins"/>
               </a:rPr>
-              <a:t>COME! LIVE IN THE LIGHT!...</a:t>
+              <a:t>WE ARE CALLED TO ACT WITH JUSTICE...</a:t>
             </a:r>
           </a:p>
         </p:txBody>
@@ -18168,61 +18201,13 @@
               </a:lnSpc>
             </a:pPr>
             <a:r>
-              <a:rPr sz="7400" b="1" i="0">
+              <a:rPr sz="7500" b="1" i="0">
                 <a:solidFill>
                   <a:srgbClr val="FFFFFF"/>
                 </a:solidFill>
                 <a:latin typeface="Poppins"/>
               </a:rPr>
-              <a:t>GOD OF NEWNESS, GOD OF FRESHNESS,</a:t>
-            </a:r>
-          </a:p>
-          <a:p>
-            <a:pPr algn="ctr">
-              <a:lnSpc>
-                <a:spcPct val="70000"/>
-              </a:lnSpc>
-            </a:pPr>
-            <a:r>
-              <a:rPr sz="7400" b="1" i="0">
-                <a:solidFill>
-                  <a:srgbClr val="FFFFFF"/>
-                </a:solidFill>
-                <a:latin typeface="Poppins"/>
-              </a:rPr>
-              <a:t>COME INTO OUR MORNING SONG:</a:t>
-            </a:r>
-          </a:p>
-          <a:p>
-            <a:pPr algn="ctr">
-              <a:lnSpc>
-                <a:spcPct val="70000"/>
-              </a:lnSpc>
-            </a:pPr>
-            <a:r>
-              <a:rPr sz="7400" b="1" i="0">
-                <a:solidFill>
-                  <a:srgbClr val="FFFFFF"/>
-                </a:solidFill>
-                <a:latin typeface="Poppins"/>
-              </a:rPr>
-              <a:t>GIVE TO US A NEW BEGINNING,</a:t>
-            </a:r>
-          </a:p>
-          <a:p>
-            <a:pPr algn="ctr">
-              <a:lnSpc>
-                <a:spcPct val="70000"/>
-              </a:lnSpc>
-            </a:pPr>
-            <a:r>
-              <a:rPr sz="7400" b="1" i="0">
-                <a:solidFill>
-                  <a:srgbClr val="FFFFFF"/>
-                </a:solidFill>
-                <a:latin typeface="Poppins"/>
-              </a:rPr>
-              <a:t>SEND US FORTH WITH HEARTS MADE STRONG.</a:t>
+              <a:t>COME! LIVE IN THE LIGHT!...</a:t>
             </a:r>
           </a:p>
         </p:txBody>
@@ -18468,7 +18453,7 @@
               <a:lnSpc>
                 <a:spcPct val="108000"/>
               </a:lnSpc>
-              <a:defRPr sz="3600" b="1" i="0" u="none">
+              <a:defRPr sz="3400" b="1" i="0" u="none">
                 <a:solidFill>
                   <a:srgbClr val="FFFFFF"/>
                 </a:solidFill>
@@ -18476,7 +18461,7 @@
               </a:defRPr>
             </a:pPr>
             <a:r>
-              <a:t>Rev. Fr. Jonrey Lauron, RCJ</a:t>
+              <a:t>Rev. Fr. Jonrey Lauron, RCJ · Divino Gabriel</a:t>
             </a:r>
           </a:p>
         </p:txBody>
@@ -18691,13 +18676,61 @@
               </a:lnSpc>
             </a:pPr>
             <a:r>
-              <a:rPr sz="7500" b="1" i="0">
+              <a:rPr sz="7400" b="1" i="0">
                 <a:solidFill>
                   <a:srgbClr val="FFFFFF"/>
                 </a:solidFill>
                 <a:latin typeface="Poppins"/>
               </a:rPr>
-              <a:t>WE ARE CALLED TO ACT WITH JUSTICE...</a:t>
+              <a:t>GOD OF NEWNESS, GOD OF FRESHNESS,</a:t>
+            </a:r>
+          </a:p>
+          <a:p>
+            <a:pPr algn="ctr">
+              <a:lnSpc>
+                <a:spcPct val="70000"/>
+              </a:lnSpc>
+            </a:pPr>
+            <a:r>
+              <a:rPr sz="7400" b="1" i="0">
+                <a:solidFill>
+                  <a:srgbClr val="FFFFFF"/>
+                </a:solidFill>
+                <a:latin typeface="Poppins"/>
+              </a:rPr>
+              <a:t>COME INTO OUR MORNING SONG:</a:t>
+            </a:r>
+          </a:p>
+          <a:p>
+            <a:pPr algn="ctr">
+              <a:lnSpc>
+                <a:spcPct val="70000"/>
+              </a:lnSpc>
+            </a:pPr>
+            <a:r>
+              <a:rPr sz="7400" b="1" i="0">
+                <a:solidFill>
+                  <a:srgbClr val="FFFFFF"/>
+                </a:solidFill>
+                <a:latin typeface="Poppins"/>
+              </a:rPr>
+              <a:t>GIVE TO US A NEW BEGINNING,</a:t>
+            </a:r>
+          </a:p>
+          <a:p>
+            <a:pPr algn="ctr">
+              <a:lnSpc>
+                <a:spcPct val="70000"/>
+              </a:lnSpc>
+            </a:pPr>
+            <a:r>
+              <a:rPr sz="7400" b="1" i="0">
+                <a:solidFill>
+                  <a:srgbClr val="FFFFFF"/>
+                </a:solidFill>
+                <a:latin typeface="Poppins"/>
+              </a:rPr>
+              <a:t>SEND US FORTH WITH HEARTS MADE STRONG.</a:t>
             </a:r>
           </a:p>
         </p:txBody>
@@ -18802,7 +18835,7 @@
                 </a:solidFill>
                 <a:latin typeface="Poppins"/>
               </a:rPr>
-              <a:t>COME! LIVE IN THE LIGHT!...</a:t>
+              <a:t>WE ARE CALLED TO ACT WITH JUSTICE...</a:t>
             </a:r>
           </a:p>
         </p:txBody>
@@ -18856,6 +18889,111 @@
 </file>
 
 <file path=ppt/slides/slide82.xml><?xml version="1.0" encoding="utf-8"?>
+<p:sld xmlns:a="http://schemas.openxmlformats.org/drawingml/2006/main" xmlns:p="http://schemas.openxmlformats.org/presentationml/2006/main" xmlns:r="http://schemas.openxmlformats.org/officeDocument/2006/relationships">
+  <p:cSld>
+    <p:bg>
+      <p:bgPr>
+        <a:solidFill>
+          <a:srgbClr val="000000"/>
+        </a:solidFill>
+        <a:effectLst/>
+      </p:bgPr>
+    </p:bg>
+    <p:spTree>
+      <p:nvGrpSpPr>
+        <p:cNvPr id="1" name=""/>
+        <p:cNvGrpSpPr/>
+        <p:nvPr/>
+      </p:nvGrpSpPr>
+      <p:grpSpPr/>
+      <p:sp>
+        <p:nvSpPr>
+          <p:cNvPr id="2" name="TextBox 1"/>
+          <p:cNvSpPr txBox="1"/>
+          <p:nvPr/>
+        </p:nvSpPr>
+        <p:spPr>
+          <a:xfrm>
+            <a:off x="0" y="0"/>
+            <a:ext cx="18288000" cy="10287000"/>
+          </a:xfrm>
+          <a:prstGeom prst="rect">
+            <a:avLst/>
+          </a:prstGeom>
+          <a:noFill/>
+        </p:spPr>
+        <p:txBody>
+          <a:bodyPr wrap="square" lIns="0" rIns="0" tIns="73152" bIns="73152" anchor="ctr">
+            <a:noAutofit/>
+          </a:bodyPr>
+          <a:lstStyle/>
+          <a:p>
+            <a:pPr algn="ctr">
+              <a:lnSpc>
+                <a:spcPct val="70000"/>
+              </a:lnSpc>
+            </a:pPr>
+            <a:r>
+              <a:rPr sz="7500" b="1" i="0">
+                <a:solidFill>
+                  <a:srgbClr val="FFFFFF"/>
+                </a:solidFill>
+                <a:latin typeface="Poppins"/>
+              </a:rPr>
+              <a:t>COME! LIVE IN THE LIGHT!...</a:t>
+            </a:r>
+          </a:p>
+        </p:txBody>
+      </p:sp>
+      <p:sp>
+        <p:nvSpPr>
+          <p:cNvPr id="3" name="TextBox 2"/>
+          <p:cNvSpPr txBox="1"/>
+          <p:nvPr/>
+        </p:nvSpPr>
+        <p:spPr>
+          <a:xfrm>
+            <a:off x="914400" y="9418320"/>
+            <a:ext cx="16459200" cy="777240"/>
+          </a:xfrm>
+          <a:prstGeom prst="rect">
+            <a:avLst/>
+          </a:prstGeom>
+          <a:noFill/>
+        </p:spPr>
+        <p:txBody>
+          <a:bodyPr wrap="square" lIns="109728" rIns="109728" tIns="73152" bIns="73152">
+            <a:noAutofit/>
+          </a:bodyPr>
+          <a:lstStyle/>
+          <a:p/>
+          <a:p>
+            <a:pPr>
+              <a:spcBef>
+                <a:spcPts val="200"/>
+              </a:spcBef>
+              <a:defRPr sz="1200" b="0" i="0" u="none">
+                <a:solidFill>
+                  <a:srgbClr val="FFCC4D"/>
+                </a:solidFill>
+                <a:latin typeface="Georgia"/>
+              </a:defRPr>
+            </a:pPr>
+            <a:r>
+              <a:t>Recessional</a:t>
+            </a:r>
+          </a:p>
+        </p:txBody>
+      </p:sp>
+    </p:spTree>
+  </p:cSld>
+  <p:clrMapOvr>
+    <a:masterClrMapping/>
+  </p:clrMapOvr>
+</p:sld>
+</file>
+
+<file path=ppt/slides/slide83.xml><?xml version="1.0" encoding="utf-8"?>
 <p:sld xmlns:a="http://schemas.openxmlformats.org/drawingml/2006/main" xmlns:p="http://schemas.openxmlformats.org/presentationml/2006/main" xmlns:r="http://schemas.openxmlformats.org/officeDocument/2006/relationships">
   <p:cSld>
     <p:bg>
@@ -19048,7 +19186,7 @@
               <a:lnSpc>
                 <a:spcPct val="108000"/>
               </a:lnSpc>
-              <a:defRPr sz="3600" b="1" i="0" u="none">
+              <a:defRPr sz="3400" b="1" i="0" u="none">
                 <a:solidFill>
                   <a:srgbClr val="FFFFFF"/>
                 </a:solidFill>
@@ -19056,7 +19194,7 @@
               </a:defRPr>
             </a:pPr>
             <a:r>
-              <a:t>Rev. Fr. Jonrey Lauron, RCJ</a:t>
+              <a:t>Rev. Fr. Jonrey Lauron, RCJ · Divino Gabriel</a:t>
             </a:r>
           </a:p>
         </p:txBody>

--- a/outputs/GFCC21Jun2026_12thSundayinOrdinaryTime.pptx
+++ b/outputs/GFCC21Jun2026_12thSundayinOrdinaryTime.pptx
@@ -83,11 +83,6 @@
     <p:sldId id="331" r:id="rId82"/>
     <p:sldId id="332" r:id="rId83"/>
     <p:sldId id="333" r:id="rId84"/>
-    <p:sldId id="334" r:id="rId85"/>
-    <p:sldId id="335" r:id="rId86"/>
-    <p:sldId id="336" r:id="rId87"/>
-    <p:sldId id="337" r:id="rId88"/>
-    <p:sldId id="338" r:id="rId89"/>
   </p:sldIdLst>
   <p:sldSz cx="18288000" cy="10287000" type="screen4x3"/>
   <p:notesSz cx="6858000" cy="9144000"/>
@@ -6269,7 +6264,7 @@
               <a:lnSpc>
                 <a:spcPct val="108000"/>
               </a:lnSpc>
-              <a:defRPr sz="3400" b="1" i="0" u="none">
+              <a:defRPr sz="3600" b="1" i="0" u="none">
                 <a:solidFill>
                   <a:srgbClr val="FFFFFF"/>
                 </a:solidFill>
@@ -6277,7 +6272,7 @@
               </a:defRPr>
             </a:pPr>
             <a:r>
-              <a:t>Rev. Fr. Jonrey Lauron, RCJ · Divino Gabriel</a:t>
+              <a:t>Rev. Fr. Jonrey Lauron, RCJ</a:t>
             </a:r>
           </a:p>
         </p:txBody>
@@ -7598,7 +7593,7 @@
               <a:lnSpc>
                 <a:spcPct val="108000"/>
               </a:lnSpc>
-              <a:defRPr sz="3400" b="1" i="0" u="none">
+              <a:defRPr sz="3600" b="1" i="0" u="none">
                 <a:solidFill>
                   <a:srgbClr val="FFFFFF"/>
                 </a:solidFill>
@@ -7606,7 +7601,7 @@
               </a:defRPr>
             </a:pPr>
             <a:r>
-              <a:t>Rev. Fr. Jonrey Lauron, RCJ · Divino Gabriel</a:t>
+              <a:t>Rev. Fr. Jonrey Lauron, RCJ</a:t>
             </a:r>
           </a:p>
         </p:txBody>
@@ -9009,7 +9004,7 @@
               <a:lnSpc>
                 <a:spcPct val="108000"/>
               </a:lnSpc>
-              <a:defRPr sz="3400" b="1" i="0" u="none">
+              <a:defRPr sz="3600" b="1" i="0" u="none">
                 <a:solidFill>
                   <a:srgbClr val="FFFFFF"/>
                 </a:solidFill>
@@ -9017,7 +9012,7 @@
               </a:defRPr>
             </a:pPr>
             <a:r>
-              <a:t>Rev. Fr. Jonrey Lauron, RCJ · Divino Gabriel</a:t>
+              <a:t>Rev. Fr. Jonrey Lauron, RCJ</a:t>
             </a:r>
           </a:p>
         </p:txBody>
@@ -9652,7 +9647,7 @@
               <a:lnSpc>
                 <a:spcPct val="108000"/>
               </a:lnSpc>
-              <a:defRPr sz="3400" b="1" i="0" u="none">
+              <a:defRPr sz="3600" b="1" i="0" u="none">
                 <a:solidFill>
                   <a:srgbClr val="FFFFFF"/>
                 </a:solidFill>
@@ -9660,7 +9655,7 @@
               </a:defRPr>
             </a:pPr>
             <a:r>
-              <a:t>Rev. Fr. Jonrey Lauron, RCJ · Divino Gabriel</a:t>
+              <a:t>Rev. Fr. Jonrey Lauron, RCJ</a:t>
             </a:r>
           </a:p>
         </p:txBody>
@@ -11848,9 +11843,9 @@
                 <a:spcPts val="400"/>
               </a:spcBef>
               <a:spcAft>
-                <a:spcPts val="800"/>
+                <a:spcPts val="574"/>
               </a:spcAft>
-              <a:defRPr sz="5500" b="1" i="0" u="none">
+              <a:defRPr sz="4100" b="1" i="0" u="none">
                 <a:solidFill>
                   <a:srgbClr val="FFFFFF"/>
                 </a:solidFill>
@@ -11858,15 +11853,15 @@
               </a:defRPr>
             </a:pPr>
             <a:r>
-              <a:t>Our Father, who art in heaven,</a:t>
+              <a:t>하늘에 계신 우리 아버지,</a:t>
             </a:r>
           </a:p>
           <a:p>
             <a:pPr algn="ctr">
               <a:spcAft>
-                <a:spcPts val="800"/>
+                <a:spcPts val="574"/>
               </a:spcAft>
-              <a:defRPr sz="5500" b="0" i="0" u="none">
+              <a:defRPr sz="4100" b="0" i="0" u="none">
                 <a:solidFill>
                   <a:srgbClr val="FFFFFF"/>
                 </a:solidFill>
@@ -11874,15 +11869,15 @@
               </a:defRPr>
             </a:pPr>
             <a:r>
-              <a:t>hallowed be thy name;</a:t>
+              <a:t>아버지의 이름이 거룩히 빛나시며</a:t>
             </a:r>
           </a:p>
           <a:p>
             <a:pPr algn="ctr">
               <a:spcAft>
-                <a:spcPts val="800"/>
+                <a:spcPts val="574"/>
               </a:spcAft>
-              <a:defRPr sz="5500" b="0" i="0" u="none">
+              <a:defRPr sz="4100" b="0" i="0" u="none">
                 <a:solidFill>
                   <a:srgbClr val="FFFFFF"/>
                 </a:solidFill>
@@ -11890,15 +11885,15 @@
               </a:defRPr>
             </a:pPr>
             <a:r>
-              <a:t>thy kingdom come,</a:t>
+              <a:t>아버지의 나라가 오시며</a:t>
             </a:r>
           </a:p>
           <a:p>
             <a:pPr algn="ctr">
               <a:spcAft>
-                <a:spcPts val="800"/>
+                <a:spcPts val="574"/>
               </a:spcAft>
-              <a:defRPr sz="5500" b="0" i="0" u="none">
+              <a:defRPr sz="4100" b="0" i="0" u="none">
                 <a:solidFill>
                   <a:srgbClr val="FFFFFF"/>
                 </a:solidFill>
@@ -11906,15 +11901,15 @@
               </a:defRPr>
             </a:pPr>
             <a:r>
-              <a:t>thy will be done,</a:t>
+              <a:t>아버지의 뜻이 하늘에서와 같이 땅에서도 이루어지소서.</a:t>
             </a:r>
           </a:p>
           <a:p>
             <a:pPr algn="ctr">
               <a:spcAft>
-                <a:spcPts val="800"/>
+                <a:spcPts val="574"/>
               </a:spcAft>
-              <a:defRPr sz="5500" b="0" i="0" u="none">
+              <a:defRPr sz="4100" b="0" i="0" u="none">
                 <a:solidFill>
                   <a:srgbClr val="FFFFFF"/>
                 </a:solidFill>
@@ -11922,7 +11917,90 @@
               </a:defRPr>
             </a:pPr>
             <a:r>
-              <a:t>on earth as it is in heaven.</a:t>
+              <a:t>오늘 저희에게 일용할 양식을 주시고</a:t>
+            </a:r>
+          </a:p>
+          <a:p>
+            <a:pPr algn="ctr">
+              <a:spcAft>
+                <a:spcPts val="574"/>
+              </a:spcAft>
+              <a:defRPr sz="4100" b="0" i="0" u="none">
+                <a:solidFill>
+                  <a:srgbClr val="FFFFFF"/>
+                </a:solidFill>
+                <a:latin typeface="Georgia"/>
+              </a:defRPr>
+            </a:pPr>
+            <a:r>
+              <a:t>저희에게 잘못한 이를 저희가 용서하오니</a:t>
+            </a:r>
+          </a:p>
+          <a:p>
+            <a:pPr algn="ctr">
+              <a:spcAft>
+                <a:spcPts val="574"/>
+              </a:spcAft>
+              <a:defRPr sz="4100" b="0" i="0" u="none">
+                <a:solidFill>
+                  <a:srgbClr val="FFFFFF"/>
+                </a:solidFill>
+                <a:latin typeface="Georgia"/>
+              </a:defRPr>
+            </a:pPr>
+            <a:r>
+              <a:t>저희 죄를 용서하시고</a:t>
+            </a:r>
+          </a:p>
+          <a:p>
+            <a:pPr algn="ctr">
+              <a:spcAft>
+                <a:spcPts val="574"/>
+              </a:spcAft>
+              <a:defRPr sz="4100" b="0" i="0" u="none">
+                <a:solidFill>
+                  <a:srgbClr val="FFFFFF"/>
+                </a:solidFill>
+                <a:latin typeface="Georgia"/>
+              </a:defRPr>
+            </a:pPr>
+            <a:r>
+              <a:t>저희를 유혹에 빠지지 않게 하시고</a:t>
+            </a:r>
+          </a:p>
+          <a:p>
+            <a:pPr algn="ctr">
+              <a:spcAft>
+                <a:spcPts val="574"/>
+              </a:spcAft>
+              <a:defRPr sz="4100" b="0" i="0" u="none">
+                <a:solidFill>
+                  <a:srgbClr val="FFFFFF"/>
+                </a:solidFill>
+                <a:latin typeface="Georgia"/>
+              </a:defRPr>
+            </a:pPr>
+            <a:r>
+              <a:t>악에서 구하소서.</a:t>
+            </a:r>
+          </a:p>
+          <a:p>
+            <a:pPr algn="ctr">
+              <a:spcBef>
+                <a:spcPts val="400"/>
+              </a:spcBef>
+              <a:spcAft>
+                <a:spcPts val="574"/>
+              </a:spcAft>
+              <a:defRPr sz="4100" b="1" i="0" u="none">
+                <a:solidFill>
+                  <a:srgbClr val="FFFFFF"/>
+                </a:solidFill>
+                <a:latin typeface="Georgia"/>
+              </a:defRPr>
+            </a:pPr>
+            <a:r>
+              <a:t>주님께 나라와 권능과 영광이 영원히 있나이다. 아멘.</a:t>
             </a:r>
           </a:p>
         </p:txBody>
@@ -11962,7 +12040,7 @@
               </a:defRPr>
             </a:pPr>
             <a:r>
-              <a:t>Our Father (1/5)</a:t>
+              <a:t>Our Father</a:t>
             </a:r>
           </a:p>
         </p:txBody>
@@ -11980,9 +12058,17 @@
   <p:cSld>
     <p:bg>
       <p:bgPr>
-        <a:solidFill>
-          <a:srgbClr val="211733"/>
-        </a:solidFill>
+        <a:gradFill rotWithShape="1">
+          <a:gsLst>
+            <a:gs pos="0">
+              <a:srgbClr val="0C0B11"/>
+            </a:gs>
+            <a:gs pos="100000">
+              <a:srgbClr val="5F586C"/>
+            </a:gs>
+          </a:gsLst>
+          <a:lin scaled="0" ang="0"/>
+        </a:gradFill>
         <a:effectLst/>
       </p:bgPr>
     </p:bg>
@@ -11995,14 +12081,116 @@
       <p:grpSpPr/>
       <p:sp>
         <p:nvSpPr>
-          <p:cNvPr id="2" name="TextBox 1"/>
+          <p:cNvPr id="2" name="Rounded Rectangle 1"/>
+          <p:cNvSpPr/>
+          <p:nvPr/>
+        </p:nvSpPr>
+        <p:spPr>
+          <a:xfrm>
+            <a:off x="6856171" y="1269187"/>
+            <a:ext cx="10943539" cy="6128308"/>
+          </a:xfrm>
+          <a:prstGeom prst="roundRect">
+            <a:avLst>
+              <a:gd name="adj" fmla="val 16670"/>
+            </a:avLst>
+          </a:prstGeom>
+          <a:solidFill>
+            <a:srgbClr val="211733">
+              <a:alpha val="44706"/>
+            </a:srgbClr>
+          </a:solidFill>
+          <a:ln w="14299" cap="sq">
+            <a:solidFill>
+              <a:srgbClr val="6C6678">
+                <a:alpha val="44706"/>
+              </a:srgbClr>
+            </a:solidFill>
+          </a:ln>
+        </p:spPr>
+        <p:style>
+          <a:lnRef idx="1">
+            <a:schemeClr val="accent1"/>
+          </a:lnRef>
+          <a:fillRef idx="3">
+            <a:schemeClr val="accent1"/>
+          </a:fillRef>
+          <a:effectRef idx="2">
+            <a:schemeClr val="accent1"/>
+          </a:effectRef>
+          <a:fontRef idx="minor">
+            <a:schemeClr val="lt1"/>
+          </a:fontRef>
+        </p:style>
+        <p:txBody>
+          <a:bodyPr rtlCol="0" anchor="ctr"/>
+          <a:lstStyle/>
+          <a:p>
+            <a:pPr algn="ctr"/>
+          </a:p>
+        </p:txBody>
+      </p:sp>
+      <p:sp>
+        <p:nvSpPr>
+          <p:cNvPr id="3" name="Rounded Rectangle 2"/>
+          <p:cNvSpPr/>
+          <p:nvPr/>
+        </p:nvSpPr>
+        <p:spPr>
+          <a:xfrm>
+            <a:off x="900684" y="8503005"/>
+            <a:ext cx="16486632" cy="1112824"/>
+          </a:xfrm>
+          <a:prstGeom prst="roundRect">
+            <a:avLst>
+              <a:gd name="adj" fmla="val 16670"/>
+            </a:avLst>
+          </a:prstGeom>
+          <a:solidFill>
+            <a:srgbClr val="161122">
+              <a:alpha val="60784"/>
+            </a:srgbClr>
+          </a:solidFill>
+          <a:ln w="14299" cap="sq">
+            <a:solidFill>
+              <a:srgbClr val="161122">
+                <a:alpha val="60784"/>
+              </a:srgbClr>
+            </a:solidFill>
+          </a:ln>
+        </p:spPr>
+        <p:style>
+          <a:lnRef idx="1">
+            <a:schemeClr val="accent1"/>
+          </a:lnRef>
+          <a:fillRef idx="3">
+            <a:schemeClr val="accent1"/>
+          </a:fillRef>
+          <a:effectRef idx="2">
+            <a:schemeClr val="accent1"/>
+          </a:effectRef>
+          <a:fontRef idx="minor">
+            <a:schemeClr val="lt1"/>
+          </a:fontRef>
+        </p:style>
+        <p:txBody>
+          <a:bodyPr rtlCol="0" anchor="ctr"/>
+          <a:lstStyle/>
+          <a:p>
+            <a:pPr algn="ctr"/>
+          </a:p>
+        </p:txBody>
+      </p:sp>
+      <p:sp>
+        <p:nvSpPr>
+          <p:cNvPr id="4" name="TextBox 3"/>
           <p:cNvSpPr txBox="1"/>
           <p:nvPr/>
         </p:nvSpPr>
         <p:spPr>
           <a:xfrm>
-            <a:off x="914400" y="530352"/>
-            <a:ext cx="16459200" cy="8750808"/>
+            <a:off x="1284732" y="2390241"/>
+            <a:ext cx="4209897" cy="638251"/>
           </a:xfrm>
           <a:prstGeom prst="rect">
             <a:avLst/>
@@ -12016,80 +12204,32 @@
           <a:lstStyle/>
           <a:p>
             <a:pPr algn="ctr">
-              <a:spcAft>
-                <a:spcPts val="800"/>
-              </a:spcAft>
-              <a:defRPr sz="5500" b="0" i="0" u="none">
-                <a:solidFill>
-                  <a:srgbClr val="FFFFFF"/>
-                </a:solidFill>
-                <a:latin typeface="Georgia"/>
-              </a:defRPr>
-            </a:pPr>
-            <a:r>
-              <a:t>Give us this day our daily bread;</a:t>
-            </a:r>
-          </a:p>
-          <a:p>
-            <a:pPr algn="ctr">
-              <a:spcAft>
-                <a:spcPts val="800"/>
-              </a:spcAft>
-              <a:defRPr sz="5500" b="0" i="0" u="none">
-                <a:solidFill>
-                  <a:srgbClr val="FFFFFF"/>
-                </a:solidFill>
-                <a:latin typeface="Georgia"/>
-              </a:defRPr>
-            </a:pPr>
-            <a:r>
-              <a:t>and forgive us our trespasses,</a:t>
-            </a:r>
-          </a:p>
-          <a:p>
-            <a:pPr algn="ctr">
-              <a:spcAft>
-                <a:spcPts val="800"/>
-              </a:spcAft>
-              <a:defRPr sz="5500" b="0" i="0" u="none">
-                <a:solidFill>
-                  <a:srgbClr val="FFFFFF"/>
-                </a:solidFill>
-                <a:latin typeface="Georgia"/>
-              </a:defRPr>
-            </a:pPr>
-            <a:r>
-              <a:t>as we forgive those who trespass against us;</a:t>
-            </a:r>
-          </a:p>
-          <a:p>
-            <a:pPr algn="ctr">
-              <a:spcAft>
-                <a:spcPts val="800"/>
-              </a:spcAft>
-              <a:defRPr sz="5500" b="0" i="0" u="none">
-                <a:solidFill>
-                  <a:srgbClr val="FFFFFF"/>
-                </a:solidFill>
-                <a:latin typeface="Georgia"/>
-              </a:defRPr>
-            </a:pPr>
-            <a:r>
-              <a:t>and lead us not into temptation,</a:t>
-            </a:r>
-          </a:p>
-        </p:txBody>
-      </p:sp>
-      <p:sp>
-        <p:nvSpPr>
-          <p:cNvPr id="3" name="TextBox 2"/>
+              <a:lnSpc>
+                <a:spcPct val="108000"/>
+              </a:lnSpc>
+              <a:defRPr sz="3700" b="1" i="0" u="none">
+                <a:solidFill>
+                  <a:srgbClr val="E8D4FE"/>
+                </a:solidFill>
+                <a:latin typeface="Calibri"/>
+              </a:defRPr>
+            </a:pPr>
+            <a:r>
+              <a:t>MASS CELEBRANT:</a:t>
+            </a:r>
+          </a:p>
+        </p:txBody>
+      </p:sp>
+      <p:sp>
+        <p:nvSpPr>
+          <p:cNvPr id="5" name="TextBox 4"/>
           <p:cNvSpPr txBox="1"/>
           <p:nvPr/>
         </p:nvSpPr>
         <p:spPr>
           <a:xfrm>
-            <a:off x="914400" y="9418320"/>
-            <a:ext cx="16459200" cy="777240"/>
+            <a:off x="267004" y="3053181"/>
+            <a:ext cx="6589166" cy="1057046"/>
           </a:xfrm>
           <a:prstGeom prst="rect">
             <a:avLst/>
@@ -12097,25 +12237,180 @@
           <a:noFill/>
         </p:spPr>
         <p:txBody>
-          <a:bodyPr wrap="square" lIns="109728" rIns="109728" tIns="73152" bIns="73152">
-            <a:noAutofit/>
-          </a:bodyPr>
-          <a:lstStyle/>
-          <a:p/>
-          <a:p>
-            <a:pPr algn="l">
-              <a:spcBef>
-                <a:spcPts val="200"/>
-              </a:spcBef>
-              <a:defRPr sz="1200" b="0" i="0" u="none">
-                <a:solidFill>
-                  <a:srgbClr val="D8B4FE"/>
-                </a:solidFill>
-                <a:latin typeface="Georgia"/>
-              </a:defRPr>
-            </a:pPr>
-            <a:r>
-              <a:t>Our Father (2/5)</a:t>
+          <a:bodyPr wrap="square" lIns="109728" rIns="109728" tIns="73152" bIns="73152" anchor="ctr">
+            <a:noAutofit/>
+          </a:bodyPr>
+          <a:lstStyle/>
+          <a:p>
+            <a:pPr algn="ctr">
+              <a:lnSpc>
+                <a:spcPct val="108000"/>
+              </a:lnSpc>
+              <a:defRPr sz="3600" b="1" i="0" u="none">
+                <a:solidFill>
+                  <a:srgbClr val="FFFFFF"/>
+                </a:solidFill>
+                <a:latin typeface="Calibri"/>
+              </a:defRPr>
+            </a:pPr>
+            <a:r>
+              <a:t>Rev. Fr. Jonrey Lauron, RCJ</a:t>
+            </a:r>
+          </a:p>
+        </p:txBody>
+      </p:sp>
+      <p:sp>
+        <p:nvSpPr>
+          <p:cNvPr id="6" name="TextBox 5"/>
+          <p:cNvSpPr txBox="1"/>
+          <p:nvPr/>
+        </p:nvSpPr>
+        <p:spPr>
+          <a:xfrm>
+            <a:off x="267004" y="4429353"/>
+            <a:ext cx="6589166" cy="868680"/>
+          </a:xfrm>
+          <a:prstGeom prst="rect">
+            <a:avLst/>
+          </a:prstGeom>
+          <a:noFill/>
+        </p:spPr>
+        <p:txBody>
+          <a:bodyPr wrap="square" lIns="109728" rIns="109728" tIns="73152" bIns="73152" anchor="ctr">
+            <a:noAutofit/>
+          </a:bodyPr>
+          <a:lstStyle/>
+          <a:p>
+            <a:pPr algn="ctr">
+              <a:lnSpc>
+                <a:spcPct val="108000"/>
+              </a:lnSpc>
+              <a:defRPr sz="4700" b="1" i="1" u="none">
+                <a:solidFill>
+                  <a:srgbClr val="FFFFFF"/>
+                </a:solidFill>
+                <a:latin typeface="Calibri"/>
+              </a:defRPr>
+            </a:pPr>
+            <a:r>
+              <a:t>YEAR A · 21 JUNE 2026</a:t>
+            </a:r>
+          </a:p>
+        </p:txBody>
+      </p:sp>
+      <p:sp>
+        <p:nvSpPr>
+          <p:cNvPr id="7" name="TextBox 6"/>
+          <p:cNvSpPr txBox="1"/>
+          <p:nvPr/>
+        </p:nvSpPr>
+        <p:spPr>
+          <a:xfrm>
+            <a:off x="6900062" y="2390241"/>
+            <a:ext cx="10775289" cy="2422245"/>
+          </a:xfrm>
+          <a:prstGeom prst="rect">
+            <a:avLst/>
+          </a:prstGeom>
+          <a:noFill/>
+        </p:spPr>
+        <p:txBody>
+          <a:bodyPr wrap="square" lIns="109728" rIns="109728" tIns="73152" bIns="73152" anchor="ctr">
+            <a:noAutofit/>
+          </a:bodyPr>
+          <a:lstStyle/>
+          <a:p>
+            <a:pPr algn="ctr">
+              <a:lnSpc>
+                <a:spcPct val="108000"/>
+              </a:lnSpc>
+              <a:defRPr sz="3900" b="0" i="0" u="none">
+                <a:solidFill>
+                  <a:srgbClr val="FEF5E4"/>
+                </a:solidFill>
+                <a:latin typeface="Calibri"/>
+              </a:defRPr>
+            </a:pPr>
+            <a:r>
+              <a:t>“Fear no one.”</a:t>
+            </a:r>
+          </a:p>
+        </p:txBody>
+      </p:sp>
+      <p:sp>
+        <p:nvSpPr>
+          <p:cNvPr id="8" name="TextBox 7"/>
+          <p:cNvSpPr txBox="1"/>
+          <p:nvPr/>
+        </p:nvSpPr>
+        <p:spPr>
+          <a:xfrm>
+            <a:off x="9378086" y="5801868"/>
+            <a:ext cx="5819241" cy="705002"/>
+          </a:xfrm>
+          <a:prstGeom prst="rect">
+            <a:avLst/>
+          </a:prstGeom>
+          <a:noFill/>
+        </p:spPr>
+        <p:txBody>
+          <a:bodyPr wrap="square" lIns="109728" rIns="109728" tIns="73152" bIns="73152" anchor="ctr">
+            <a:noAutofit/>
+          </a:bodyPr>
+          <a:lstStyle/>
+          <a:p>
+            <a:pPr algn="ctr">
+              <a:lnSpc>
+                <a:spcPct val="108000"/>
+              </a:lnSpc>
+              <a:defRPr sz="3500" b="1" i="0" u="none">
+                <a:solidFill>
+                  <a:srgbClr val="DDBDFE"/>
+                </a:solidFill>
+                <a:latin typeface="Calibri"/>
+              </a:defRPr>
+            </a:pPr>
+            <a:r>
+              <a:t>GOSPEL (MATTHEW 10:26–33)</a:t>
+            </a:r>
+          </a:p>
+        </p:txBody>
+      </p:sp>
+      <p:sp>
+        <p:nvSpPr>
+          <p:cNvPr id="9" name="TextBox 8"/>
+          <p:cNvSpPr txBox="1"/>
+          <p:nvPr/>
+        </p:nvSpPr>
+        <p:spPr>
+          <a:xfrm>
+            <a:off x="3195828" y="8411565"/>
+            <a:ext cx="12362688" cy="1162202"/>
+          </a:xfrm>
+          <a:prstGeom prst="rect">
+            <a:avLst/>
+          </a:prstGeom>
+          <a:noFill/>
+        </p:spPr>
+        <p:txBody>
+          <a:bodyPr wrap="square" lIns="109728" rIns="109728" tIns="73152" bIns="73152" anchor="ctr">
+            <a:noAutofit/>
+          </a:bodyPr>
+          <a:lstStyle/>
+          <a:p>
+            <a:pPr algn="ctr">
+              <a:lnSpc>
+                <a:spcPct val="108000"/>
+              </a:lnSpc>
+              <a:defRPr sz="6600" b="1" i="0" u="none">
+                <a:solidFill>
+                  <a:srgbClr val="FFFFFF"/>
+                </a:solidFill>
+                <a:latin typeface="Calibri"/>
+              </a:defRPr>
+            </a:pPr>
+            <a:r>
+              <a:t>12th Sunday in Ordinary Time</a:t>
             </a:r>
           </a:p>
         </p:txBody>
@@ -12148,46 +12443,202 @@
       <p:grpSpPr/>
       <p:sp>
         <p:nvSpPr>
-          <p:cNvPr id="2" name="TextBox 1"/>
-          <p:cNvSpPr txBox="1"/>
-          <p:nvPr/>
-        </p:nvSpPr>
-        <p:spPr>
-          <a:xfrm>
-            <a:off x="914400" y="530352"/>
-            <a:ext cx="16459200" cy="8750808"/>
-          </a:xfrm>
-          <a:prstGeom prst="rect">
-            <a:avLst/>
-          </a:prstGeom>
-          <a:noFill/>
-        </p:spPr>
-        <p:txBody>
-          <a:bodyPr wrap="square" lIns="109728" rIns="109728" tIns="73152" bIns="73152" anchor="ctr">
-            <a:noAutofit/>
-          </a:bodyPr>
-          <a:lstStyle/>
-          <a:p>
-            <a:pPr algn="ctr">
-              <a:spcAft>
-                <a:spcPts val="800"/>
-              </a:spcAft>
-              <a:defRPr sz="5500" b="0" i="0" u="none">
-                <a:solidFill>
-                  <a:srgbClr val="FFFFFF"/>
+          <p:cNvPr name="TextBox 2" id="2"/>
+          <p:cNvSpPr txBox="true"/>
+          <p:nvPr/>
+        </p:nvSpPr>
+        <p:spPr>
+          <a:xfrm rot="0">
+            <a:off x="2927842" y="1531619"/>
+            <a:ext cx="12432316" cy="2144014"/>
+          </a:xfrm>
+          <a:prstGeom prst="rect">
+            <a:avLst/>
+          </a:prstGeom>
+        </p:spPr>
+        <p:txBody>
+          <a:bodyPr anchor="t" rtlCol="false" tIns="0" lIns="0" bIns="0" rIns="0">
+            <a:spAutoFit/>
+          </a:bodyPr>
+          <a:lstStyle/>
+          <a:p>
+            <a:pPr algn="just" marL="0" indent="0" lvl="0">
+              <a:lnSpc>
+                <a:spcPts val="8228"/>
+              </a:lnSpc>
+              <a:defRPr/>
+            </a:pPr>
+            <a:r>
+              <a:rPr lang="en-US" b="true" sz="6800">
+                <a:solidFill>
+                  <a:srgbClr val="F8B300"/>
+                </a:solidFill>
+                <a:latin typeface="Poppins Semi-Bold"/>
+                <a:ea typeface="Poppins Semi-Bold"/>
+                <a:cs typeface="Poppins Semi-Bold"/>
+                <a:sym typeface="Poppins Semi-Bold"/>
+              </a:rPr>
+              <a:t>Priest</a:t>
+            </a:r>
+            <a:r>
+              <a:rPr lang="en-US" b="true" sz="6800">
+                <a:solidFill>
+                  <a:srgbClr val="FFFFFF"/>
+                </a:solidFill>
+                <a:latin typeface="Poppins Semi-Bold"/>
+                <a:ea typeface="Poppins Semi-Bold"/>
+                <a:cs typeface="Poppins Semi-Bold"/>
+                <a:sym typeface="Poppins Semi-Bold"/>
+              </a:rPr>
+              <a:t>: The peace of the Lord be with you.</a:t>
+            </a:r>
+          </a:p>
+        </p:txBody>
+      </p:sp>
+      <p:sp>
+        <p:nvSpPr>
+          <p:cNvPr name="TextBox 3" id="3"/>
+          <p:cNvSpPr txBox="true"/>
+          <p:nvPr/>
+        </p:nvSpPr>
+        <p:spPr>
+          <a:xfrm rot="0">
+            <a:off x="1646296" y="226228"/>
+            <a:ext cx="14995409" cy="1055243"/>
+          </a:xfrm>
+          <a:prstGeom prst="rect">
+            <a:avLst/>
+          </a:prstGeom>
+        </p:spPr>
+        <p:txBody>
+          <a:bodyPr anchor="t" rtlCol="false" tIns="0" lIns="0" bIns="0" rIns="0">
+            <a:spAutoFit/>
+          </a:bodyPr>
+          <a:lstStyle/>
+          <a:p>
+            <a:pPr algn="ctr" marL="0" indent="0" lvl="0">
+              <a:lnSpc>
+                <a:spcPts val="8175"/>
+              </a:lnSpc>
+              <a:spcBef>
+                <a:spcPct val="0"/>
+              </a:spcBef>
+              <a:defRPr/>
+            </a:pPr>
+            <a:r>
+              <a:rPr lang="en-US" sz="3850">
+                <a:solidFill>
+                  <a:srgbClr val="FFB800"/>
                 </a:solidFill>
                 <a:latin typeface="Georgia"/>
-              </a:defRPr>
-            </a:pPr>
-            <a:r>
-              <a:t>but deliver us from evil.</a:t>
-            </a:r>
-          </a:p>
-        </p:txBody>
-      </p:sp>
-      <p:sp>
-        <p:nvSpPr>
-          <p:cNvPr id="3" name="TextBox 2"/>
+                <a:ea typeface="Recoleta"/>
+                <a:cs typeface="Recoleta"/>
+                <a:sym typeface="Recoleta"/>
+              </a:rPr>
+              <a:t>Sign Of Peace</a:t>
+            </a:r>
+          </a:p>
+        </p:txBody>
+      </p:sp>
+      <p:sp>
+        <p:nvSpPr>
+          <p:cNvPr name="TextBox 4" id="4"/>
+          <p:cNvSpPr txBox="true"/>
+          <p:nvPr/>
+        </p:nvSpPr>
+        <p:spPr>
+          <a:xfrm rot="0">
+            <a:off x="2927842" y="3637533"/>
+            <a:ext cx="12432316" cy="1124585"/>
+          </a:xfrm>
+          <a:prstGeom prst="rect">
+            <a:avLst/>
+          </a:prstGeom>
+        </p:spPr>
+        <p:txBody>
+          <a:bodyPr anchor="t" rtlCol="false" tIns="0" lIns="0" bIns="0" rIns="0">
+            <a:spAutoFit/>
+          </a:bodyPr>
+          <a:lstStyle/>
+          <a:p>
+            <a:pPr algn="l" marL="0" indent="0" lvl="0">
+              <a:lnSpc>
+                <a:spcPts val="8469"/>
+              </a:lnSpc>
+              <a:defRPr/>
+            </a:pPr>
+            <a:r>
+              <a:rPr lang="en-US" b="true" sz="6999">
+                <a:solidFill>
+                  <a:srgbClr val="FFFFFF"/>
+                </a:solidFill>
+                <a:latin typeface="Poppins Bold"/>
+                <a:ea typeface="Poppins Bold"/>
+                <a:cs typeface="Poppins Bold"/>
+                <a:sym typeface="Poppins Bold"/>
+              </a:rPr>
+              <a:t>All: And with your spirit.</a:t>
+            </a:r>
+          </a:p>
+        </p:txBody>
+      </p:sp>
+      <p:sp>
+        <p:nvSpPr>
+          <p:cNvPr name="TextBox 6" id="6"/>
+          <p:cNvSpPr txBox="true"/>
+          <p:nvPr/>
+        </p:nvSpPr>
+        <p:spPr>
+          <a:xfrm rot="0">
+            <a:off x="2927842" y="5932826"/>
+            <a:ext cx="12432316" cy="2144014"/>
+          </a:xfrm>
+          <a:prstGeom prst="rect">
+            <a:avLst/>
+          </a:prstGeom>
+        </p:spPr>
+        <p:txBody>
+          <a:bodyPr anchor="t" rtlCol="false" tIns="0" lIns="0" bIns="0" rIns="0">
+            <a:spAutoFit/>
+          </a:bodyPr>
+          <a:lstStyle/>
+          <a:p>
+            <a:pPr algn="l" marL="0" indent="0" lvl="0">
+              <a:lnSpc>
+                <a:spcPts val="8228"/>
+              </a:lnSpc>
+              <a:defRPr/>
+            </a:pPr>
+            <a:r>
+              <a:rPr lang="en-US" b="true" sz="6800">
+                <a:solidFill>
+                  <a:srgbClr val="F8B300"/>
+                </a:solidFill>
+                <a:latin typeface="Poppins Semi-Bold"/>
+                <a:ea typeface="Poppins Semi-Bold"/>
+                <a:cs typeface="Poppins Semi-Bold"/>
+                <a:sym typeface="Poppins Semi-Bold"/>
+              </a:rPr>
+              <a:t>Priest</a:t>
+            </a:r>
+            <a:r>
+              <a:rPr lang="en-US" b="true" sz="6800">
+                <a:solidFill>
+                  <a:srgbClr val="FFFFFF"/>
+                </a:solidFill>
+                <a:latin typeface="Poppins Semi-Bold"/>
+                <a:ea typeface="Poppins Semi-Bold"/>
+                <a:cs typeface="Poppins Semi-Bold"/>
+                <a:sym typeface="Poppins Semi-Bold"/>
+              </a:rPr>
+              <a:t>: Let us offer each other the sign of peace. </a:t>
+            </a:r>
+          </a:p>
+        </p:txBody>
+      </p:sp>
+      <p:sp>
+        <p:nvSpPr>
+          <p:cNvPr id="7" name="TextBox 6"/>
           <p:cNvSpPr txBox="1"/>
           <p:nvPr/>
         </p:nvSpPr>
@@ -12220,7 +12671,7 @@
               </a:defRPr>
             </a:pPr>
             <a:r>
-              <a:t>Our Father (3/5)</a:t>
+              <a:t>Sign of Peace</a:t>
             </a:r>
           </a:p>
         </p:txBody>
@@ -12406,49 +12857,442 @@
       <p:grpSpPr/>
       <p:sp>
         <p:nvSpPr>
-          <p:cNvPr id="2" name="TextBox 1"/>
-          <p:cNvSpPr txBox="1"/>
-          <p:nvPr/>
-        </p:nvSpPr>
-        <p:spPr>
-          <a:xfrm>
-            <a:off x="914400" y="530352"/>
-            <a:ext cx="16459200" cy="8750808"/>
-          </a:xfrm>
-          <a:prstGeom prst="rect">
-            <a:avLst/>
-          </a:prstGeom>
-          <a:noFill/>
-        </p:spPr>
-        <p:txBody>
-          <a:bodyPr wrap="square" lIns="109728" rIns="109728" tIns="73152" bIns="73152" anchor="ctr">
-            <a:noAutofit/>
-          </a:bodyPr>
-          <a:lstStyle/>
-          <a:p>
-            <a:pPr algn="ctr">
+          <p:cNvPr name="TextBox 2" id="2"/>
+          <p:cNvSpPr txBox="true"/>
+          <p:nvPr/>
+        </p:nvSpPr>
+        <p:spPr>
+          <a:xfrm rot="0">
+            <a:off x="2245772" y="1447327"/>
+            <a:ext cx="14598201" cy="2576449"/>
+          </a:xfrm>
+          <a:prstGeom prst="rect">
+            <a:avLst/>
+          </a:prstGeom>
+        </p:spPr>
+        <p:txBody>
+          <a:bodyPr anchor="t" rtlCol="false" tIns="0" lIns="0" bIns="0" rIns="0">
+            <a:spAutoFit/>
+          </a:bodyPr>
+          <a:lstStyle/>
+          <a:p>
+            <a:pPr algn="l">
+              <a:lnSpc>
+                <a:spcPts val="6608"/>
+              </a:lnSpc>
+              <a:defRPr/>
+            </a:pPr>
+            <a:r>
+              <a:rPr lang="en-US" sz="5600" b="1">
+                <a:solidFill>
+                  <a:srgbClr val="FFFFFF"/>
+                </a:solidFill>
+                <a:latin typeface="Poppins Bold"/>
+                <a:ea typeface="Poppins Bold"/>
+                <a:cs typeface="Poppins Bold"/>
+                <a:sym typeface="Poppins Bold"/>
+              </a:rPr>
+              <a:t>LAMB OF GOD</a:t>
+            </a:r>
+          </a:p>
+          <a:p>
+            <a:pPr algn="l">
+              <a:lnSpc>
+                <a:spcPts val="6608"/>
+              </a:lnSpc>
+              <a:defRPr/>
+            </a:pPr>
+            <a:r>
+              <a:rPr lang="en-US" sz="5600" b="1">
+                <a:solidFill>
+                  <a:srgbClr val="FFFFFF"/>
+                </a:solidFill>
+                <a:latin typeface="Poppins Bold"/>
+                <a:ea typeface="Poppins Bold"/>
+                <a:cs typeface="Poppins Bold"/>
+                <a:sym typeface="Poppins Bold"/>
+              </a:rPr>
+              <a:t>YOU TAKE AWAY THE SINS OF THE WORLD</a:t>
+            </a:r>
+          </a:p>
+          <a:p>
+            <a:pPr algn="l" marL="0" indent="0" lvl="0">
+              <a:lnSpc>
+                <a:spcPts val="6608"/>
+              </a:lnSpc>
+              <a:defRPr/>
+            </a:pPr>
+            <a:r>
+              <a:rPr lang="en-US" b="1" sz="5600">
+                <a:solidFill>
+                  <a:srgbClr val="F8B300"/>
+                </a:solidFill>
+                <a:latin typeface="Poppins Bold"/>
+                <a:ea typeface="Poppins Bold"/>
+                <a:cs typeface="Poppins Bold"/>
+                <a:sym typeface="Poppins Bold"/>
+              </a:rPr>
+              <a:t>HAVE MERCY</a:t>
+            </a:r>
+            <a:r>
+              <a:rPr lang="en-US" b="1" sz="5600">
+                <a:solidFill>
+                  <a:srgbClr val="FFFFFF"/>
+                </a:solidFill>
+                <a:latin typeface="Poppins Bold"/>
+                <a:ea typeface="Poppins Bold"/>
+                <a:cs typeface="Poppins Bold"/>
+                <a:sym typeface="Poppins Bold"/>
+              </a:rPr>
+              <a:t>, </a:t>
+            </a:r>
+            <a:r>
+              <a:rPr lang="en-US" b="1" sz="5600">
+                <a:solidFill>
+                  <a:srgbClr val="F8B300"/>
+                </a:solidFill>
+                <a:latin typeface="Poppins Bold"/>
+                <a:ea typeface="Poppins Bold"/>
+                <a:cs typeface="Poppins Bold"/>
+                <a:sym typeface="Poppins Bold"/>
+              </a:rPr>
+              <a:t>H</a:t>
+            </a:r>
+            <a:r>
+              <a:rPr lang="en-US" b="1" sz="5600">
+                <a:solidFill>
+                  <a:srgbClr val="F8B300"/>
+                </a:solidFill>
+                <a:latin typeface="Poppins Bold"/>
+                <a:ea typeface="Poppins Bold"/>
+                <a:cs typeface="Poppins Bold"/>
+                <a:sym typeface="Poppins Bold"/>
+              </a:rPr>
+              <a:t>AVE MERCY ON US</a:t>
+            </a:r>
+            <a:r>
+              <a:rPr lang="en-US" b="1" sz="5600">
+                <a:solidFill>
+                  <a:srgbClr val="FFFFFF"/>
+                </a:solidFill>
+                <a:latin typeface="Poppins Bold"/>
+                <a:ea typeface="Poppins Bold"/>
+                <a:cs typeface="Poppins Bold"/>
+                <a:sym typeface="Poppins Bold"/>
+              </a:rPr>
+              <a:t>.</a:t>
+            </a:r>
+          </a:p>
+        </p:txBody>
+      </p:sp>
+      <p:sp>
+        <p:nvSpPr>
+          <p:cNvPr name="TextBox 3" id="3"/>
+          <p:cNvSpPr txBox="true"/>
+          <p:nvPr/>
+        </p:nvSpPr>
+        <p:spPr>
+          <a:xfrm rot="0">
+            <a:off x="2245772" y="7118506"/>
+            <a:ext cx="14757999" cy="2576449"/>
+          </a:xfrm>
+          <a:prstGeom prst="rect">
+            <a:avLst/>
+          </a:prstGeom>
+        </p:spPr>
+        <p:txBody>
+          <a:bodyPr anchor="t" rtlCol="false" tIns="0" lIns="0" bIns="0" rIns="0">
+            <a:spAutoFit/>
+          </a:bodyPr>
+          <a:lstStyle/>
+          <a:p>
+            <a:pPr algn="l">
+              <a:lnSpc>
+                <a:spcPts val="6608"/>
+              </a:lnSpc>
+              <a:defRPr/>
+            </a:pPr>
+            <a:r>
+              <a:rPr lang="en-US" sz="5600" b="1">
+                <a:solidFill>
+                  <a:srgbClr val="FFFFFF"/>
+                </a:solidFill>
+                <a:latin typeface="Poppins Bold"/>
+                <a:ea typeface="Poppins Bold"/>
+                <a:cs typeface="Poppins Bold"/>
+                <a:sym typeface="Poppins Bold"/>
+              </a:rPr>
+              <a:t>LAMB OF GOD</a:t>
+            </a:r>
+          </a:p>
+          <a:p>
+            <a:pPr algn="l">
+              <a:lnSpc>
+                <a:spcPts val="6608"/>
+              </a:lnSpc>
+              <a:defRPr/>
+            </a:pPr>
+            <a:r>
+              <a:rPr lang="en-US" sz="5600" b="1">
+                <a:solidFill>
+                  <a:srgbClr val="FFFFFF"/>
+                </a:solidFill>
+                <a:latin typeface="Poppins Bold"/>
+                <a:ea typeface="Poppins Bold"/>
+                <a:cs typeface="Poppins Bold"/>
+                <a:sym typeface="Poppins Bold"/>
+              </a:rPr>
+              <a:t>YOU TAKE AWAY THE SINS OF THE WORLD,</a:t>
+            </a:r>
+          </a:p>
+          <a:p>
+            <a:pPr algn="l" marL="0" indent="0" lvl="0">
+              <a:lnSpc>
+                <a:spcPts val="6608"/>
+              </a:lnSpc>
+              <a:defRPr/>
+            </a:pPr>
+            <a:r>
+              <a:rPr lang="en-US" b="1" sz="5600">
+                <a:solidFill>
+                  <a:srgbClr val="F8B300"/>
+                </a:solidFill>
+                <a:latin typeface="Poppins Bold"/>
+                <a:ea typeface="Poppins Bold"/>
+                <a:cs typeface="Poppins Bold"/>
+                <a:sym typeface="Poppins Bold"/>
+              </a:rPr>
+              <a:t>GRANT US PEACE</a:t>
+            </a:r>
+            <a:r>
+              <a:rPr lang="en-US" b="1" sz="5600">
+                <a:solidFill>
+                  <a:srgbClr val="FFFFFF"/>
+                </a:solidFill>
+                <a:latin typeface="Poppins Bold"/>
+                <a:ea typeface="Poppins Bold"/>
+                <a:cs typeface="Poppins Bold"/>
+                <a:sym typeface="Poppins Bold"/>
+              </a:rPr>
+              <a:t>, </a:t>
+            </a:r>
+            <a:r>
+              <a:rPr lang="en-US" b="1" sz="5600">
+                <a:solidFill>
+                  <a:srgbClr val="F8B300"/>
+                </a:solidFill>
+                <a:latin typeface="Poppins Bold"/>
+                <a:ea typeface="Poppins Bold"/>
+                <a:cs typeface="Poppins Bold"/>
+                <a:sym typeface="Poppins Bold"/>
+              </a:rPr>
+              <a:t>GR</a:t>
+            </a:r>
+            <a:r>
+              <a:rPr lang="en-US" b="1" sz="5600">
+                <a:solidFill>
+                  <a:srgbClr val="F8B300"/>
+                </a:solidFill>
+                <a:latin typeface="Poppins Bold"/>
+                <a:ea typeface="Poppins Bold"/>
+                <a:cs typeface="Poppins Bold"/>
+                <a:sym typeface="Poppins Bold"/>
+              </a:rPr>
+              <a:t>ANT US PEACE</a:t>
+            </a:r>
+            <a:r>
+              <a:rPr lang="en-US" b="1" sz="5600">
+                <a:solidFill>
+                  <a:srgbClr val="FFFFFF"/>
+                </a:solidFill>
+                <a:latin typeface="Poppins Bold"/>
+                <a:ea typeface="Poppins Bold"/>
+                <a:cs typeface="Poppins Bold"/>
+                <a:sym typeface="Poppins Bold"/>
+              </a:rPr>
+              <a:t>.</a:t>
+            </a:r>
+          </a:p>
+        </p:txBody>
+      </p:sp>
+      <p:sp>
+        <p:nvSpPr>
+          <p:cNvPr name="TextBox 4" id="4"/>
+          <p:cNvSpPr txBox="true"/>
+          <p:nvPr/>
+        </p:nvSpPr>
+        <p:spPr>
+          <a:xfrm rot="0">
+            <a:off x="2245772" y="4284882"/>
+            <a:ext cx="14598201" cy="2576449"/>
+          </a:xfrm>
+          <a:prstGeom prst="rect">
+            <a:avLst/>
+          </a:prstGeom>
+        </p:spPr>
+        <p:txBody>
+          <a:bodyPr anchor="t" rtlCol="false" tIns="0" lIns="0" bIns="0" rIns="0">
+            <a:spAutoFit/>
+          </a:bodyPr>
+          <a:lstStyle/>
+          <a:p>
+            <a:pPr algn="l">
+              <a:lnSpc>
+                <a:spcPts val="6608"/>
+              </a:lnSpc>
+              <a:defRPr/>
+            </a:pPr>
+            <a:r>
+              <a:rPr lang="en-US" sz="5600" b="1">
+                <a:solidFill>
+                  <a:srgbClr val="FFFFFF"/>
+                </a:solidFill>
+                <a:latin typeface="Poppins Bold"/>
+                <a:ea typeface="Poppins Bold"/>
+                <a:cs typeface="Poppins Bold"/>
+                <a:sym typeface="Poppins Bold"/>
+              </a:rPr>
+              <a:t>LAMB OF GOD</a:t>
+            </a:r>
+          </a:p>
+          <a:p>
+            <a:pPr algn="l">
+              <a:lnSpc>
+                <a:spcPts val="6608"/>
+              </a:lnSpc>
+              <a:defRPr/>
+            </a:pPr>
+            <a:r>
+              <a:rPr lang="en-US" sz="5600" b="1">
+                <a:solidFill>
+                  <a:srgbClr val="FFFFFF"/>
+                </a:solidFill>
+                <a:latin typeface="Poppins Bold"/>
+                <a:ea typeface="Poppins Bold"/>
+                <a:cs typeface="Poppins Bold"/>
+                <a:sym typeface="Poppins Bold"/>
+              </a:rPr>
+              <a:t>YOU TAKE AWAY THE SINS OF THE WORLD</a:t>
+            </a:r>
+          </a:p>
+          <a:p>
+            <a:pPr algn="l" marL="0" indent="0" lvl="0">
+              <a:lnSpc>
+                <a:spcPts val="6608"/>
+              </a:lnSpc>
+              <a:defRPr/>
+            </a:pPr>
+            <a:r>
+              <a:rPr lang="en-US" b="1" sz="5600">
+                <a:solidFill>
+                  <a:srgbClr val="F8B300"/>
+                </a:solidFill>
+                <a:latin typeface="Poppins Bold"/>
+                <a:ea typeface="Poppins Bold"/>
+                <a:cs typeface="Poppins Bold"/>
+                <a:sym typeface="Poppins Bold"/>
+              </a:rPr>
+              <a:t>HAVE MERCY</a:t>
+            </a:r>
+            <a:r>
+              <a:rPr lang="en-US" b="1" sz="5600">
+                <a:solidFill>
+                  <a:srgbClr val="FFFFFF"/>
+                </a:solidFill>
+                <a:latin typeface="Poppins Bold"/>
+                <a:ea typeface="Poppins Bold"/>
+                <a:cs typeface="Poppins Bold"/>
+                <a:sym typeface="Poppins Bold"/>
+              </a:rPr>
+              <a:t>, </a:t>
+            </a:r>
+            <a:r>
+              <a:rPr lang="en-US" b="1" sz="5600">
+                <a:solidFill>
+                  <a:srgbClr val="F8B300"/>
+                </a:solidFill>
+                <a:latin typeface="Poppins Bold"/>
+                <a:ea typeface="Poppins Bold"/>
+                <a:cs typeface="Poppins Bold"/>
+                <a:sym typeface="Poppins Bold"/>
+              </a:rPr>
+              <a:t>H</a:t>
+            </a:r>
+            <a:r>
+              <a:rPr lang="en-US" b="1" sz="5600">
+                <a:solidFill>
+                  <a:srgbClr val="F8B300"/>
+                </a:solidFill>
+                <a:latin typeface="Poppins Bold"/>
+                <a:ea typeface="Poppins Bold"/>
+                <a:cs typeface="Poppins Bold"/>
+                <a:sym typeface="Poppins Bold"/>
+              </a:rPr>
+              <a:t>AVE MERCY ON US</a:t>
+            </a:r>
+            <a:r>
+              <a:rPr lang="en-US" b="1" sz="5600">
+                <a:solidFill>
+                  <a:srgbClr val="FFFFFF"/>
+                </a:solidFill>
+                <a:latin typeface="Poppins Bold"/>
+                <a:ea typeface="Poppins Bold"/>
+                <a:cs typeface="Poppins Bold"/>
+                <a:sym typeface="Poppins Bold"/>
+              </a:rPr>
+              <a:t>.</a:t>
+            </a:r>
+          </a:p>
+        </p:txBody>
+      </p:sp>
+      <p:sp>
+        <p:nvSpPr>
+          <p:cNvPr name="TextBox 5" id="5"/>
+          <p:cNvSpPr txBox="true"/>
+          <p:nvPr/>
+        </p:nvSpPr>
+        <p:spPr>
+          <a:xfrm rot="0">
+            <a:off x="1646296" y="226228"/>
+            <a:ext cx="14995409" cy="1055243"/>
+          </a:xfrm>
+          <a:prstGeom prst="rect">
+            <a:avLst/>
+          </a:prstGeom>
+        </p:spPr>
+        <p:txBody>
+          <a:bodyPr anchor="t" rtlCol="false" tIns="0" lIns="0" bIns="0" rIns="0">
+            <a:spAutoFit/>
+          </a:bodyPr>
+          <a:lstStyle/>
+          <a:p>
+            <a:pPr algn="ctr" marL="0" indent="0" lvl="0">
+              <a:lnSpc>
+                <a:spcPts val="8175"/>
+              </a:lnSpc>
               <a:spcBef>
-                <a:spcPts val="400"/>
+                <a:spcPct val="0"/>
               </a:spcBef>
-              <a:spcAft>
-                <a:spcPts val="800"/>
-              </a:spcAft>
-              <a:defRPr sz="5500" b="1" i="0" u="none">
-                <a:solidFill>
-                  <a:srgbClr val="D8B4FE"/>
+              <a:defRPr/>
+            </a:pPr>
+            <a:r>
+              <a:rPr lang="en-US" sz="3850">
+                <a:solidFill>
+                  <a:srgbClr val="FFB800"/>
                 </a:solidFill>
                 <a:latin typeface="Georgia"/>
-              </a:defRPr>
-            </a:pPr>
-            <a:r>
-              <a:t>Priest: Deliver us, Lord, we pray, from every evil, graciously grant peace in our days, that, by the help of your mercy, we may be always free from sin and safe from all distress, as we await the blessed hope and the coming of our Savior, Jesus Christ.</a:t>
-            </a:r>
-          </a:p>
-        </p:txBody>
-      </p:sp>
-      <p:sp>
-        <p:nvSpPr>
-          <p:cNvPr id="3" name="TextBox 2"/>
+                <a:ea typeface="Recoleta"/>
+                <a:cs typeface="Recoleta"/>
+                <a:sym typeface="Recoleta"/>
+              </a:rPr>
+              <a:t>Lamb of God</a:t>
+            </a:r>
+          </a:p>
+        </p:txBody>
+      </p:sp>
+      <p:sp>
+        <p:nvSpPr>
+          <p:cNvPr id="6" name="TextBox 5"/>
           <p:cNvSpPr txBox="1"/>
           <p:nvPr/>
         </p:nvSpPr>
@@ -12481,7 +13325,7 @@
               </a:defRPr>
             </a:pPr>
             <a:r>
-              <a:t>Our Father (4/5)</a:t>
+              <a:t>Lamb of God</a:t>
             </a:r>
           </a:p>
         </p:txBody>
@@ -12521,7 +13365,7 @@
         <p:spPr>
           <a:xfrm>
             <a:off x="914400" y="530352"/>
-            <a:ext cx="16459200" cy="8750808"/>
+            <a:ext cx="16459200" cy="8613648"/>
           </a:xfrm>
           <a:prstGeom prst="rect">
             <a:avLst/>
@@ -12536,20 +13380,57 @@
           <a:p>
             <a:pPr algn="ctr">
               <a:spcBef>
-                <a:spcPts val="400"/>
+                <a:spcPts val="600"/>
               </a:spcBef>
               <a:spcAft>
                 <a:spcPts val="800"/>
               </a:spcAft>
-              <a:defRPr sz="5500" b="1" i="0" u="none">
-                <a:solidFill>
-                  <a:srgbClr val="FFFFFF"/>
+            </a:pPr>
+            <a:r>
+              <a:rPr sz="5500" b="1">
+                <a:solidFill>
+                  <a:srgbClr val="F8B300"/>
                 </a:solidFill>
                 <a:latin typeface="Georgia"/>
-              </a:defRPr>
-            </a:pPr>
-            <a:r>
-              <a:t>For the kingdom, the power, and the glory are yours now and for ever.</a:t>
+              </a:rPr>
+              <a:t>Priest: </a:t>
+            </a:r>
+            <a:r>
+              <a:rPr sz="5500" b="1">
+                <a:solidFill>
+                  <a:srgbClr val="FFFFFF"/>
+                </a:solidFill>
+                <a:latin typeface="Georgia"/>
+              </a:rPr>
+              <a:t>Behold the Lamb of God, behold him who takes away the sins of the world. Blessed are those called to the supper of the Lamb.</a:t>
+            </a:r>
+          </a:p>
+          <a:p>
+            <a:pPr algn="ctr">
+              <a:spcBef>
+                <a:spcPts val="600"/>
+              </a:spcBef>
+              <a:spcAft>
+                <a:spcPts val="800"/>
+              </a:spcAft>
+            </a:pPr>
+            <a:r>
+              <a:rPr sz="5500" b="1">
+                <a:solidFill>
+                  <a:srgbClr val="FFFFFF"/>
+                </a:solidFill>
+                <a:latin typeface="Georgia"/>
+              </a:rPr>
+              <a:t>All: </a:t>
+            </a:r>
+            <a:r>
+              <a:rPr sz="5500" b="1">
+                <a:solidFill>
+                  <a:srgbClr val="FFFFFF"/>
+                </a:solidFill>
+                <a:latin typeface="Georgia"/>
+              </a:rPr>
+              <a:t>Lord, I am not worthy that you should enter under my roof, but only say the word and my soul shall be healed.</a:t>
             </a:r>
           </a:p>
         </p:txBody>
@@ -12589,7 +13470,7 @@
               </a:defRPr>
             </a:pPr>
             <a:r>
-              <a:t>Our Father (5/5)</a:t>
+              <a:t>The Communion Rite</a:t>
             </a:r>
           </a:p>
         </p:txBody>
@@ -12795,7 +13676,7 @@
               <a:lnSpc>
                 <a:spcPct val="108000"/>
               </a:lnSpc>
-              <a:defRPr sz="3400" b="1" i="0" u="none">
+              <a:defRPr sz="3600" b="1" i="0" u="none">
                 <a:solidFill>
                   <a:srgbClr val="FFFFFF"/>
                 </a:solidFill>
@@ -12803,7 +13684,7 @@
               </a:defRPr>
             </a:pPr>
             <a:r>
-              <a:t>Rev. Fr. Jonrey Lauron, RCJ · Divino Gabriel</a:t>
+              <a:t>Rev. Fr. Jonrey Lauron, RCJ</a:t>
             </a:r>
           </a:p>
         </p:txBody>
@@ -12978,7 +13859,7 @@
     <p:bg>
       <p:bgPr>
         <a:solidFill>
-          <a:srgbClr val="211733"/>
+          <a:srgbClr val="000000"/>
         </a:solidFill>
         <a:effectLst/>
       </p:bgPr>
@@ -12992,202 +13873,129 @@
       <p:grpSpPr/>
       <p:sp>
         <p:nvSpPr>
-          <p:cNvPr name="TextBox 2" id="2"/>
-          <p:cNvSpPr txBox="true"/>
-          <p:nvPr/>
-        </p:nvSpPr>
-        <p:spPr>
-          <a:xfrm rot="0">
-            <a:off x="2927842" y="1531619"/>
-            <a:ext cx="12432316" cy="2144014"/>
-          </a:xfrm>
-          <a:prstGeom prst="rect">
-            <a:avLst/>
-          </a:prstGeom>
-        </p:spPr>
-        <p:txBody>
-          <a:bodyPr anchor="t" rtlCol="false" tIns="0" lIns="0" bIns="0" rIns="0">
-            <a:spAutoFit/>
-          </a:bodyPr>
-          <a:lstStyle/>
-          <a:p>
-            <a:pPr algn="just" marL="0" indent="0" lvl="0">
-              <a:lnSpc>
-                <a:spcPts val="8228"/>
-              </a:lnSpc>
-              <a:defRPr/>
-            </a:pPr>
-            <a:r>
-              <a:rPr lang="en-US" b="true" sz="6800">
-                <a:solidFill>
-                  <a:srgbClr val="F8B300"/>
-                </a:solidFill>
-                <a:latin typeface="Poppins Semi-Bold"/>
-                <a:ea typeface="Poppins Semi-Bold"/>
-                <a:cs typeface="Poppins Semi-Bold"/>
-                <a:sym typeface="Poppins Semi-Bold"/>
-              </a:rPr>
-              <a:t>Priest</a:t>
-            </a:r>
-            <a:r>
-              <a:rPr lang="en-US" b="true" sz="6800">
-                <a:solidFill>
-                  <a:srgbClr val="FFFFFF"/>
-                </a:solidFill>
-                <a:latin typeface="Poppins Semi-Bold"/>
-                <a:ea typeface="Poppins Semi-Bold"/>
-                <a:cs typeface="Poppins Semi-Bold"/>
-                <a:sym typeface="Poppins Semi-Bold"/>
-              </a:rPr>
-              <a:t>: The peace of the Lord be with you.</a:t>
-            </a:r>
-          </a:p>
-        </p:txBody>
-      </p:sp>
-      <p:sp>
-        <p:nvSpPr>
-          <p:cNvPr name="TextBox 3" id="3"/>
-          <p:cNvSpPr txBox="true"/>
-          <p:nvPr/>
-        </p:nvSpPr>
-        <p:spPr>
-          <a:xfrm rot="0">
-            <a:off x="1646296" y="226228"/>
-            <a:ext cx="14995409" cy="1055243"/>
-          </a:xfrm>
-          <a:prstGeom prst="rect">
-            <a:avLst/>
-          </a:prstGeom>
-        </p:spPr>
-        <p:txBody>
-          <a:bodyPr anchor="t" rtlCol="false" tIns="0" lIns="0" bIns="0" rIns="0">
-            <a:spAutoFit/>
-          </a:bodyPr>
-          <a:lstStyle/>
-          <a:p>
-            <a:pPr algn="ctr" marL="0" indent="0" lvl="0">
-              <a:lnSpc>
-                <a:spcPts val="8175"/>
-              </a:lnSpc>
-              <a:spcBef>
-                <a:spcPct val="0"/>
-              </a:spcBef>
-              <a:defRPr/>
-            </a:pPr>
-            <a:r>
-              <a:rPr lang="en-US" sz="3850">
-                <a:solidFill>
-                  <a:srgbClr val="FFB800"/>
+          <p:cNvPr id="2" name="TextBox 1"/>
+          <p:cNvSpPr txBox="1"/>
+          <p:nvPr/>
+        </p:nvSpPr>
+        <p:spPr>
+          <a:xfrm>
+            <a:off x="914400" y="109728"/>
+            <a:ext cx="16459200" cy="868680"/>
+          </a:xfrm>
+          <a:prstGeom prst="rect">
+            <a:avLst/>
+          </a:prstGeom>
+          <a:noFill/>
+        </p:spPr>
+        <p:txBody>
+          <a:bodyPr wrap="square" lIns="109728" rIns="109728" tIns="73152" bIns="73152">
+            <a:noAutofit/>
+          </a:bodyPr>
+          <a:lstStyle/>
+          <a:p>
+            <a:pPr algn="ctr"/>
+            <a:r>
+              <a:rPr sz="3850" b="1" u="sng">
+                <a:solidFill>
+                  <a:srgbClr val="FFCC4D"/>
                 </a:solidFill>
                 <a:latin typeface="Georgia"/>
-                <a:ea typeface="Recoleta"/>
-                <a:cs typeface="Recoleta"/>
-                <a:sym typeface="Recoleta"/>
-              </a:rPr>
-              <a:t>Sign Of Peace</a:t>
-            </a:r>
-          </a:p>
-        </p:txBody>
-      </p:sp>
-      <p:sp>
-        <p:nvSpPr>
-          <p:cNvPr name="TextBox 4" id="4"/>
-          <p:cNvSpPr txBox="true"/>
-          <p:nvPr/>
-        </p:nvSpPr>
-        <p:spPr>
-          <a:xfrm rot="0">
-            <a:off x="2927842" y="3637533"/>
-            <a:ext cx="12432316" cy="1124585"/>
-          </a:xfrm>
-          <a:prstGeom prst="rect">
-            <a:avLst/>
-          </a:prstGeom>
-        </p:spPr>
-        <p:txBody>
-          <a:bodyPr anchor="t" rtlCol="false" tIns="0" lIns="0" bIns="0" rIns="0">
-            <a:spAutoFit/>
-          </a:bodyPr>
-          <a:lstStyle/>
-          <a:p>
-            <a:pPr algn="l" marL="0" indent="0" lvl="0">
-              <a:lnSpc>
-                <a:spcPts val="8469"/>
-              </a:lnSpc>
-              <a:defRPr/>
-            </a:pPr>
-            <a:r>
-              <a:rPr lang="en-US" b="true" sz="6999">
-                <a:solidFill>
-                  <a:srgbClr val="FFFFFF"/>
-                </a:solidFill>
-                <a:latin typeface="Poppins Bold"/>
-                <a:ea typeface="Poppins Bold"/>
-                <a:cs typeface="Poppins Bold"/>
-                <a:sym typeface="Poppins Bold"/>
-              </a:rPr>
-              <a:t>All: And with your spirit.</a:t>
-            </a:r>
-          </a:p>
-        </p:txBody>
-      </p:sp>
-      <p:sp>
-        <p:nvSpPr>
-          <p:cNvPr name="TextBox 6" id="6"/>
-          <p:cNvSpPr txBox="true"/>
-          <p:nvPr/>
-        </p:nvSpPr>
-        <p:spPr>
-          <a:xfrm rot="0">
-            <a:off x="2927842" y="5932826"/>
-            <a:ext cx="12432316" cy="2144014"/>
-          </a:xfrm>
-          <a:prstGeom prst="rect">
-            <a:avLst/>
-          </a:prstGeom>
-        </p:spPr>
-        <p:txBody>
-          <a:bodyPr anchor="t" rtlCol="false" tIns="0" lIns="0" bIns="0" rIns="0">
-            <a:spAutoFit/>
-          </a:bodyPr>
-          <a:lstStyle/>
-          <a:p>
-            <a:pPr algn="l" marL="0" indent="0" lvl="0">
-              <a:lnSpc>
-                <a:spcPts val="8228"/>
-              </a:lnSpc>
-              <a:defRPr/>
-            </a:pPr>
-            <a:r>
-              <a:rPr lang="en-US" b="true" sz="6800">
-                <a:solidFill>
-                  <a:srgbClr val="F8B300"/>
-                </a:solidFill>
-                <a:latin typeface="Poppins Semi-Bold"/>
-                <a:ea typeface="Poppins Semi-Bold"/>
-                <a:cs typeface="Poppins Semi-Bold"/>
-                <a:sym typeface="Poppins Semi-Bold"/>
-              </a:rPr>
-              <a:t>Priest</a:t>
-            </a:r>
-            <a:r>
-              <a:rPr lang="en-US" b="true" sz="6800">
-                <a:solidFill>
-                  <a:srgbClr val="FFFFFF"/>
-                </a:solidFill>
-                <a:latin typeface="Poppins Semi-Bold"/>
-                <a:ea typeface="Poppins Semi-Bold"/>
-                <a:cs typeface="Poppins Semi-Bold"/>
-                <a:sym typeface="Poppins Semi-Bold"/>
-              </a:rPr>
-              <a:t>: Let us offer each other the sign of peace. </a:t>
-            </a:r>
-          </a:p>
-        </p:txBody>
-      </p:sp>
-      <p:sp>
-        <p:nvSpPr>
-          <p:cNvPr id="7" name="TextBox 6"/>
+              </a:rPr>
+              <a:t>Manalig Ka</a:t>
+            </a:r>
+          </a:p>
+        </p:txBody>
+      </p:sp>
+      <p:sp>
+        <p:nvSpPr>
+          <p:cNvPr id="3" name="TextBox 2"/>
+          <p:cNvSpPr txBox="1"/>
+          <p:nvPr/>
+        </p:nvSpPr>
+        <p:spPr>
+          <a:xfrm>
+            <a:off x="0" y="1069848"/>
+            <a:ext cx="18288000" cy="8348472"/>
+          </a:xfrm>
+          <a:prstGeom prst="rect">
+            <a:avLst/>
+          </a:prstGeom>
+          <a:noFill/>
+        </p:spPr>
+        <p:txBody>
+          <a:bodyPr wrap="square" lIns="0" rIns="0" tIns="73152" bIns="73152" anchor="ctr">
+            <a:noAutofit/>
+          </a:bodyPr>
+          <a:lstStyle/>
+          <a:p>
+            <a:pPr algn="ctr">
+              <a:lnSpc>
+                <a:spcPct val="70000"/>
+              </a:lnSpc>
+            </a:pPr>
+            <a:r>
+              <a:rPr sz="7200" b="1" i="0">
+                <a:solidFill>
+                  <a:srgbClr val="FFFFFF"/>
+                </a:solidFill>
+                <a:latin typeface="Poppins"/>
+              </a:rPr>
+              <a:t>ILUOM LAHAT NG TAKOT SA IYONG DAMDAMIN</a:t>
+            </a:r>
+          </a:p>
+          <a:p>
+            <a:pPr algn="ctr">
+              <a:lnSpc>
+                <a:spcPct val="70000"/>
+              </a:lnSpc>
+            </a:pPr>
+            <a:r>
+              <a:rPr sz="7200" b="1" i="0">
+                <a:solidFill>
+                  <a:srgbClr val="FFFFFF"/>
+                </a:solidFill>
+                <a:latin typeface="Poppins"/>
+              </a:rPr>
+              <a:t>ANG PANGALAN N'YA LAGI ANG TAWAGIN</a:t>
+            </a:r>
+          </a:p>
+          <a:p>
+            <a:pPr algn="ctr">
+              <a:lnSpc>
+                <a:spcPct val="70000"/>
+              </a:lnSpc>
+            </a:pPr>
+            <a:r>
+              <a:rPr sz="7200" b="1" i="0">
+                <a:solidFill>
+                  <a:srgbClr val="FFFFFF"/>
+                </a:solidFill>
+                <a:latin typeface="Poppins"/>
+              </a:rPr>
+              <a:t>AT SIYA'Y NAKIKINIG</a:t>
+            </a:r>
+          </a:p>
+          <a:p>
+            <a:pPr algn="ctr">
+              <a:lnSpc>
+                <a:spcPct val="70000"/>
+              </a:lnSpc>
+            </a:pPr>
+            <a:r>
+              <a:rPr sz="7200" b="1" i="0">
+                <a:solidFill>
+                  <a:srgbClr val="FFFFFF"/>
+                </a:solidFill>
+                <a:latin typeface="Poppins"/>
+              </a:rPr>
+              <a:t>SA BAWAT HINAING</a:t>
+            </a:r>
+          </a:p>
+        </p:txBody>
+      </p:sp>
+      <p:sp>
+        <p:nvSpPr>
+          <p:cNvPr id="4" name="TextBox 3"/>
           <p:cNvSpPr txBox="1"/>
           <p:nvPr/>
         </p:nvSpPr>
@@ -13208,19 +14016,19 @@
           <a:lstStyle/>
           <a:p/>
           <a:p>
-            <a:pPr algn="l">
+            <a:pPr>
               <a:spcBef>
                 <a:spcPts val="200"/>
               </a:spcBef>
               <a:defRPr sz="1200" b="0" i="0" u="none">
                 <a:solidFill>
-                  <a:srgbClr val="D8B4FE"/>
+                  <a:srgbClr val="FFCC4D"/>
                 </a:solidFill>
                 <a:latin typeface="Georgia"/>
               </a:defRPr>
             </a:pPr>
             <a:r>
-              <a:t>Sign of Peace</a:t>
+              <a:t>Communion (1)</a:t>
             </a:r>
           </a:p>
         </p:txBody>
@@ -13239,7 +14047,7 @@
     <p:bg>
       <p:bgPr>
         <a:solidFill>
-          <a:srgbClr val="211733"/>
+          <a:srgbClr val="000000"/>
         </a:solidFill>
         <a:effectLst/>
       </p:bgPr>
@@ -13253,442 +14061,94 @@
       <p:grpSpPr/>
       <p:sp>
         <p:nvSpPr>
-          <p:cNvPr name="TextBox 2" id="2"/>
-          <p:cNvSpPr txBox="true"/>
-          <p:nvPr/>
-        </p:nvSpPr>
-        <p:spPr>
-          <a:xfrm rot="0">
-            <a:off x="2245772" y="1447327"/>
-            <a:ext cx="14598201" cy="2576449"/>
-          </a:xfrm>
-          <a:prstGeom prst="rect">
-            <a:avLst/>
-          </a:prstGeom>
-        </p:spPr>
-        <p:txBody>
-          <a:bodyPr anchor="t" rtlCol="false" tIns="0" lIns="0" bIns="0" rIns="0">
-            <a:spAutoFit/>
-          </a:bodyPr>
-          <a:lstStyle/>
-          <a:p>
-            <a:pPr algn="l">
-              <a:lnSpc>
-                <a:spcPts val="6608"/>
-              </a:lnSpc>
-              <a:defRPr/>
-            </a:pPr>
-            <a:r>
-              <a:rPr lang="en-US" sz="5600" b="1">
-                <a:solidFill>
-                  <a:srgbClr val="FFFFFF"/>
-                </a:solidFill>
-                <a:latin typeface="Poppins Bold"/>
-                <a:ea typeface="Poppins Bold"/>
-                <a:cs typeface="Poppins Bold"/>
-                <a:sym typeface="Poppins Bold"/>
-              </a:rPr>
-              <a:t>LAMB OF GOD</a:t>
-            </a:r>
-          </a:p>
-          <a:p>
-            <a:pPr algn="l">
-              <a:lnSpc>
-                <a:spcPts val="6608"/>
-              </a:lnSpc>
-              <a:defRPr/>
-            </a:pPr>
-            <a:r>
-              <a:rPr lang="en-US" sz="5600" b="1">
-                <a:solidFill>
-                  <a:srgbClr val="FFFFFF"/>
-                </a:solidFill>
-                <a:latin typeface="Poppins Bold"/>
-                <a:ea typeface="Poppins Bold"/>
-                <a:cs typeface="Poppins Bold"/>
-                <a:sym typeface="Poppins Bold"/>
-              </a:rPr>
-              <a:t>YOU TAKE AWAY THE SINS OF THE WORLD</a:t>
-            </a:r>
-          </a:p>
-          <a:p>
-            <a:pPr algn="l" marL="0" indent="0" lvl="0">
-              <a:lnSpc>
-                <a:spcPts val="6608"/>
-              </a:lnSpc>
-              <a:defRPr/>
-            </a:pPr>
-            <a:r>
-              <a:rPr lang="en-US" b="1" sz="5600">
-                <a:solidFill>
-                  <a:srgbClr val="F8B300"/>
-                </a:solidFill>
-                <a:latin typeface="Poppins Bold"/>
-                <a:ea typeface="Poppins Bold"/>
-                <a:cs typeface="Poppins Bold"/>
-                <a:sym typeface="Poppins Bold"/>
-              </a:rPr>
-              <a:t>HAVE MERCY</a:t>
-            </a:r>
-            <a:r>
-              <a:rPr lang="en-US" b="1" sz="5600">
-                <a:solidFill>
-                  <a:srgbClr val="FFFFFF"/>
-                </a:solidFill>
-                <a:latin typeface="Poppins Bold"/>
-                <a:ea typeface="Poppins Bold"/>
-                <a:cs typeface="Poppins Bold"/>
-                <a:sym typeface="Poppins Bold"/>
-              </a:rPr>
-              <a:t>, </a:t>
-            </a:r>
-            <a:r>
-              <a:rPr lang="en-US" b="1" sz="5600">
-                <a:solidFill>
-                  <a:srgbClr val="F8B300"/>
-                </a:solidFill>
-                <a:latin typeface="Poppins Bold"/>
-                <a:ea typeface="Poppins Bold"/>
-                <a:cs typeface="Poppins Bold"/>
-                <a:sym typeface="Poppins Bold"/>
-              </a:rPr>
-              <a:t>H</a:t>
-            </a:r>
-            <a:r>
-              <a:rPr lang="en-US" b="1" sz="5600">
-                <a:solidFill>
-                  <a:srgbClr val="F8B300"/>
-                </a:solidFill>
-                <a:latin typeface="Poppins Bold"/>
-                <a:ea typeface="Poppins Bold"/>
-                <a:cs typeface="Poppins Bold"/>
-                <a:sym typeface="Poppins Bold"/>
-              </a:rPr>
-              <a:t>AVE MERCY ON US</a:t>
-            </a:r>
-            <a:r>
-              <a:rPr lang="en-US" b="1" sz="5600">
-                <a:solidFill>
-                  <a:srgbClr val="FFFFFF"/>
-                </a:solidFill>
-                <a:latin typeface="Poppins Bold"/>
-                <a:ea typeface="Poppins Bold"/>
-                <a:cs typeface="Poppins Bold"/>
-                <a:sym typeface="Poppins Bold"/>
-              </a:rPr>
-              <a:t>.</a:t>
-            </a:r>
-          </a:p>
-        </p:txBody>
-      </p:sp>
-      <p:sp>
-        <p:nvSpPr>
-          <p:cNvPr name="TextBox 3" id="3"/>
-          <p:cNvSpPr txBox="true"/>
-          <p:nvPr/>
-        </p:nvSpPr>
-        <p:spPr>
-          <a:xfrm rot="0">
-            <a:off x="2245772" y="7118506"/>
-            <a:ext cx="14757999" cy="2576449"/>
-          </a:xfrm>
-          <a:prstGeom prst="rect">
-            <a:avLst/>
-          </a:prstGeom>
-        </p:spPr>
-        <p:txBody>
-          <a:bodyPr anchor="t" rtlCol="false" tIns="0" lIns="0" bIns="0" rIns="0">
-            <a:spAutoFit/>
-          </a:bodyPr>
-          <a:lstStyle/>
-          <a:p>
-            <a:pPr algn="l">
-              <a:lnSpc>
-                <a:spcPts val="6608"/>
-              </a:lnSpc>
-              <a:defRPr/>
-            </a:pPr>
-            <a:r>
-              <a:rPr lang="en-US" sz="5600" b="1">
-                <a:solidFill>
-                  <a:srgbClr val="FFFFFF"/>
-                </a:solidFill>
-                <a:latin typeface="Poppins Bold"/>
-                <a:ea typeface="Poppins Bold"/>
-                <a:cs typeface="Poppins Bold"/>
-                <a:sym typeface="Poppins Bold"/>
-              </a:rPr>
-              <a:t>LAMB OF GOD</a:t>
-            </a:r>
-          </a:p>
-          <a:p>
-            <a:pPr algn="l">
-              <a:lnSpc>
-                <a:spcPts val="6608"/>
-              </a:lnSpc>
-              <a:defRPr/>
-            </a:pPr>
-            <a:r>
-              <a:rPr lang="en-US" sz="5600" b="1">
-                <a:solidFill>
-                  <a:srgbClr val="FFFFFF"/>
-                </a:solidFill>
-                <a:latin typeface="Poppins Bold"/>
-                <a:ea typeface="Poppins Bold"/>
-                <a:cs typeface="Poppins Bold"/>
-                <a:sym typeface="Poppins Bold"/>
-              </a:rPr>
-              <a:t>YOU TAKE AWAY THE SINS OF THE WORLD,</a:t>
-            </a:r>
-          </a:p>
-          <a:p>
-            <a:pPr algn="l" marL="0" indent="0" lvl="0">
-              <a:lnSpc>
-                <a:spcPts val="6608"/>
-              </a:lnSpc>
-              <a:defRPr/>
-            </a:pPr>
-            <a:r>
-              <a:rPr lang="en-US" b="1" sz="5600">
-                <a:solidFill>
-                  <a:srgbClr val="F8B300"/>
-                </a:solidFill>
-                <a:latin typeface="Poppins Bold"/>
-                <a:ea typeface="Poppins Bold"/>
-                <a:cs typeface="Poppins Bold"/>
-                <a:sym typeface="Poppins Bold"/>
-              </a:rPr>
-              <a:t>GRANT US PEACE</a:t>
-            </a:r>
-            <a:r>
-              <a:rPr lang="en-US" b="1" sz="5600">
-                <a:solidFill>
-                  <a:srgbClr val="FFFFFF"/>
-                </a:solidFill>
-                <a:latin typeface="Poppins Bold"/>
-                <a:ea typeface="Poppins Bold"/>
-                <a:cs typeface="Poppins Bold"/>
-                <a:sym typeface="Poppins Bold"/>
-              </a:rPr>
-              <a:t>, </a:t>
-            </a:r>
-            <a:r>
-              <a:rPr lang="en-US" b="1" sz="5600">
-                <a:solidFill>
-                  <a:srgbClr val="F8B300"/>
-                </a:solidFill>
-                <a:latin typeface="Poppins Bold"/>
-                <a:ea typeface="Poppins Bold"/>
-                <a:cs typeface="Poppins Bold"/>
-                <a:sym typeface="Poppins Bold"/>
-              </a:rPr>
-              <a:t>GR</a:t>
-            </a:r>
-            <a:r>
-              <a:rPr lang="en-US" b="1" sz="5600">
-                <a:solidFill>
-                  <a:srgbClr val="F8B300"/>
-                </a:solidFill>
-                <a:latin typeface="Poppins Bold"/>
-                <a:ea typeface="Poppins Bold"/>
-                <a:cs typeface="Poppins Bold"/>
-                <a:sym typeface="Poppins Bold"/>
-              </a:rPr>
-              <a:t>ANT US PEACE</a:t>
-            </a:r>
-            <a:r>
-              <a:rPr lang="en-US" b="1" sz="5600">
-                <a:solidFill>
-                  <a:srgbClr val="FFFFFF"/>
-                </a:solidFill>
-                <a:latin typeface="Poppins Bold"/>
-                <a:ea typeface="Poppins Bold"/>
-                <a:cs typeface="Poppins Bold"/>
-                <a:sym typeface="Poppins Bold"/>
-              </a:rPr>
-              <a:t>.</a:t>
-            </a:r>
-          </a:p>
-        </p:txBody>
-      </p:sp>
-      <p:sp>
-        <p:nvSpPr>
-          <p:cNvPr name="TextBox 4" id="4"/>
-          <p:cNvSpPr txBox="true"/>
-          <p:nvPr/>
-        </p:nvSpPr>
-        <p:spPr>
-          <a:xfrm rot="0">
-            <a:off x="2245772" y="4284882"/>
-            <a:ext cx="14598201" cy="2576449"/>
-          </a:xfrm>
-          <a:prstGeom prst="rect">
-            <a:avLst/>
-          </a:prstGeom>
-        </p:spPr>
-        <p:txBody>
-          <a:bodyPr anchor="t" rtlCol="false" tIns="0" lIns="0" bIns="0" rIns="0">
-            <a:spAutoFit/>
-          </a:bodyPr>
-          <a:lstStyle/>
-          <a:p>
-            <a:pPr algn="l">
-              <a:lnSpc>
-                <a:spcPts val="6608"/>
-              </a:lnSpc>
-              <a:defRPr/>
-            </a:pPr>
-            <a:r>
-              <a:rPr lang="en-US" sz="5600" b="1">
-                <a:solidFill>
-                  <a:srgbClr val="FFFFFF"/>
-                </a:solidFill>
-                <a:latin typeface="Poppins Bold"/>
-                <a:ea typeface="Poppins Bold"/>
-                <a:cs typeface="Poppins Bold"/>
-                <a:sym typeface="Poppins Bold"/>
-              </a:rPr>
-              <a:t>LAMB OF GOD</a:t>
-            </a:r>
-          </a:p>
-          <a:p>
-            <a:pPr algn="l">
-              <a:lnSpc>
-                <a:spcPts val="6608"/>
-              </a:lnSpc>
-              <a:defRPr/>
-            </a:pPr>
-            <a:r>
-              <a:rPr lang="en-US" sz="5600" b="1">
-                <a:solidFill>
-                  <a:srgbClr val="FFFFFF"/>
-                </a:solidFill>
-                <a:latin typeface="Poppins Bold"/>
-                <a:ea typeface="Poppins Bold"/>
-                <a:cs typeface="Poppins Bold"/>
-                <a:sym typeface="Poppins Bold"/>
-              </a:rPr>
-              <a:t>YOU TAKE AWAY THE SINS OF THE WORLD</a:t>
-            </a:r>
-          </a:p>
-          <a:p>
-            <a:pPr algn="l" marL="0" indent="0" lvl="0">
-              <a:lnSpc>
-                <a:spcPts val="6608"/>
-              </a:lnSpc>
-              <a:defRPr/>
-            </a:pPr>
-            <a:r>
-              <a:rPr lang="en-US" b="1" sz="5600">
-                <a:solidFill>
-                  <a:srgbClr val="F8B300"/>
-                </a:solidFill>
-                <a:latin typeface="Poppins Bold"/>
-                <a:ea typeface="Poppins Bold"/>
-                <a:cs typeface="Poppins Bold"/>
-                <a:sym typeface="Poppins Bold"/>
-              </a:rPr>
-              <a:t>HAVE MERCY</a:t>
-            </a:r>
-            <a:r>
-              <a:rPr lang="en-US" b="1" sz="5600">
-                <a:solidFill>
-                  <a:srgbClr val="FFFFFF"/>
-                </a:solidFill>
-                <a:latin typeface="Poppins Bold"/>
-                <a:ea typeface="Poppins Bold"/>
-                <a:cs typeface="Poppins Bold"/>
-                <a:sym typeface="Poppins Bold"/>
-              </a:rPr>
-              <a:t>, </a:t>
-            </a:r>
-            <a:r>
-              <a:rPr lang="en-US" b="1" sz="5600">
-                <a:solidFill>
-                  <a:srgbClr val="F8B300"/>
-                </a:solidFill>
-                <a:latin typeface="Poppins Bold"/>
-                <a:ea typeface="Poppins Bold"/>
-                <a:cs typeface="Poppins Bold"/>
-                <a:sym typeface="Poppins Bold"/>
-              </a:rPr>
-              <a:t>H</a:t>
-            </a:r>
-            <a:r>
-              <a:rPr lang="en-US" b="1" sz="5600">
-                <a:solidFill>
-                  <a:srgbClr val="F8B300"/>
-                </a:solidFill>
-                <a:latin typeface="Poppins Bold"/>
-                <a:ea typeface="Poppins Bold"/>
-                <a:cs typeface="Poppins Bold"/>
-                <a:sym typeface="Poppins Bold"/>
-              </a:rPr>
-              <a:t>AVE MERCY ON US</a:t>
-            </a:r>
-            <a:r>
-              <a:rPr lang="en-US" b="1" sz="5600">
-                <a:solidFill>
-                  <a:srgbClr val="FFFFFF"/>
-                </a:solidFill>
-                <a:latin typeface="Poppins Bold"/>
-                <a:ea typeface="Poppins Bold"/>
-                <a:cs typeface="Poppins Bold"/>
-                <a:sym typeface="Poppins Bold"/>
-              </a:rPr>
-              <a:t>.</a:t>
-            </a:r>
-          </a:p>
-        </p:txBody>
-      </p:sp>
-      <p:sp>
-        <p:nvSpPr>
-          <p:cNvPr name="TextBox 5" id="5"/>
-          <p:cNvSpPr txBox="true"/>
-          <p:nvPr/>
-        </p:nvSpPr>
-        <p:spPr>
-          <a:xfrm rot="0">
-            <a:off x="1646296" y="226228"/>
-            <a:ext cx="14995409" cy="1055243"/>
-          </a:xfrm>
-          <a:prstGeom prst="rect">
-            <a:avLst/>
-          </a:prstGeom>
-        </p:spPr>
-        <p:txBody>
-          <a:bodyPr anchor="t" rtlCol="false" tIns="0" lIns="0" bIns="0" rIns="0">
-            <a:spAutoFit/>
-          </a:bodyPr>
-          <a:lstStyle/>
-          <a:p>
-            <a:pPr algn="ctr" marL="0" indent="0" lvl="0">
-              <a:lnSpc>
-                <a:spcPts val="8175"/>
-              </a:lnSpc>
-              <a:spcBef>
-                <a:spcPct val="0"/>
-              </a:spcBef>
-              <a:defRPr/>
-            </a:pPr>
-            <a:r>
-              <a:rPr lang="en-US" sz="3850">
-                <a:solidFill>
-                  <a:srgbClr val="FFB800"/>
-                </a:solidFill>
-                <a:latin typeface="Georgia"/>
-                <a:ea typeface="Recoleta"/>
-                <a:cs typeface="Recoleta"/>
-                <a:sym typeface="Recoleta"/>
-              </a:rPr>
-              <a:t>Lamb of God</a:t>
-            </a:r>
-          </a:p>
-        </p:txBody>
-      </p:sp>
-      <p:sp>
-        <p:nvSpPr>
-          <p:cNvPr id="6" name="TextBox 5"/>
+          <p:cNvPr id="2" name="TextBox 1"/>
+          <p:cNvSpPr txBox="1"/>
+          <p:nvPr/>
+        </p:nvSpPr>
+        <p:spPr>
+          <a:xfrm>
+            <a:off x="0" y="0"/>
+            <a:ext cx="18288000" cy="10287000"/>
+          </a:xfrm>
+          <a:prstGeom prst="rect">
+            <a:avLst/>
+          </a:prstGeom>
+          <a:noFill/>
+        </p:spPr>
+        <p:txBody>
+          <a:bodyPr wrap="square" lIns="0" rIns="0" tIns="73152" bIns="73152" anchor="ctr">
+            <a:noAutofit/>
+          </a:bodyPr>
+          <a:lstStyle/>
+          <a:p>
+            <a:pPr algn="ctr">
+              <a:lnSpc>
+                <a:spcPct val="70000"/>
+              </a:lnSpc>
+            </a:pPr>
+            <a:r>
+              <a:rPr sz="6800" b="1" i="0">
+                <a:solidFill>
+                  <a:srgbClr val="FFFFFF"/>
+                </a:solidFill>
+                <a:latin typeface="Poppins"/>
+              </a:rPr>
+              <a:t>MAGMASID</a:t>
+            </a:r>
+          </a:p>
+          <a:p>
+            <a:pPr algn="ctr">
+              <a:lnSpc>
+                <a:spcPct val="70000"/>
+              </a:lnSpc>
+            </a:pPr>
+            <a:r>
+              <a:rPr sz="6800" b="1" i="0">
+                <a:solidFill>
+                  <a:srgbClr val="FFFFFF"/>
+                </a:solidFill>
+                <a:latin typeface="Poppins"/>
+              </a:rPr>
+              <a:t>AT MAMULAT SA KANYANG KAPANGYARIHAN</a:t>
+            </a:r>
+          </a:p>
+          <a:p>
+            <a:pPr algn="ctr">
+              <a:lnSpc>
+                <a:spcPct val="70000"/>
+              </a:lnSpc>
+            </a:pPr>
+            <a:r>
+              <a:rPr sz="6800" b="1" i="0">
+                <a:solidFill>
+                  <a:srgbClr val="FFFFFF"/>
+                </a:solidFill>
+                <a:latin typeface="Poppins"/>
+              </a:rPr>
+              <a:t>NABATID MO BA NA SIYA'Y NAGLALAAN</a:t>
+            </a:r>
+          </a:p>
+          <a:p>
+            <a:pPr algn="ctr">
+              <a:lnSpc>
+                <a:spcPct val="70000"/>
+              </a:lnSpc>
+            </a:pPr>
+            <a:r>
+              <a:rPr sz="6800" b="1" i="0">
+                <a:solidFill>
+                  <a:srgbClr val="FFFFFF"/>
+                </a:solidFill>
+                <a:latin typeface="Poppins"/>
+              </a:rPr>
+              <a:t>PATULOY NA NAGHAHATID NG TUNAY NA KALAYAAN</a:t>
+            </a:r>
+          </a:p>
+        </p:txBody>
+      </p:sp>
+      <p:sp>
+        <p:nvSpPr>
+          <p:cNvPr id="3" name="TextBox 2"/>
           <p:cNvSpPr txBox="1"/>
           <p:nvPr/>
         </p:nvSpPr>
@@ -13709,19 +14169,19 @@
           <a:lstStyle/>
           <a:p/>
           <a:p>
-            <a:pPr algn="l">
+            <a:pPr>
               <a:spcBef>
                 <a:spcPts val="200"/>
               </a:spcBef>
               <a:defRPr sz="1200" b="0" i="0" u="none">
                 <a:solidFill>
-                  <a:srgbClr val="D8B4FE"/>
+                  <a:srgbClr val="FFCC4D"/>
                 </a:solidFill>
                 <a:latin typeface="Georgia"/>
               </a:defRPr>
             </a:pPr>
             <a:r>
-              <a:t>Lamb of God</a:t>
+              <a:t>Communion (1)</a:t>
             </a:r>
           </a:p>
         </p:txBody>
@@ -13740,7 +14200,7 @@
     <p:bg>
       <p:bgPr>
         <a:solidFill>
-          <a:srgbClr val="211733"/>
+          <a:srgbClr val="000000"/>
         </a:solidFill>
         <a:effectLst/>
       </p:bgPr>
@@ -13760,8 +14220,8 @@
         </p:nvSpPr>
         <p:spPr>
           <a:xfrm>
-            <a:off x="914400" y="530352"/>
-            <a:ext cx="16459200" cy="8613648"/>
+            <a:off x="0" y="0"/>
+            <a:ext cx="18288000" cy="10287000"/>
           </a:xfrm>
           <a:prstGeom prst="rect">
             <a:avLst/>
@@ -13769,64 +14229,88 @@
           <a:noFill/>
         </p:spPr>
         <p:txBody>
-          <a:bodyPr wrap="square" lIns="109728" rIns="109728" tIns="73152" bIns="73152" anchor="ctr">
-            <a:noAutofit/>
-          </a:bodyPr>
-          <a:lstStyle/>
-          <a:p>
-            <a:pPr algn="ctr">
-              <a:spcBef>
-                <a:spcPts val="600"/>
-              </a:spcBef>
-              <a:spcAft>
-                <a:spcPts val="800"/>
-              </a:spcAft>
-            </a:pPr>
-            <a:r>
-              <a:rPr sz="5500" b="1">
-                <a:solidFill>
-                  <a:srgbClr val="F8B300"/>
-                </a:solidFill>
-                <a:latin typeface="Georgia"/>
-              </a:rPr>
-              <a:t>Priest: </a:t>
-            </a:r>
-            <a:r>
-              <a:rPr sz="5500" b="1">
-                <a:solidFill>
-                  <a:srgbClr val="FFFFFF"/>
-                </a:solidFill>
-                <a:latin typeface="Georgia"/>
-              </a:rPr>
-              <a:t>Behold the Lamb of God, behold him who takes away the sins of the world. Blessed are those called to the supper of the Lamb.</a:t>
-            </a:r>
-          </a:p>
-          <a:p>
-            <a:pPr algn="ctr">
-              <a:spcBef>
-                <a:spcPts val="600"/>
-              </a:spcBef>
-              <a:spcAft>
-                <a:spcPts val="800"/>
-              </a:spcAft>
-            </a:pPr>
-            <a:r>
-              <a:rPr sz="5500" b="1">
-                <a:solidFill>
-                  <a:srgbClr val="FFFFFF"/>
-                </a:solidFill>
-                <a:latin typeface="Georgia"/>
-              </a:rPr>
-              <a:t>All: </a:t>
-            </a:r>
-            <a:r>
-              <a:rPr sz="5500" b="1">
-                <a:solidFill>
-                  <a:srgbClr val="FFFFFF"/>
-                </a:solidFill>
-                <a:latin typeface="Georgia"/>
-              </a:rPr>
-              <a:t>Lord, I am not worthy that you should enter under my roof, but only say the word and my soul shall be healed.</a:t>
+          <a:bodyPr wrap="square" lIns="0" rIns="0" tIns="73152" bIns="73152" anchor="ctr">
+            <a:noAutofit/>
+          </a:bodyPr>
+          <a:lstStyle/>
+          <a:p>
+            <a:pPr algn="ctr">
+              <a:lnSpc>
+                <a:spcPct val="70000"/>
+              </a:lnSpc>
+            </a:pPr>
+            <a:r>
+              <a:rPr sz="7400" b="1" i="1">
+                <a:solidFill>
+                  <a:srgbClr val="FFB800"/>
+                </a:solidFill>
+                <a:latin typeface="Poppins"/>
+              </a:rPr>
+              <a:t>MANALIG KA</a:t>
+            </a:r>
+          </a:p>
+          <a:p>
+            <a:pPr algn="ctr">
+              <a:lnSpc>
+                <a:spcPct val="70000"/>
+              </a:lnSpc>
+            </a:pPr>
+            <a:r>
+              <a:rPr sz="7400" b="1" i="1">
+                <a:solidFill>
+                  <a:srgbClr val="FFB800"/>
+                </a:solidFill>
+                <a:latin typeface="Poppins"/>
+              </a:rPr>
+              <a:t>TUYUIN ANG LUHA SA MGA MATA</a:t>
+            </a:r>
+          </a:p>
+          <a:p>
+            <a:pPr algn="ctr">
+              <a:lnSpc>
+                <a:spcPct val="70000"/>
+              </a:lnSpc>
+            </a:pPr>
+            <a:r>
+              <a:rPr sz="7400" b="1" i="1">
+                <a:solidFill>
+                  <a:srgbClr val="FFB800"/>
+                </a:solidFill>
+                <a:latin typeface="Poppins"/>
+              </a:rPr>
+              <a:t>HINDI SIYA PANAGINIP</a:t>
+            </a:r>
+          </a:p>
+          <a:p>
+            <a:pPr algn="ctr">
+              <a:lnSpc>
+                <a:spcPct val="70000"/>
+              </a:lnSpc>
+            </a:pPr>
+            <a:r>
+              <a:rPr sz="7400" b="1" i="1">
+                <a:solidFill>
+                  <a:srgbClr val="FFB800"/>
+                </a:solidFill>
+                <a:latin typeface="Poppins"/>
+              </a:rPr>
+              <a:t>HINDI SIYA ISANG PANGARAP</a:t>
+            </a:r>
+          </a:p>
+          <a:p>
+            <a:pPr algn="ctr">
+              <a:lnSpc>
+                <a:spcPct val="70000"/>
+              </a:lnSpc>
+            </a:pPr>
+            <a:r>
+              <a:rPr sz="7400" b="1" i="1">
+                <a:solidFill>
+                  <a:srgbClr val="FFB800"/>
+                </a:solidFill>
+                <a:latin typeface="Poppins"/>
+              </a:rPr>
+              <a:t>SIYA AY BUHAY MANALIG KA</a:t>
             </a:r>
           </a:p>
         </p:txBody>
@@ -13854,19 +14338,19 @@
           <a:lstStyle/>
           <a:p/>
           <a:p>
-            <a:pPr algn="l">
+            <a:pPr>
               <a:spcBef>
                 <a:spcPts val="200"/>
               </a:spcBef>
               <a:defRPr sz="1200" b="0" i="0" u="none">
                 <a:solidFill>
-                  <a:srgbClr val="D8B4FE"/>
+                  <a:srgbClr val="FFCC4D"/>
                 </a:solidFill>
                 <a:latin typeface="Georgia"/>
               </a:defRPr>
             </a:pPr>
             <a:r>
-              <a:t>The Communion Rite</a:t>
+              <a:t>Communion (1)</a:t>
             </a:r>
           </a:p>
         </p:txBody>
@@ -13884,17 +14368,9 @@
   <p:cSld>
     <p:bg>
       <p:bgPr>
-        <a:gradFill rotWithShape="1">
-          <a:gsLst>
-            <a:gs pos="0">
-              <a:srgbClr val="0C0B11"/>
-            </a:gs>
-            <a:gs pos="100000">
-              <a:srgbClr val="5F586C"/>
-            </a:gs>
-          </a:gsLst>
-          <a:lin scaled="0" ang="0"/>
-        </a:gradFill>
+        <a:solidFill>
+          <a:srgbClr val="000000"/>
+        </a:solidFill>
         <a:effectLst/>
       </p:bgPr>
     </p:bg>
@@ -13907,116 +14383,14 @@
       <p:grpSpPr/>
       <p:sp>
         <p:nvSpPr>
-          <p:cNvPr id="2" name="Rounded Rectangle 1"/>
-          <p:cNvSpPr/>
-          <p:nvPr/>
-        </p:nvSpPr>
-        <p:spPr>
-          <a:xfrm>
-            <a:off x="6856171" y="1269187"/>
-            <a:ext cx="10943539" cy="6128308"/>
-          </a:xfrm>
-          <a:prstGeom prst="roundRect">
-            <a:avLst>
-              <a:gd name="adj" fmla="val 16670"/>
-            </a:avLst>
-          </a:prstGeom>
-          <a:solidFill>
-            <a:srgbClr val="211733">
-              <a:alpha val="44706"/>
-            </a:srgbClr>
-          </a:solidFill>
-          <a:ln w="14299" cap="sq">
-            <a:solidFill>
-              <a:srgbClr val="6C6678">
-                <a:alpha val="44706"/>
-              </a:srgbClr>
-            </a:solidFill>
-          </a:ln>
-        </p:spPr>
-        <p:style>
-          <a:lnRef idx="1">
-            <a:schemeClr val="accent1"/>
-          </a:lnRef>
-          <a:fillRef idx="3">
-            <a:schemeClr val="accent1"/>
-          </a:fillRef>
-          <a:effectRef idx="2">
-            <a:schemeClr val="accent1"/>
-          </a:effectRef>
-          <a:fontRef idx="minor">
-            <a:schemeClr val="lt1"/>
-          </a:fontRef>
-        </p:style>
-        <p:txBody>
-          <a:bodyPr rtlCol="0" anchor="ctr"/>
-          <a:lstStyle/>
-          <a:p>
-            <a:pPr algn="ctr"/>
-          </a:p>
-        </p:txBody>
-      </p:sp>
-      <p:sp>
-        <p:nvSpPr>
-          <p:cNvPr id="3" name="Rounded Rectangle 2"/>
-          <p:cNvSpPr/>
-          <p:nvPr/>
-        </p:nvSpPr>
-        <p:spPr>
-          <a:xfrm>
-            <a:off x="900684" y="8503005"/>
-            <a:ext cx="16486632" cy="1112824"/>
-          </a:xfrm>
-          <a:prstGeom prst="roundRect">
-            <a:avLst>
-              <a:gd name="adj" fmla="val 16670"/>
-            </a:avLst>
-          </a:prstGeom>
-          <a:solidFill>
-            <a:srgbClr val="161122">
-              <a:alpha val="60784"/>
-            </a:srgbClr>
-          </a:solidFill>
-          <a:ln w="14299" cap="sq">
-            <a:solidFill>
-              <a:srgbClr val="161122">
-                <a:alpha val="60784"/>
-              </a:srgbClr>
-            </a:solidFill>
-          </a:ln>
-        </p:spPr>
-        <p:style>
-          <a:lnRef idx="1">
-            <a:schemeClr val="accent1"/>
-          </a:lnRef>
-          <a:fillRef idx="3">
-            <a:schemeClr val="accent1"/>
-          </a:fillRef>
-          <a:effectRef idx="2">
-            <a:schemeClr val="accent1"/>
-          </a:effectRef>
-          <a:fontRef idx="minor">
-            <a:schemeClr val="lt1"/>
-          </a:fontRef>
-        </p:style>
-        <p:txBody>
-          <a:bodyPr rtlCol="0" anchor="ctr"/>
-          <a:lstStyle/>
-          <a:p>
-            <a:pPr algn="ctr"/>
-          </a:p>
-        </p:txBody>
-      </p:sp>
-      <p:sp>
-        <p:nvSpPr>
-          <p:cNvPr id="4" name="TextBox 3"/>
+          <p:cNvPr id="2" name="TextBox 1"/>
           <p:cNvSpPr txBox="1"/>
           <p:nvPr/>
         </p:nvSpPr>
         <p:spPr>
           <a:xfrm>
-            <a:off x="1284732" y="2390241"/>
-            <a:ext cx="4209897" cy="638251"/>
+            <a:off x="0" y="0"/>
+            <a:ext cx="18288000" cy="10287000"/>
           </a:xfrm>
           <a:prstGeom prst="rect">
             <a:avLst/>
@@ -14024,38 +14398,70 @@
           <a:noFill/>
         </p:spPr>
         <p:txBody>
-          <a:bodyPr wrap="square" lIns="109728" rIns="109728" tIns="73152" bIns="73152" anchor="ctr">
-            <a:noAutofit/>
-          </a:bodyPr>
-          <a:lstStyle/>
-          <a:p>
-            <a:pPr algn="ctr">
-              <a:lnSpc>
-                <a:spcPct val="108000"/>
-              </a:lnSpc>
-              <a:defRPr sz="3700" b="1" i="0" u="none">
-                <a:solidFill>
-                  <a:srgbClr val="E8D4FE"/>
-                </a:solidFill>
-                <a:latin typeface="Calibri"/>
-              </a:defRPr>
-            </a:pPr>
-            <a:r>
-              <a:t>MASS CELEBRANT:</a:t>
-            </a:r>
-          </a:p>
-        </p:txBody>
-      </p:sp>
-      <p:sp>
-        <p:nvSpPr>
-          <p:cNvPr id="5" name="TextBox 4"/>
+          <a:bodyPr wrap="square" lIns="0" rIns="0" tIns="73152" bIns="73152" anchor="ctr">
+            <a:noAutofit/>
+          </a:bodyPr>
+          <a:lstStyle/>
+          <a:p>
+            <a:pPr algn="ctr">
+              <a:lnSpc>
+                <a:spcPct val="70000"/>
+              </a:lnSpc>
+            </a:pPr>
+            <a:r>
+              <a:rPr sz="6200" b="1" i="0">
+                <a:solidFill>
+                  <a:srgbClr val="FFFFFF"/>
+                </a:solidFill>
+                <a:latin typeface="Poppins"/>
+              </a:rPr>
+              <a:t>ANG NGAYON TILA WALANG MARARATING NA BUKAS</a:t>
+            </a:r>
+          </a:p>
+          <a:p>
+            <a:pPr algn="ctr">
+              <a:lnSpc>
+                <a:spcPct val="70000"/>
+              </a:lnSpc>
+            </a:pPr>
+            <a:r>
+              <a:rPr sz="6200" b="1" i="0">
+                <a:solidFill>
+                  <a:srgbClr val="FFFFFF"/>
+                </a:solidFill>
+                <a:latin typeface="Poppins"/>
+              </a:rPr>
+              <a:t>NGUNIT KUNG SIYA ANG ATING HAYAANG MAGLANDAS</a:t>
+            </a:r>
+          </a:p>
+          <a:p>
+            <a:pPr algn="ctr">
+              <a:lnSpc>
+                <a:spcPct val="70000"/>
+              </a:lnSpc>
+            </a:pPr>
+            <a:r>
+              <a:rPr sz="6200" b="1" i="0">
+                <a:solidFill>
+                  <a:srgbClr val="FFFFFF"/>
+                </a:solidFill>
+                <a:latin typeface="Poppins"/>
+              </a:rPr>
+              <a:t>PAG-ASA AY MULING MABIBIGKAS</a:t>
+            </a:r>
+          </a:p>
+        </p:txBody>
+      </p:sp>
+      <p:sp>
+        <p:nvSpPr>
+          <p:cNvPr id="3" name="TextBox 2"/>
           <p:cNvSpPr txBox="1"/>
           <p:nvPr/>
         </p:nvSpPr>
         <p:spPr>
           <a:xfrm>
-            <a:off x="267004" y="3053181"/>
-            <a:ext cx="6589166" cy="1057046"/>
+            <a:off x="914400" y="9418320"/>
+            <a:ext cx="16459200" cy="777240"/>
           </a:xfrm>
           <a:prstGeom prst="rect">
             <a:avLst/>
@@ -14063,180 +14469,25 @@
           <a:noFill/>
         </p:spPr>
         <p:txBody>
-          <a:bodyPr wrap="square" lIns="109728" rIns="109728" tIns="73152" bIns="73152" anchor="ctr">
-            <a:noAutofit/>
-          </a:bodyPr>
-          <a:lstStyle/>
-          <a:p>
-            <a:pPr algn="ctr">
-              <a:lnSpc>
-                <a:spcPct val="108000"/>
-              </a:lnSpc>
-              <a:defRPr sz="3400" b="1" i="0" u="none">
-                <a:solidFill>
-                  <a:srgbClr val="FFFFFF"/>
-                </a:solidFill>
-                <a:latin typeface="Calibri"/>
-              </a:defRPr>
-            </a:pPr>
-            <a:r>
-              <a:t>Rev. Fr. Jonrey Lauron, RCJ · Divino Gabriel</a:t>
-            </a:r>
-          </a:p>
-        </p:txBody>
-      </p:sp>
-      <p:sp>
-        <p:nvSpPr>
-          <p:cNvPr id="6" name="TextBox 5"/>
-          <p:cNvSpPr txBox="1"/>
-          <p:nvPr/>
-        </p:nvSpPr>
-        <p:spPr>
-          <a:xfrm>
-            <a:off x="267004" y="4429353"/>
-            <a:ext cx="6589166" cy="868680"/>
-          </a:xfrm>
-          <a:prstGeom prst="rect">
-            <a:avLst/>
-          </a:prstGeom>
-          <a:noFill/>
-        </p:spPr>
-        <p:txBody>
-          <a:bodyPr wrap="square" lIns="109728" rIns="109728" tIns="73152" bIns="73152" anchor="ctr">
-            <a:noAutofit/>
-          </a:bodyPr>
-          <a:lstStyle/>
-          <a:p>
-            <a:pPr algn="ctr">
-              <a:lnSpc>
-                <a:spcPct val="108000"/>
-              </a:lnSpc>
-              <a:defRPr sz="4700" b="1" i="1" u="none">
-                <a:solidFill>
-                  <a:srgbClr val="FFFFFF"/>
-                </a:solidFill>
-                <a:latin typeface="Calibri"/>
-              </a:defRPr>
-            </a:pPr>
-            <a:r>
-              <a:t>YEAR A · 21 JUNE 2026</a:t>
-            </a:r>
-          </a:p>
-        </p:txBody>
-      </p:sp>
-      <p:sp>
-        <p:nvSpPr>
-          <p:cNvPr id="7" name="TextBox 6"/>
-          <p:cNvSpPr txBox="1"/>
-          <p:nvPr/>
-        </p:nvSpPr>
-        <p:spPr>
-          <a:xfrm>
-            <a:off x="6900062" y="2390241"/>
-            <a:ext cx="10775289" cy="2422245"/>
-          </a:xfrm>
-          <a:prstGeom prst="rect">
-            <a:avLst/>
-          </a:prstGeom>
-          <a:noFill/>
-        </p:spPr>
-        <p:txBody>
-          <a:bodyPr wrap="square" lIns="109728" rIns="109728" tIns="73152" bIns="73152" anchor="ctr">
-            <a:noAutofit/>
-          </a:bodyPr>
-          <a:lstStyle/>
-          <a:p>
-            <a:pPr algn="ctr">
-              <a:lnSpc>
-                <a:spcPct val="108000"/>
-              </a:lnSpc>
-              <a:defRPr sz="3900" b="0" i="0" u="none">
-                <a:solidFill>
-                  <a:srgbClr val="FEF5E4"/>
-                </a:solidFill>
-                <a:latin typeface="Calibri"/>
-              </a:defRPr>
-            </a:pPr>
-            <a:r>
-              <a:t>“Fear no one.”</a:t>
-            </a:r>
-          </a:p>
-        </p:txBody>
-      </p:sp>
-      <p:sp>
-        <p:nvSpPr>
-          <p:cNvPr id="8" name="TextBox 7"/>
-          <p:cNvSpPr txBox="1"/>
-          <p:nvPr/>
-        </p:nvSpPr>
-        <p:spPr>
-          <a:xfrm>
-            <a:off x="9378086" y="5801868"/>
-            <a:ext cx="5819241" cy="705002"/>
-          </a:xfrm>
-          <a:prstGeom prst="rect">
-            <a:avLst/>
-          </a:prstGeom>
-          <a:noFill/>
-        </p:spPr>
-        <p:txBody>
-          <a:bodyPr wrap="square" lIns="109728" rIns="109728" tIns="73152" bIns="73152" anchor="ctr">
-            <a:noAutofit/>
-          </a:bodyPr>
-          <a:lstStyle/>
-          <a:p>
-            <a:pPr algn="ctr">
-              <a:lnSpc>
-                <a:spcPct val="108000"/>
-              </a:lnSpc>
-              <a:defRPr sz="3500" b="1" i="0" u="none">
-                <a:solidFill>
-                  <a:srgbClr val="DDBDFE"/>
-                </a:solidFill>
-                <a:latin typeface="Calibri"/>
-              </a:defRPr>
-            </a:pPr>
-            <a:r>
-              <a:t>GOSPEL (MATTHEW 10:26–33)</a:t>
-            </a:r>
-          </a:p>
-        </p:txBody>
-      </p:sp>
-      <p:sp>
-        <p:nvSpPr>
-          <p:cNvPr id="9" name="TextBox 8"/>
-          <p:cNvSpPr txBox="1"/>
-          <p:nvPr/>
-        </p:nvSpPr>
-        <p:spPr>
-          <a:xfrm>
-            <a:off x="3195828" y="8411565"/>
-            <a:ext cx="12362688" cy="1162202"/>
-          </a:xfrm>
-          <a:prstGeom prst="rect">
-            <a:avLst/>
-          </a:prstGeom>
-          <a:noFill/>
-        </p:spPr>
-        <p:txBody>
-          <a:bodyPr wrap="square" lIns="109728" rIns="109728" tIns="73152" bIns="73152" anchor="ctr">
-            <a:noAutofit/>
-          </a:bodyPr>
-          <a:lstStyle/>
-          <a:p>
-            <a:pPr algn="ctr">
-              <a:lnSpc>
-                <a:spcPct val="108000"/>
-              </a:lnSpc>
-              <a:defRPr sz="6600" b="1" i="0" u="none">
-                <a:solidFill>
-                  <a:srgbClr val="FFFFFF"/>
-                </a:solidFill>
-                <a:latin typeface="Calibri"/>
-              </a:defRPr>
-            </a:pPr>
-            <a:r>
-              <a:t>12th Sunday in Ordinary Time</a:t>
+          <a:bodyPr wrap="square" lIns="109728" rIns="109728" tIns="73152" bIns="73152">
+            <a:noAutofit/>
+          </a:bodyPr>
+          <a:lstStyle/>
+          <a:p/>
+          <a:p>
+            <a:pPr>
+              <a:spcBef>
+                <a:spcPts val="200"/>
+              </a:spcBef>
+              <a:defRPr sz="1200" b="0" i="0" u="none">
+                <a:solidFill>
+                  <a:srgbClr val="FFCC4D"/>
+                </a:solidFill>
+                <a:latin typeface="Georgia"/>
+              </a:defRPr>
+            </a:pPr>
+            <a:r>
+              <a:t>Communion (1)</a:t>
             </a:r>
           </a:p>
         </p:txBody>
@@ -14275,8 +14526,8 @@
         </p:nvSpPr>
         <p:spPr>
           <a:xfrm>
-            <a:off x="914400" y="109728"/>
-            <a:ext cx="16459200" cy="868680"/>
+            <a:off x="0" y="0"/>
+            <a:ext cx="18288000" cy="10287000"/>
           </a:xfrm>
           <a:prstGeom prst="rect">
             <a:avLst/>
@@ -14284,20 +14535,88 @@
           <a:noFill/>
         </p:spPr>
         <p:txBody>
-          <a:bodyPr wrap="square" lIns="109728" rIns="109728" tIns="73152" bIns="73152">
-            <a:noAutofit/>
-          </a:bodyPr>
-          <a:lstStyle/>
-          <a:p>
-            <a:pPr algn="ctr"/>
-            <a:r>
-              <a:rPr sz="3850" b="1" u="sng">
-                <a:solidFill>
-                  <a:srgbClr val="FFCC4D"/>
-                </a:solidFill>
-                <a:latin typeface="Georgia"/>
-              </a:rPr>
-              <a:t>Manalig Ka</a:t>
+          <a:bodyPr wrap="square" lIns="0" rIns="0" tIns="73152" bIns="73152" anchor="ctr">
+            <a:noAutofit/>
+          </a:bodyPr>
+          <a:lstStyle/>
+          <a:p>
+            <a:pPr algn="ctr">
+              <a:lnSpc>
+                <a:spcPct val="70000"/>
+              </a:lnSpc>
+            </a:pPr>
+            <a:r>
+              <a:rPr sz="7400" b="1" i="1">
+                <a:solidFill>
+                  <a:srgbClr val="FFB800"/>
+                </a:solidFill>
+                <a:latin typeface="Poppins"/>
+              </a:rPr>
+              <a:t>MANALIG KA</a:t>
+            </a:r>
+          </a:p>
+          <a:p>
+            <a:pPr algn="ctr">
+              <a:lnSpc>
+                <a:spcPct val="70000"/>
+              </a:lnSpc>
+            </a:pPr>
+            <a:r>
+              <a:rPr sz="7400" b="1" i="1">
+                <a:solidFill>
+                  <a:srgbClr val="FFB800"/>
+                </a:solidFill>
+                <a:latin typeface="Poppins"/>
+              </a:rPr>
+              <a:t>TUYUIN ANG LUHA SA MGA MATA</a:t>
+            </a:r>
+          </a:p>
+          <a:p>
+            <a:pPr algn="ctr">
+              <a:lnSpc>
+                <a:spcPct val="70000"/>
+              </a:lnSpc>
+            </a:pPr>
+            <a:r>
+              <a:rPr sz="7400" b="1" i="1">
+                <a:solidFill>
+                  <a:srgbClr val="FFB800"/>
+                </a:solidFill>
+                <a:latin typeface="Poppins"/>
+              </a:rPr>
+              <a:t>HINDI SIYA PANAGINIP</a:t>
+            </a:r>
+          </a:p>
+          <a:p>
+            <a:pPr algn="ctr">
+              <a:lnSpc>
+                <a:spcPct val="70000"/>
+              </a:lnSpc>
+            </a:pPr>
+            <a:r>
+              <a:rPr sz="7400" b="1" i="1">
+                <a:solidFill>
+                  <a:srgbClr val="FFB800"/>
+                </a:solidFill>
+                <a:latin typeface="Poppins"/>
+              </a:rPr>
+              <a:t>HINDI SIYA ISANG PANGARAP</a:t>
+            </a:r>
+          </a:p>
+          <a:p>
+            <a:pPr algn="ctr">
+              <a:lnSpc>
+                <a:spcPct val="70000"/>
+              </a:lnSpc>
+            </a:pPr>
+            <a:r>
+              <a:rPr sz="7400" b="1" i="1">
+                <a:solidFill>
+                  <a:srgbClr val="FFB800"/>
+                </a:solidFill>
+                <a:latin typeface="Poppins"/>
+              </a:rPr>
+              <a:t>SIYA AY BUHAY MANALIG KA</a:t>
             </a:r>
           </a:p>
         </p:txBody>
@@ -14305,93 +14624,6 @@
       <p:sp>
         <p:nvSpPr>
           <p:cNvPr id="3" name="TextBox 2"/>
-          <p:cNvSpPr txBox="1"/>
-          <p:nvPr/>
-        </p:nvSpPr>
-        <p:spPr>
-          <a:xfrm>
-            <a:off x="0" y="1069848"/>
-            <a:ext cx="18288000" cy="8348472"/>
-          </a:xfrm>
-          <a:prstGeom prst="rect">
-            <a:avLst/>
-          </a:prstGeom>
-          <a:noFill/>
-        </p:spPr>
-        <p:txBody>
-          <a:bodyPr wrap="square" lIns="0" rIns="0" tIns="73152" bIns="73152" anchor="ctr">
-            <a:noAutofit/>
-          </a:bodyPr>
-          <a:lstStyle/>
-          <a:p>
-            <a:pPr algn="ctr">
-              <a:lnSpc>
-                <a:spcPct val="70000"/>
-              </a:lnSpc>
-            </a:pPr>
-            <a:r>
-              <a:rPr sz="7200" b="1" i="0">
-                <a:solidFill>
-                  <a:srgbClr val="FFFFFF"/>
-                </a:solidFill>
-                <a:latin typeface="Poppins"/>
-              </a:rPr>
-              <a:t>ILUOM LAHAT NG TAKOT SA IYONG DAMDAMIN</a:t>
-            </a:r>
-          </a:p>
-          <a:p>
-            <a:pPr algn="ctr">
-              <a:lnSpc>
-                <a:spcPct val="70000"/>
-              </a:lnSpc>
-            </a:pPr>
-            <a:r>
-              <a:rPr sz="7200" b="1" i="0">
-                <a:solidFill>
-                  <a:srgbClr val="FFFFFF"/>
-                </a:solidFill>
-                <a:latin typeface="Poppins"/>
-              </a:rPr>
-              <a:t>ANG PANGALAN N'YA LAGI ANG TAWAGIN</a:t>
-            </a:r>
-          </a:p>
-          <a:p>
-            <a:pPr algn="ctr">
-              <a:lnSpc>
-                <a:spcPct val="70000"/>
-              </a:lnSpc>
-            </a:pPr>
-            <a:r>
-              <a:rPr sz="7200" b="1" i="0">
-                <a:solidFill>
-                  <a:srgbClr val="FFFFFF"/>
-                </a:solidFill>
-                <a:latin typeface="Poppins"/>
-              </a:rPr>
-              <a:t>AT SIYA'Y NAKIKINIG</a:t>
-            </a:r>
-          </a:p>
-          <a:p>
-            <a:pPr algn="ctr">
-              <a:lnSpc>
-                <a:spcPct val="70000"/>
-              </a:lnSpc>
-            </a:pPr>
-            <a:r>
-              <a:rPr sz="7200" b="1" i="0">
-                <a:solidFill>
-                  <a:srgbClr val="FFFFFF"/>
-                </a:solidFill>
-                <a:latin typeface="Poppins"/>
-              </a:rPr>
-              <a:t>SA BAWAT HINAING</a:t>
-            </a:r>
-          </a:p>
-        </p:txBody>
-      </p:sp>
-      <p:sp>
-        <p:nvSpPr>
-          <p:cNvPr id="4" name="TextBox 3"/>
           <p:cNvSpPr txBox="1"/>
           <p:nvPr/>
         </p:nvSpPr>
@@ -14483,13 +14715,13 @@
               </a:lnSpc>
             </a:pPr>
             <a:r>
-              <a:rPr sz="6800" b="1" i="0">
+              <a:rPr sz="7200" b="1" i="0">
                 <a:solidFill>
                   <a:srgbClr val="FFFFFF"/>
                 </a:solidFill>
                 <a:latin typeface="Poppins"/>
               </a:rPr>
-              <a:t>MAGMASID</a:t>
+              <a:t>MANALIG KA</a:t>
             </a:r>
           </a:p>
           <a:p>
@@ -14499,13 +14731,13 @@
               </a:lnSpc>
             </a:pPr>
             <a:r>
-              <a:rPr sz="6800" b="1" i="0">
+              <a:rPr sz="7200" b="1" i="0">
                 <a:solidFill>
                   <a:srgbClr val="FFFFFF"/>
                 </a:solidFill>
                 <a:latin typeface="Poppins"/>
               </a:rPr>
-              <a:t>AT MAMULAT SA KANYANG KAPANGYARIHAN</a:t>
+              <a:t>TUYUIN ANG LUHA SA MGA MATA</a:t>
             </a:r>
           </a:p>
           <a:p>
@@ -14515,13 +14747,13 @@
               </a:lnSpc>
             </a:pPr>
             <a:r>
-              <a:rPr sz="6800" b="1" i="0">
+              <a:rPr sz="7200" b="1" i="0">
                 <a:solidFill>
                   <a:srgbClr val="FFFFFF"/>
                 </a:solidFill>
                 <a:latin typeface="Poppins"/>
               </a:rPr>
-              <a:t>NABATID MO BA NA SIYA'Y NAGLALAAN</a:t>
+              <a:t>HINDI SIYA NATUTULOG</a:t>
             </a:r>
           </a:p>
           <a:p>
@@ -14531,13 +14763,45 @@
               </a:lnSpc>
             </a:pPr>
             <a:r>
-              <a:rPr sz="6800" b="1" i="0">
+              <a:rPr sz="7200" b="1" i="0">
                 <a:solidFill>
                   <a:srgbClr val="FFFFFF"/>
                 </a:solidFill>
                 <a:latin typeface="Poppins"/>
               </a:rPr>
-              <a:t>PATULOY NA NAGHAHATID NG TUNAY NA KALAYAAN</a:t>
+              <a:t>HINDI NAKAKALIMOT</a:t>
+            </a:r>
+          </a:p>
+          <a:p>
+            <a:pPr algn="ctr">
+              <a:lnSpc>
+                <a:spcPct val="70000"/>
+              </a:lnSpc>
+            </a:pPr>
+            <a:r>
+              <a:rPr sz="7200" b="1" i="0">
+                <a:solidFill>
+                  <a:srgbClr val="FFFFFF"/>
+                </a:solidFill>
+                <a:latin typeface="Poppins"/>
+              </a:rPr>
+              <a:t>KAY HESUS MANALIG KA</a:t>
+            </a:r>
+          </a:p>
+          <a:p>
+            <a:pPr algn="ctr">
+              <a:lnSpc>
+                <a:spcPct val="70000"/>
+              </a:lnSpc>
+            </a:pPr>
+            <a:r>
+              <a:rPr sz="7200" b="1" i="0">
+                <a:solidFill>
+                  <a:srgbClr val="FFFFFF"/>
+                </a:solidFill>
+                <a:latin typeface="Poppins"/>
+              </a:rPr>
+              <a:t>KAY HESUS MANALIG KA</a:t>
             </a:r>
           </a:p>
         </p:txBody>
@@ -14616,8 +14880,8 @@
         </p:nvSpPr>
         <p:spPr>
           <a:xfrm>
-            <a:off x="0" y="0"/>
-            <a:ext cx="18288000" cy="10287000"/>
+            <a:off x="914400" y="109728"/>
+            <a:ext cx="16459200" cy="868680"/>
           </a:xfrm>
           <a:prstGeom prst="rect">
             <a:avLst/>
@@ -14625,6 +14889,41 @@
           <a:noFill/>
         </p:spPr>
         <p:txBody>
+          <a:bodyPr wrap="square" lIns="109728" rIns="109728" tIns="73152" bIns="73152">
+            <a:noAutofit/>
+          </a:bodyPr>
+          <a:lstStyle/>
+          <a:p>
+            <a:pPr algn="ctr"/>
+            <a:r>
+              <a:rPr sz="3850" b="1" u="sng">
+                <a:solidFill>
+                  <a:srgbClr val="FFCC4D"/>
+                </a:solidFill>
+                <a:latin typeface="Georgia"/>
+              </a:rPr>
+              <a:t>Isang Bansa</a:t>
+            </a:r>
+          </a:p>
+        </p:txBody>
+      </p:sp>
+      <p:sp>
+        <p:nvSpPr>
+          <p:cNvPr id="3" name="TextBox 2"/>
+          <p:cNvSpPr txBox="1"/>
+          <p:nvPr/>
+        </p:nvSpPr>
+        <p:spPr>
+          <a:xfrm>
+            <a:off x="0" y="1069848"/>
+            <a:ext cx="18288000" cy="8348472"/>
+          </a:xfrm>
+          <a:prstGeom prst="rect">
+            <a:avLst/>
+          </a:prstGeom>
+          <a:noFill/>
+        </p:spPr>
+        <p:txBody>
           <a:bodyPr wrap="square" lIns="0" rIns="0" tIns="73152" bIns="73152" anchor="ctr">
             <a:noAutofit/>
           </a:bodyPr>
@@ -14636,13 +14935,13 @@
               </a:lnSpc>
             </a:pPr>
             <a:r>
-              <a:rPr sz="7400" b="1" i="1">
-                <a:solidFill>
-                  <a:srgbClr val="FFB800"/>
+              <a:rPr sz="7500" b="1" i="0">
+                <a:solidFill>
+                  <a:srgbClr val="FFFFFF"/>
                 </a:solidFill>
                 <a:latin typeface="Poppins"/>
               </a:rPr>
-              <a:t>MANALIG KA</a:t>
+              <a:t>OH KAY GANDA NG ATING BUHAY</a:t>
             </a:r>
           </a:p>
           <a:p>
@@ -14652,13 +14951,13 @@
               </a:lnSpc>
             </a:pPr>
             <a:r>
-              <a:rPr sz="7400" b="1" i="1">
-                <a:solidFill>
-                  <a:srgbClr val="FFB800"/>
+              <a:rPr sz="7500" b="1" i="0">
+                <a:solidFill>
+                  <a:srgbClr val="FFFFFF"/>
                 </a:solidFill>
                 <a:latin typeface="Poppins"/>
               </a:rPr>
-              <a:t>TUYUIN ANG LUHA SA MGA MATA</a:t>
+              <a:t>NAPUPUSPOS NG PAGPAPALA</a:t>
             </a:r>
           </a:p>
           <a:p>
@@ -14668,13 +14967,13 @@
               </a:lnSpc>
             </a:pPr>
             <a:r>
-              <a:rPr sz="7400" b="1" i="1">
-                <a:solidFill>
-                  <a:srgbClr val="FFB800"/>
+              <a:rPr sz="7500" b="1" i="0">
+                <a:solidFill>
+                  <a:srgbClr val="FFFFFF"/>
                 </a:solidFill>
                 <a:latin typeface="Poppins"/>
               </a:rPr>
-              <a:t>HINDI SIYA PANAGINIP</a:t>
+              <a:t>NG SAKRAMENTONG MAHIWAGA</a:t>
             </a:r>
           </a:p>
           <a:p>
@@ -14684,36 +14983,20 @@
               </a:lnSpc>
             </a:pPr>
             <a:r>
-              <a:rPr sz="7400" b="1" i="1">
-                <a:solidFill>
-                  <a:srgbClr val="FFB800"/>
+              <a:rPr sz="7500" b="1" i="0">
+                <a:solidFill>
+                  <a:srgbClr val="FFFFFF"/>
                 </a:solidFill>
                 <a:latin typeface="Poppins"/>
               </a:rPr>
-              <a:t>HINDI SIYA ISANG PANGARAP</a:t>
-            </a:r>
-          </a:p>
-          <a:p>
-            <a:pPr algn="ctr">
-              <a:lnSpc>
-                <a:spcPct val="70000"/>
-              </a:lnSpc>
-            </a:pPr>
-            <a:r>
-              <a:rPr sz="7400" b="1" i="1">
-                <a:solidFill>
-                  <a:srgbClr val="FFB800"/>
-                </a:solidFill>
-                <a:latin typeface="Poppins"/>
-              </a:rPr>
-              <a:t>SIYA AY BUHAY MANALIG KA</a:t>
-            </a:r>
-          </a:p>
-        </p:txBody>
-      </p:sp>
-      <p:sp>
-        <p:nvSpPr>
-          <p:cNvPr id="3" name="TextBox 2"/>
+              <a:t>KALOOB NI HESUS SA’TING GABAY</a:t>
+            </a:r>
+          </a:p>
+        </p:txBody>
+      </p:sp>
+      <p:sp>
+        <p:nvSpPr>
+          <p:cNvPr id="4" name="TextBox 3"/>
           <p:cNvSpPr txBox="1"/>
           <p:nvPr/>
         </p:nvSpPr>
@@ -14746,7 +15029,7 @@
               </a:defRPr>
             </a:pPr>
             <a:r>
-              <a:t>Communion (1)</a:t>
+              <a:t>Communion (2)</a:t>
             </a:r>
           </a:p>
         </p:txBody>
@@ -14958,13 +15241,13 @@
               </a:lnSpc>
             </a:pPr>
             <a:r>
-              <a:rPr sz="6200" b="1" i="0">
+              <a:rPr sz="7500" b="1" i="0">
                 <a:solidFill>
                   <a:srgbClr val="FFFFFF"/>
                 </a:solidFill>
                 <a:latin typeface="Poppins"/>
               </a:rPr>
-              <a:t>ANG NGAYON TILA WALANG MARARATING NA BUKAS</a:t>
+              <a:t>OH KAY TAMIS NG PAGSASAMA</a:t>
             </a:r>
           </a:p>
           <a:p>
@@ -14974,13 +15257,13 @@
               </a:lnSpc>
             </a:pPr>
             <a:r>
-              <a:rPr sz="6200" b="1" i="0">
+              <a:rPr sz="7500" b="1" i="0">
                 <a:solidFill>
                   <a:srgbClr val="FFFFFF"/>
                 </a:solidFill>
                 <a:latin typeface="Poppins"/>
               </a:rPr>
-              <a:t>NGUNIT KUNG SIYA ANG ATING HAYAANG MAGLANDAS</a:t>
+              <a:t>NAGMUMULA SA PAGKAKAISA</a:t>
             </a:r>
           </a:p>
           <a:p>
@@ -14990,13 +15273,29 @@
               </a:lnSpc>
             </a:pPr>
             <a:r>
-              <a:rPr sz="6200" b="1" i="0">
+              <a:rPr sz="7500" b="1" i="0">
                 <a:solidFill>
                   <a:srgbClr val="FFFFFF"/>
                 </a:solidFill>
                 <a:latin typeface="Poppins"/>
               </a:rPr>
-              <a:t>PAG-ASA AY MULING MABIBIGKAS</a:t>
+              <a:t>BUMUBUKAL SA PAGSASALO</a:t>
+            </a:r>
+          </a:p>
+          <a:p>
+            <a:pPr algn="ctr">
+              <a:lnSpc>
+                <a:spcPct val="70000"/>
+              </a:lnSpc>
+            </a:pPr>
+            <a:r>
+              <a:rPr sz="7500" b="1" i="0">
+                <a:solidFill>
+                  <a:srgbClr val="FFFFFF"/>
+                </a:solidFill>
+                <a:latin typeface="Poppins"/>
+              </a:rPr>
+              <a:t>SA IISANG HAPAG AY DUMALO</a:t>
             </a:r>
           </a:p>
         </p:txBody>
@@ -15036,7 +15335,7 @@
               </a:defRPr>
             </a:pPr>
             <a:r>
-              <a:t>Communion (1)</a:t>
+              <a:t>Communion (2)</a:t>
             </a:r>
           </a:p>
         </p:txBody>
@@ -15095,13 +15394,13 @@
               </a:lnSpc>
             </a:pPr>
             <a:r>
-              <a:rPr sz="7400" b="1" i="1">
-                <a:solidFill>
-                  <a:srgbClr val="FFB800"/>
+              <a:rPr sz="7500" b="1" i="0">
+                <a:solidFill>
+                  <a:srgbClr val="FFFFFF"/>
                 </a:solidFill>
                 <a:latin typeface="Poppins"/>
               </a:rPr>
-              <a:t>MANALIG KA</a:t>
+              <a:t>PURIHIN SI HESUS SA SAKRAMENTO</a:t>
             </a:r>
           </a:p>
           <a:p>
@@ -15111,13 +15410,13 @@
               </a:lnSpc>
             </a:pPr>
             <a:r>
-              <a:rPr sz="7400" b="1" i="1">
-                <a:solidFill>
-                  <a:srgbClr val="FFB800"/>
+              <a:rPr sz="7500" b="1" i="0">
+                <a:solidFill>
+                  <a:srgbClr val="FFFFFF"/>
                 </a:solidFill>
                 <a:latin typeface="Poppins"/>
               </a:rPr>
-              <a:t>TUYUIN ANG LUHA SA MGA MATA</a:t>
+              <a:t>PURIHIN NG LAHAT NG TAO</a:t>
             </a:r>
           </a:p>
           <a:p>
@@ -15127,13 +15426,13 @@
               </a:lnSpc>
             </a:pPr>
             <a:r>
-              <a:rPr sz="7400" b="1" i="1">
-                <a:solidFill>
-                  <a:srgbClr val="FFB800"/>
+              <a:rPr sz="7500" b="1" i="0">
+                <a:solidFill>
+                  <a:srgbClr val="FFFFFF"/>
                 </a:solidFill>
                 <a:latin typeface="Poppins"/>
               </a:rPr>
-              <a:t>HINDI SIYA PANAGINIP</a:t>
+              <a:t>PURIHIN SIYA NG PILIPINO</a:t>
             </a:r>
           </a:p>
           <a:p>
@@ -15143,29 +15442,13 @@
               </a:lnSpc>
             </a:pPr>
             <a:r>
-              <a:rPr sz="7400" b="1" i="1">
-                <a:solidFill>
-                  <a:srgbClr val="FFB800"/>
+              <a:rPr sz="7500" b="1" i="0">
+                <a:solidFill>
+                  <a:srgbClr val="FFFFFF"/>
                 </a:solidFill>
                 <a:latin typeface="Poppins"/>
               </a:rPr>
-              <a:t>HINDI SIYA ISANG PANGARAP</a:t>
-            </a:r>
-          </a:p>
-          <a:p>
-            <a:pPr algn="ctr">
-              <a:lnSpc>
-                <a:spcPct val="70000"/>
-              </a:lnSpc>
-            </a:pPr>
-            <a:r>
-              <a:rPr sz="7400" b="1" i="1">
-                <a:solidFill>
-                  <a:srgbClr val="FFB800"/>
-                </a:solidFill>
-                <a:latin typeface="Poppins"/>
-              </a:rPr>
-              <a:t>SIYA AY BUHAY MANALIG KA</a:t>
+              <a:t>SA PAGKAKAISA’Y LINGAPIN MO</a:t>
             </a:r>
           </a:p>
         </p:txBody>
@@ -15205,7 +15488,7 @@
               </a:defRPr>
             </a:pPr>
             <a:r>
-              <a:t>Communion (1)</a:t>
+              <a:t>Communion (2)</a:t>
             </a:r>
           </a:p>
         </p:txBody>
@@ -15224,7 +15507,7 @@
     <p:bg>
       <p:bgPr>
         <a:solidFill>
-          <a:srgbClr val="000000"/>
+          <a:srgbClr val="211733"/>
         </a:solidFill>
         <a:effectLst/>
       </p:bgPr>
@@ -15244,8 +15527,8 @@
         </p:nvSpPr>
         <p:spPr>
           <a:xfrm>
-            <a:off x="0" y="0"/>
-            <a:ext cx="18288000" cy="10287000"/>
+            <a:off x="914400" y="530352"/>
+            <a:ext cx="16459200" cy="8613648"/>
           </a:xfrm>
           <a:prstGeom prst="rect">
             <a:avLst/>
@@ -15253,104 +15536,64 @@
           <a:noFill/>
         </p:spPr>
         <p:txBody>
-          <a:bodyPr wrap="square" lIns="0" rIns="0" tIns="73152" bIns="73152" anchor="ctr">
-            <a:noAutofit/>
-          </a:bodyPr>
-          <a:lstStyle/>
-          <a:p>
-            <a:pPr algn="ctr">
-              <a:lnSpc>
-                <a:spcPct val="70000"/>
-              </a:lnSpc>
-            </a:pPr>
-            <a:r>
-              <a:rPr sz="7200" b="1" i="0">
-                <a:solidFill>
-                  <a:srgbClr val="FFFFFF"/>
-                </a:solidFill>
-                <a:latin typeface="Poppins"/>
-              </a:rPr>
-              <a:t>MANALIG KA</a:t>
-            </a:r>
-          </a:p>
-          <a:p>
-            <a:pPr algn="ctr">
-              <a:lnSpc>
-                <a:spcPct val="70000"/>
-              </a:lnSpc>
-            </a:pPr>
-            <a:r>
-              <a:rPr sz="7200" b="1" i="0">
-                <a:solidFill>
-                  <a:srgbClr val="FFFFFF"/>
-                </a:solidFill>
-                <a:latin typeface="Poppins"/>
-              </a:rPr>
-              <a:t>TUYUIN ANG LUHA SA MGA MATA</a:t>
-            </a:r>
-          </a:p>
-          <a:p>
-            <a:pPr algn="ctr">
-              <a:lnSpc>
-                <a:spcPct val="70000"/>
-              </a:lnSpc>
-            </a:pPr>
-            <a:r>
-              <a:rPr sz="7200" b="1" i="0">
-                <a:solidFill>
-                  <a:srgbClr val="FFFFFF"/>
-                </a:solidFill>
-                <a:latin typeface="Poppins"/>
-              </a:rPr>
-              <a:t>HINDI SIYA NATUTULOG</a:t>
-            </a:r>
-          </a:p>
-          <a:p>
-            <a:pPr algn="ctr">
-              <a:lnSpc>
-                <a:spcPct val="70000"/>
-              </a:lnSpc>
-            </a:pPr>
-            <a:r>
-              <a:rPr sz="7200" b="1" i="0">
-                <a:solidFill>
-                  <a:srgbClr val="FFFFFF"/>
-                </a:solidFill>
-                <a:latin typeface="Poppins"/>
-              </a:rPr>
-              <a:t>HINDI NAKAKALIMOT</a:t>
-            </a:r>
-          </a:p>
-          <a:p>
-            <a:pPr algn="ctr">
-              <a:lnSpc>
-                <a:spcPct val="70000"/>
-              </a:lnSpc>
-            </a:pPr>
-            <a:r>
-              <a:rPr sz="7200" b="1" i="0">
-                <a:solidFill>
-                  <a:srgbClr val="FFFFFF"/>
-                </a:solidFill>
-                <a:latin typeface="Poppins"/>
-              </a:rPr>
-              <a:t>KAY HESUS MANALIG KA</a:t>
-            </a:r>
-          </a:p>
-          <a:p>
-            <a:pPr algn="ctr">
-              <a:lnSpc>
-                <a:spcPct val="70000"/>
-              </a:lnSpc>
-            </a:pPr>
-            <a:r>
-              <a:rPr sz="7200" b="1" i="0">
-                <a:solidFill>
-                  <a:srgbClr val="FFFFFF"/>
-                </a:solidFill>
-                <a:latin typeface="Poppins"/>
-              </a:rPr>
-              <a:t>KAY HESUS MANALIG KA</a:t>
+          <a:bodyPr wrap="square" lIns="109728" rIns="109728" tIns="73152" bIns="73152" anchor="ctr">
+            <a:noAutofit/>
+          </a:bodyPr>
+          <a:lstStyle/>
+          <a:p>
+            <a:pPr algn="ctr">
+              <a:spcBef>
+                <a:spcPts val="600"/>
+              </a:spcBef>
+              <a:spcAft>
+                <a:spcPts val="800"/>
+              </a:spcAft>
+            </a:pPr>
+            <a:r>
+              <a:rPr sz="5500" b="1">
+                <a:solidFill>
+                  <a:srgbClr val="F8B300"/>
+                </a:solidFill>
+                <a:latin typeface="Georgia"/>
+              </a:rPr>
+              <a:t>Priest: </a:t>
+            </a:r>
+            <a:r>
+              <a:rPr sz="5500" b="1">
+                <a:solidFill>
+                  <a:srgbClr val="FFFFFF"/>
+                </a:solidFill>
+                <a:latin typeface="Georgia"/>
+              </a:rPr>
+              <a:t>Let us pray.</a:t>
+            </a:r>
+          </a:p>
+          <a:p>
+            <a:pPr algn="ctr">
+              <a:spcBef>
+                <a:spcPts val="600"/>
+              </a:spcBef>
+              <a:spcAft>
+                <a:spcPts val="800"/>
+              </a:spcAft>
+            </a:pPr>
+            <a:r>
+              <a:rPr sz="5500" b="1">
+                <a:solidFill>
+                  <a:srgbClr val="FFFFFF"/>
+                </a:solidFill>
+                <a:latin typeface="Georgia"/>
+              </a:rPr>
+              <a:t>All: </a:t>
+            </a:r>
+            <a:r>
+              <a:rPr sz="5500" b="1">
+                <a:solidFill>
+                  <a:srgbClr val="FFFFFF"/>
+                </a:solidFill>
+                <a:latin typeface="Georgia"/>
+              </a:rPr>
+              <a:t>Amen.</a:t>
             </a:r>
           </a:p>
         </p:txBody>
@@ -15378,19 +15621,19 @@
           <a:lstStyle/>
           <a:p/>
           <a:p>
-            <a:pPr>
+            <a:pPr algn="l">
               <a:spcBef>
                 <a:spcPts val="200"/>
               </a:spcBef>
               <a:defRPr sz="1200" b="0" i="0" u="none">
                 <a:solidFill>
-                  <a:srgbClr val="FFCC4D"/>
+                  <a:srgbClr val="D8B4FE"/>
                 </a:solidFill>
                 <a:latin typeface="Georgia"/>
               </a:defRPr>
             </a:pPr>
             <a:r>
-              <a:t>Communion (1)</a:t>
+              <a:t>The Communion Rite</a:t>
             </a:r>
           </a:p>
         </p:txBody>
@@ -15408,9 +15651,17 @@
   <p:cSld>
     <p:bg>
       <p:bgPr>
-        <a:solidFill>
-          <a:srgbClr val="000000"/>
-        </a:solidFill>
+        <a:gradFill rotWithShape="1">
+          <a:gsLst>
+            <a:gs pos="0">
+              <a:srgbClr val="0C0B11"/>
+            </a:gs>
+            <a:gs pos="100000">
+              <a:srgbClr val="5F586C"/>
+            </a:gs>
+          </a:gsLst>
+          <a:lin scaled="0" ang="0"/>
+        </a:gradFill>
         <a:effectLst/>
       </p:bgPr>
     </p:bg>
@@ -15423,123 +15674,103 @@
       <p:grpSpPr/>
       <p:sp>
         <p:nvSpPr>
-          <p:cNvPr id="2" name="TextBox 1"/>
-          <p:cNvSpPr txBox="1"/>
-          <p:nvPr/>
-        </p:nvSpPr>
-        <p:spPr>
-          <a:xfrm>
-            <a:off x="914400" y="109728"/>
-            <a:ext cx="16459200" cy="868680"/>
-          </a:xfrm>
-          <a:prstGeom prst="rect">
-            <a:avLst/>
-          </a:prstGeom>
-          <a:noFill/>
-        </p:spPr>
-        <p:txBody>
-          <a:bodyPr wrap="square" lIns="109728" rIns="109728" tIns="73152" bIns="73152">
-            <a:noAutofit/>
-          </a:bodyPr>
+          <p:cNvPr id="2" name="Rounded Rectangle 1"/>
+          <p:cNvSpPr/>
+          <p:nvPr/>
+        </p:nvSpPr>
+        <p:spPr>
+          <a:xfrm>
+            <a:off x="6856171" y="1269187"/>
+            <a:ext cx="10943539" cy="6128308"/>
+          </a:xfrm>
+          <a:prstGeom prst="roundRect">
+            <a:avLst>
+              <a:gd name="adj" fmla="val 16670"/>
+            </a:avLst>
+          </a:prstGeom>
+          <a:solidFill>
+            <a:srgbClr val="211733">
+              <a:alpha val="44706"/>
+            </a:srgbClr>
+          </a:solidFill>
+          <a:ln w="14299" cap="sq">
+            <a:solidFill>
+              <a:srgbClr val="6C6678">
+                <a:alpha val="44706"/>
+              </a:srgbClr>
+            </a:solidFill>
+          </a:ln>
+        </p:spPr>
+        <p:style>
+          <a:lnRef idx="1">
+            <a:schemeClr val="accent1"/>
+          </a:lnRef>
+          <a:fillRef idx="3">
+            <a:schemeClr val="accent1"/>
+          </a:fillRef>
+          <a:effectRef idx="2">
+            <a:schemeClr val="accent1"/>
+          </a:effectRef>
+          <a:fontRef idx="minor">
+            <a:schemeClr val="lt1"/>
+          </a:fontRef>
+        </p:style>
+        <p:txBody>
+          <a:bodyPr rtlCol="0" anchor="ctr"/>
           <a:lstStyle/>
           <a:p>
             <a:pPr algn="ctr"/>
-            <a:r>
-              <a:rPr sz="3850" b="1" u="sng">
-                <a:solidFill>
-                  <a:srgbClr val="FFCC4D"/>
-                </a:solidFill>
-                <a:latin typeface="Georgia"/>
-              </a:rPr>
-              <a:t>Isang Bansa</a:t>
-            </a:r>
-          </a:p>
-        </p:txBody>
-      </p:sp>
-      <p:sp>
-        <p:nvSpPr>
-          <p:cNvPr id="3" name="TextBox 2"/>
-          <p:cNvSpPr txBox="1"/>
-          <p:nvPr/>
-        </p:nvSpPr>
-        <p:spPr>
-          <a:xfrm>
-            <a:off x="0" y="1069848"/>
-            <a:ext cx="18288000" cy="8348472"/>
-          </a:xfrm>
-          <a:prstGeom prst="rect">
-            <a:avLst/>
-          </a:prstGeom>
-          <a:noFill/>
-        </p:spPr>
-        <p:txBody>
-          <a:bodyPr wrap="square" lIns="0" rIns="0" tIns="73152" bIns="73152" anchor="ctr">
-            <a:noAutofit/>
-          </a:bodyPr>
-          <a:lstStyle/>
-          <a:p>
-            <a:pPr algn="ctr">
-              <a:lnSpc>
-                <a:spcPct val="70000"/>
-              </a:lnSpc>
-            </a:pPr>
-            <a:r>
-              <a:rPr sz="7500" b="1" i="0">
-                <a:solidFill>
-                  <a:srgbClr val="FFFFFF"/>
-                </a:solidFill>
-                <a:latin typeface="Poppins"/>
-              </a:rPr>
-              <a:t>OH KAY GANDA NG ATING BUHAY</a:t>
-            </a:r>
-          </a:p>
-          <a:p>
-            <a:pPr algn="ctr">
-              <a:lnSpc>
-                <a:spcPct val="70000"/>
-              </a:lnSpc>
-            </a:pPr>
-            <a:r>
-              <a:rPr sz="7500" b="1" i="0">
-                <a:solidFill>
-                  <a:srgbClr val="FFFFFF"/>
-                </a:solidFill>
-                <a:latin typeface="Poppins"/>
-              </a:rPr>
-              <a:t>NAPUPUSPOS NG PAGPAPALA</a:t>
-            </a:r>
-          </a:p>
-          <a:p>
-            <a:pPr algn="ctr">
-              <a:lnSpc>
-                <a:spcPct val="70000"/>
-              </a:lnSpc>
-            </a:pPr>
-            <a:r>
-              <a:rPr sz="7500" b="1" i="0">
-                <a:solidFill>
-                  <a:srgbClr val="FFFFFF"/>
-                </a:solidFill>
-                <a:latin typeface="Poppins"/>
-              </a:rPr>
-              <a:t>NG SAKRAMENTONG MAHIWAGA</a:t>
-            </a:r>
-          </a:p>
-          <a:p>
-            <a:pPr algn="ctr">
-              <a:lnSpc>
-                <a:spcPct val="70000"/>
-              </a:lnSpc>
-            </a:pPr>
-            <a:r>
-              <a:rPr sz="7500" b="1" i="0">
-                <a:solidFill>
-                  <a:srgbClr val="FFFFFF"/>
-                </a:solidFill>
-                <a:latin typeface="Poppins"/>
-              </a:rPr>
-              <a:t>KALOOB NI HESUS SA’TING GABAY</a:t>
-            </a:r>
+          </a:p>
+        </p:txBody>
+      </p:sp>
+      <p:sp>
+        <p:nvSpPr>
+          <p:cNvPr id="3" name="Rounded Rectangle 2"/>
+          <p:cNvSpPr/>
+          <p:nvPr/>
+        </p:nvSpPr>
+        <p:spPr>
+          <a:xfrm>
+            <a:off x="900684" y="8503005"/>
+            <a:ext cx="16486632" cy="1112824"/>
+          </a:xfrm>
+          <a:prstGeom prst="roundRect">
+            <a:avLst>
+              <a:gd name="adj" fmla="val 16670"/>
+            </a:avLst>
+          </a:prstGeom>
+          <a:solidFill>
+            <a:srgbClr val="161122">
+              <a:alpha val="60784"/>
+            </a:srgbClr>
+          </a:solidFill>
+          <a:ln w="14299" cap="sq">
+            <a:solidFill>
+              <a:srgbClr val="161122">
+                <a:alpha val="60784"/>
+              </a:srgbClr>
+            </a:solidFill>
+          </a:ln>
+        </p:spPr>
+        <p:style>
+          <a:lnRef idx="1">
+            <a:schemeClr val="accent1"/>
+          </a:lnRef>
+          <a:fillRef idx="3">
+            <a:schemeClr val="accent1"/>
+          </a:fillRef>
+          <a:effectRef idx="2">
+            <a:schemeClr val="accent1"/>
+          </a:effectRef>
+          <a:fontRef idx="minor">
+            <a:schemeClr val="lt1"/>
+          </a:fontRef>
+        </p:style>
+        <p:txBody>
+          <a:bodyPr rtlCol="0" anchor="ctr"/>
+          <a:lstStyle/>
+          <a:p>
+            <a:pPr algn="ctr"/>
           </a:p>
         </p:txBody>
       </p:sp>
@@ -15551,8 +15782,8 @@
         </p:nvSpPr>
         <p:spPr>
           <a:xfrm>
-            <a:off x="914400" y="9418320"/>
-            <a:ext cx="16459200" cy="777240"/>
+            <a:off x="1284732" y="2390241"/>
+            <a:ext cx="4209897" cy="638251"/>
           </a:xfrm>
           <a:prstGeom prst="rect">
             <a:avLst/>
@@ -15560,25 +15791,219 @@
           <a:noFill/>
         </p:spPr>
         <p:txBody>
-          <a:bodyPr wrap="square" lIns="109728" rIns="109728" tIns="73152" bIns="73152">
-            <a:noAutofit/>
-          </a:bodyPr>
-          <a:lstStyle/>
-          <a:p/>
-          <a:p>
-            <a:pPr>
-              <a:spcBef>
-                <a:spcPts val="200"/>
-              </a:spcBef>
-              <a:defRPr sz="1200" b="0" i="0" u="none">
-                <a:solidFill>
-                  <a:srgbClr val="FFCC4D"/>
-                </a:solidFill>
-                <a:latin typeface="Georgia"/>
-              </a:defRPr>
-            </a:pPr>
-            <a:r>
-              <a:t>Communion (2)</a:t>
+          <a:bodyPr wrap="square" lIns="109728" rIns="109728" tIns="73152" bIns="73152" anchor="ctr">
+            <a:noAutofit/>
+          </a:bodyPr>
+          <a:lstStyle/>
+          <a:p>
+            <a:pPr algn="ctr">
+              <a:lnSpc>
+                <a:spcPct val="108000"/>
+              </a:lnSpc>
+              <a:defRPr sz="3700" b="1" i="0" u="none">
+                <a:solidFill>
+                  <a:srgbClr val="E8D4FE"/>
+                </a:solidFill>
+                <a:latin typeface="Calibri"/>
+              </a:defRPr>
+            </a:pPr>
+            <a:r>
+              <a:t>MASS CELEBRANT:</a:t>
+            </a:r>
+          </a:p>
+        </p:txBody>
+      </p:sp>
+      <p:sp>
+        <p:nvSpPr>
+          <p:cNvPr id="5" name="TextBox 4"/>
+          <p:cNvSpPr txBox="1"/>
+          <p:nvPr/>
+        </p:nvSpPr>
+        <p:spPr>
+          <a:xfrm>
+            <a:off x="267004" y="3053181"/>
+            <a:ext cx="6589166" cy="1057046"/>
+          </a:xfrm>
+          <a:prstGeom prst="rect">
+            <a:avLst/>
+          </a:prstGeom>
+          <a:noFill/>
+        </p:spPr>
+        <p:txBody>
+          <a:bodyPr wrap="square" lIns="109728" rIns="109728" tIns="73152" bIns="73152" anchor="ctr">
+            <a:noAutofit/>
+          </a:bodyPr>
+          <a:lstStyle/>
+          <a:p>
+            <a:pPr algn="ctr">
+              <a:lnSpc>
+                <a:spcPct val="108000"/>
+              </a:lnSpc>
+              <a:defRPr sz="3600" b="1" i="0" u="none">
+                <a:solidFill>
+                  <a:srgbClr val="FFFFFF"/>
+                </a:solidFill>
+                <a:latin typeface="Calibri"/>
+              </a:defRPr>
+            </a:pPr>
+            <a:r>
+              <a:t>Rev. Fr. Jonrey Lauron, RCJ</a:t>
+            </a:r>
+          </a:p>
+        </p:txBody>
+      </p:sp>
+      <p:sp>
+        <p:nvSpPr>
+          <p:cNvPr id="6" name="TextBox 5"/>
+          <p:cNvSpPr txBox="1"/>
+          <p:nvPr/>
+        </p:nvSpPr>
+        <p:spPr>
+          <a:xfrm>
+            <a:off x="267004" y="4429353"/>
+            <a:ext cx="6589166" cy="868680"/>
+          </a:xfrm>
+          <a:prstGeom prst="rect">
+            <a:avLst/>
+          </a:prstGeom>
+          <a:noFill/>
+        </p:spPr>
+        <p:txBody>
+          <a:bodyPr wrap="square" lIns="109728" rIns="109728" tIns="73152" bIns="73152" anchor="ctr">
+            <a:noAutofit/>
+          </a:bodyPr>
+          <a:lstStyle/>
+          <a:p>
+            <a:pPr algn="ctr">
+              <a:lnSpc>
+                <a:spcPct val="108000"/>
+              </a:lnSpc>
+              <a:defRPr sz="4700" b="1" i="1" u="none">
+                <a:solidFill>
+                  <a:srgbClr val="FFFFFF"/>
+                </a:solidFill>
+                <a:latin typeface="Calibri"/>
+              </a:defRPr>
+            </a:pPr>
+            <a:r>
+              <a:t>YEAR A · 21 JUNE 2026</a:t>
+            </a:r>
+          </a:p>
+        </p:txBody>
+      </p:sp>
+      <p:sp>
+        <p:nvSpPr>
+          <p:cNvPr id="7" name="TextBox 6"/>
+          <p:cNvSpPr txBox="1"/>
+          <p:nvPr/>
+        </p:nvSpPr>
+        <p:spPr>
+          <a:xfrm>
+            <a:off x="6900062" y="2390241"/>
+            <a:ext cx="10775289" cy="2422245"/>
+          </a:xfrm>
+          <a:prstGeom prst="rect">
+            <a:avLst/>
+          </a:prstGeom>
+          <a:noFill/>
+        </p:spPr>
+        <p:txBody>
+          <a:bodyPr wrap="square" lIns="109728" rIns="109728" tIns="73152" bIns="73152" anchor="ctr">
+            <a:noAutofit/>
+          </a:bodyPr>
+          <a:lstStyle/>
+          <a:p>
+            <a:pPr algn="ctr">
+              <a:lnSpc>
+                <a:spcPct val="108000"/>
+              </a:lnSpc>
+              <a:defRPr sz="3900" b="0" i="0" u="none">
+                <a:solidFill>
+                  <a:srgbClr val="FEF5E4"/>
+                </a:solidFill>
+                <a:latin typeface="Calibri"/>
+              </a:defRPr>
+            </a:pPr>
+            <a:r>
+              <a:t>“Fear no one.”</a:t>
+            </a:r>
+          </a:p>
+        </p:txBody>
+      </p:sp>
+      <p:sp>
+        <p:nvSpPr>
+          <p:cNvPr id="8" name="TextBox 7"/>
+          <p:cNvSpPr txBox="1"/>
+          <p:nvPr/>
+        </p:nvSpPr>
+        <p:spPr>
+          <a:xfrm>
+            <a:off x="9378086" y="5801868"/>
+            <a:ext cx="5819241" cy="705002"/>
+          </a:xfrm>
+          <a:prstGeom prst="rect">
+            <a:avLst/>
+          </a:prstGeom>
+          <a:noFill/>
+        </p:spPr>
+        <p:txBody>
+          <a:bodyPr wrap="square" lIns="109728" rIns="109728" tIns="73152" bIns="73152" anchor="ctr">
+            <a:noAutofit/>
+          </a:bodyPr>
+          <a:lstStyle/>
+          <a:p>
+            <a:pPr algn="ctr">
+              <a:lnSpc>
+                <a:spcPct val="108000"/>
+              </a:lnSpc>
+              <a:defRPr sz="3500" b="1" i="0" u="none">
+                <a:solidFill>
+                  <a:srgbClr val="DDBDFE"/>
+                </a:solidFill>
+                <a:latin typeface="Calibri"/>
+              </a:defRPr>
+            </a:pPr>
+            <a:r>
+              <a:t>GOSPEL (MATTHEW 10:26–33)</a:t>
+            </a:r>
+          </a:p>
+        </p:txBody>
+      </p:sp>
+      <p:sp>
+        <p:nvSpPr>
+          <p:cNvPr id="9" name="TextBox 8"/>
+          <p:cNvSpPr txBox="1"/>
+          <p:nvPr/>
+        </p:nvSpPr>
+        <p:spPr>
+          <a:xfrm>
+            <a:off x="3195828" y="8411565"/>
+            <a:ext cx="12362688" cy="1162202"/>
+          </a:xfrm>
+          <a:prstGeom prst="rect">
+            <a:avLst/>
+          </a:prstGeom>
+          <a:noFill/>
+        </p:spPr>
+        <p:txBody>
+          <a:bodyPr wrap="square" lIns="109728" rIns="109728" tIns="73152" bIns="73152" anchor="ctr">
+            <a:noAutofit/>
+          </a:bodyPr>
+          <a:lstStyle/>
+          <a:p>
+            <a:pPr algn="ctr">
+              <a:lnSpc>
+                <a:spcPct val="108000"/>
+              </a:lnSpc>
+              <a:defRPr sz="6600" b="1" i="0" u="none">
+                <a:solidFill>
+                  <a:srgbClr val="FFFFFF"/>
+                </a:solidFill>
+                <a:latin typeface="Calibri"/>
+              </a:defRPr>
+            </a:pPr>
+            <a:r>
+              <a:t>12th Sunday in Ordinary Time</a:t>
             </a:r>
           </a:p>
         </p:txBody>
@@ -15597,7 +16022,7 @@
     <p:bg>
       <p:bgPr>
         <a:solidFill>
-          <a:srgbClr val="000000"/>
+          <a:srgbClr val="211733"/>
         </a:solidFill>
         <a:effectLst/>
       </p:bgPr>
@@ -15617,8 +16042,8 @@
         </p:nvSpPr>
         <p:spPr>
           <a:xfrm>
-            <a:off x="0" y="0"/>
-            <a:ext cx="18288000" cy="10287000"/>
+            <a:off x="914400" y="530352"/>
+            <a:ext cx="16459200" cy="1051560"/>
           </a:xfrm>
           <a:prstGeom prst="rect">
             <a:avLst/>
@@ -15626,72 +16051,21 @@
           <a:noFill/>
         </p:spPr>
         <p:txBody>
-          <a:bodyPr wrap="square" lIns="0" rIns="0" tIns="73152" bIns="73152" anchor="ctr">
-            <a:noAutofit/>
-          </a:bodyPr>
-          <a:lstStyle/>
-          <a:p>
-            <a:pPr algn="ctr">
-              <a:lnSpc>
-                <a:spcPct val="70000"/>
-              </a:lnSpc>
-            </a:pPr>
-            <a:r>
-              <a:rPr sz="7500" b="1" i="0">
-                <a:solidFill>
-                  <a:srgbClr val="FFFFFF"/>
-                </a:solidFill>
-                <a:latin typeface="Poppins"/>
-              </a:rPr>
-              <a:t>OH KAY TAMIS NG PAGSASAMA</a:t>
-            </a:r>
-          </a:p>
-          <a:p>
-            <a:pPr algn="ctr">
-              <a:lnSpc>
-                <a:spcPct val="70000"/>
-              </a:lnSpc>
-            </a:pPr>
-            <a:r>
-              <a:rPr sz="7500" b="1" i="0">
-                <a:solidFill>
-                  <a:srgbClr val="FFFFFF"/>
-                </a:solidFill>
-                <a:latin typeface="Poppins"/>
-              </a:rPr>
-              <a:t>NAGMUMULA SA PAGKAKAISA</a:t>
-            </a:r>
-          </a:p>
-          <a:p>
-            <a:pPr algn="ctr">
-              <a:lnSpc>
-                <a:spcPct val="70000"/>
-              </a:lnSpc>
-            </a:pPr>
-            <a:r>
-              <a:rPr sz="7500" b="1" i="0">
-                <a:solidFill>
-                  <a:srgbClr val="FFFFFF"/>
-                </a:solidFill>
-                <a:latin typeface="Poppins"/>
-              </a:rPr>
-              <a:t>BUMUBUKAL SA PAGSASALO</a:t>
-            </a:r>
-          </a:p>
-          <a:p>
-            <a:pPr algn="ctr">
-              <a:lnSpc>
-                <a:spcPct val="70000"/>
-              </a:lnSpc>
-            </a:pPr>
-            <a:r>
-              <a:rPr sz="7500" b="1" i="0">
-                <a:solidFill>
-                  <a:srgbClr val="FFFFFF"/>
-                </a:solidFill>
-                <a:latin typeface="Poppins"/>
-              </a:rPr>
-              <a:t>SA IISANG HAPAG AY DUMALO</a:t>
+          <a:bodyPr wrap="square" lIns="109728" rIns="109728" tIns="73152" bIns="73152" anchor="t">
+            <a:noAutofit/>
+          </a:bodyPr>
+          <a:lstStyle/>
+          <a:p>
+            <a:pPr algn="ctr">
+              <a:defRPr sz="5500" b="1" i="0" u="none">
+                <a:solidFill>
+                  <a:srgbClr val="D8B4FE"/>
+                </a:solidFill>
+                <a:latin typeface="Georgia"/>
+              </a:defRPr>
+            </a:pPr>
+            <a:r>
+              <a:t>MASS COLLECTION</a:t>
             </a:r>
           </a:p>
         </p:txBody>
@@ -15704,6 +16078,97 @@
         </p:nvSpPr>
         <p:spPr>
           <a:xfrm>
+            <a:off x="914400" y="1581912"/>
+            <a:ext cx="16459200" cy="7104888"/>
+          </a:xfrm>
+          <a:prstGeom prst="rect">
+            <a:avLst/>
+          </a:prstGeom>
+          <a:noFill/>
+        </p:spPr>
+        <p:txBody>
+          <a:bodyPr wrap="square" lIns="109728" rIns="109728" tIns="73152" bIns="73152" anchor="ctr">
+            <a:noAutofit/>
+          </a:bodyPr>
+          <a:lstStyle/>
+          <a:p>
+            <a:pPr algn="ctr">
+              <a:defRPr sz="5500" b="1" i="0" u="none">
+                <a:solidFill>
+                  <a:srgbClr val="FFFFFF"/>
+                </a:solidFill>
+                <a:latin typeface="Georgia"/>
+              </a:defRPr>
+            </a:pPr>
+            <a:r>
+              <a:t>(Enter collection amount in Mass Builder.)</a:t>
+            </a:r>
+          </a:p>
+        </p:txBody>
+      </p:sp>
+      <p:sp>
+        <p:nvSpPr>
+          <p:cNvPr id="4" name="TextBox 3"/>
+          <p:cNvSpPr txBox="1"/>
+          <p:nvPr/>
+        </p:nvSpPr>
+        <p:spPr>
+          <a:xfrm>
+            <a:off x="914400" y="8869680"/>
+            <a:ext cx="16459200" cy="868680"/>
+          </a:xfrm>
+          <a:prstGeom prst="rect">
+            <a:avLst/>
+          </a:prstGeom>
+          <a:noFill/>
+        </p:spPr>
+        <p:txBody>
+          <a:bodyPr wrap="square" lIns="109728" rIns="109728" tIns="73152" bIns="73152">
+            <a:noAutofit/>
+          </a:bodyPr>
+          <a:lstStyle/>
+          <a:p>
+            <a:pPr algn="ctr">
+              <a:spcAft>
+                <a:spcPts val="200"/>
+              </a:spcAft>
+              <a:defRPr sz="1500" b="0" i="0" u="none">
+                <a:solidFill>
+                  <a:srgbClr val="FFFFFF"/>
+                </a:solidFill>
+                <a:latin typeface="Georgia"/>
+              </a:defRPr>
+            </a:pPr>
+            <a:r>
+              <a:t>Sunday, June 14, 2026</a:t>
+            </a:r>
+          </a:p>
+          <a:p>
+            <a:pPr algn="ctr">
+              <a:spcAft>
+                <a:spcPts val="200"/>
+              </a:spcAft>
+              <a:defRPr sz="1500" b="0" i="0" u="none">
+                <a:solidFill>
+                  <a:srgbClr val="FFFFFF"/>
+                </a:solidFill>
+                <a:latin typeface="Georgia"/>
+              </a:defRPr>
+            </a:pPr>
+            <a:r>
+              <a:t>Thank you for your generosity.</a:t>
+            </a:r>
+          </a:p>
+        </p:txBody>
+      </p:sp>
+      <p:sp>
+        <p:nvSpPr>
+          <p:cNvPr id="5" name="TextBox 4"/>
+          <p:cNvSpPr txBox="1"/>
+          <p:nvPr/>
+        </p:nvSpPr>
+        <p:spPr>
+          <a:xfrm>
             <a:off x="914400" y="9418320"/>
             <a:ext cx="16459200" cy="777240"/>
           </a:xfrm>
@@ -15719,19 +16184,19 @@
           <a:lstStyle/>
           <a:p/>
           <a:p>
-            <a:pPr>
+            <a:pPr algn="l">
               <a:spcBef>
                 <a:spcPts val="200"/>
               </a:spcBef>
               <a:defRPr sz="1200" b="0" i="0" u="none">
                 <a:solidFill>
-                  <a:srgbClr val="FFCC4D"/>
+                  <a:srgbClr val="D8B4FE"/>
                 </a:solidFill>
                 <a:latin typeface="Georgia"/>
               </a:defRPr>
             </a:pPr>
             <a:r>
-              <a:t>Communion (2)</a:t>
+              <a:t>Mass Collection</a:t>
             </a:r>
           </a:p>
         </p:txBody>
@@ -15750,7 +16215,7 @@
     <p:bg>
       <p:bgPr>
         <a:solidFill>
-          <a:srgbClr val="000000"/>
+          <a:srgbClr val="211733"/>
         </a:solidFill>
         <a:effectLst/>
       </p:bgPr>
@@ -15770,8 +16235,8 @@
         </p:nvSpPr>
         <p:spPr>
           <a:xfrm>
-            <a:off x="0" y="0"/>
-            <a:ext cx="18288000" cy="10287000"/>
+            <a:off x="914400" y="530352"/>
+            <a:ext cx="16459200" cy="8750808"/>
           </a:xfrm>
           <a:prstGeom prst="rect">
             <a:avLst/>
@@ -15779,72 +16244,24 @@
           <a:noFill/>
         </p:spPr>
         <p:txBody>
-          <a:bodyPr wrap="square" lIns="0" rIns="0" tIns="73152" bIns="73152" anchor="ctr">
-            <a:noAutofit/>
-          </a:bodyPr>
-          <a:lstStyle/>
-          <a:p>
-            <a:pPr algn="ctr">
-              <a:lnSpc>
-                <a:spcPct val="70000"/>
-              </a:lnSpc>
-            </a:pPr>
-            <a:r>
-              <a:rPr sz="7500" b="1" i="0">
-                <a:solidFill>
-                  <a:srgbClr val="FFFFFF"/>
-                </a:solidFill>
-                <a:latin typeface="Poppins"/>
-              </a:rPr>
-              <a:t>PURIHIN SI HESUS SA SAKRAMENTO</a:t>
-            </a:r>
-          </a:p>
-          <a:p>
-            <a:pPr algn="ctr">
-              <a:lnSpc>
-                <a:spcPct val="70000"/>
-              </a:lnSpc>
-            </a:pPr>
-            <a:r>
-              <a:rPr sz="7500" b="1" i="0">
-                <a:solidFill>
-                  <a:srgbClr val="FFFFFF"/>
-                </a:solidFill>
-                <a:latin typeface="Poppins"/>
-              </a:rPr>
-              <a:t>PURIHIN NG LAHAT NG TAO</a:t>
-            </a:r>
-          </a:p>
-          <a:p>
-            <a:pPr algn="ctr">
-              <a:lnSpc>
-                <a:spcPct val="70000"/>
-              </a:lnSpc>
-            </a:pPr>
-            <a:r>
-              <a:rPr sz="7500" b="1" i="0">
-                <a:solidFill>
-                  <a:srgbClr val="FFFFFF"/>
-                </a:solidFill>
-                <a:latin typeface="Poppins"/>
-              </a:rPr>
-              <a:t>PURIHIN SIYA NG PILIPINO</a:t>
-            </a:r>
-          </a:p>
-          <a:p>
-            <a:pPr algn="ctr">
-              <a:lnSpc>
-                <a:spcPct val="70000"/>
-              </a:lnSpc>
-            </a:pPr>
-            <a:r>
-              <a:rPr sz="7500" b="1" i="0">
-                <a:solidFill>
-                  <a:srgbClr val="FFFFFF"/>
-                </a:solidFill>
-                <a:latin typeface="Poppins"/>
-              </a:rPr>
-              <a:t>SA PAGKAKAISA’Y LINGAPIN MO</a:t>
+          <a:bodyPr wrap="square" lIns="109728" rIns="109728" tIns="73152" bIns="73152">
+            <a:noAutofit/>
+          </a:bodyPr>
+          <a:lstStyle/>
+          <a:p>
+            <a:pPr algn="ctr">
+              <a:spcAft>
+                <a:spcPts val="500"/>
+              </a:spcAft>
+              <a:defRPr sz="5500" b="1" i="0" u="none">
+                <a:solidFill>
+                  <a:srgbClr val="FFFFFF"/>
+                </a:solidFill>
+                <a:latin typeface="Georgia"/>
+              </a:defRPr>
+            </a:pPr>
+            <a:r>
+              <a:t>CHURCH ANNOUNCEMENTS</a:t>
             </a:r>
           </a:p>
         </p:txBody>
@@ -15872,19 +16289,19 @@
           <a:lstStyle/>
           <a:p/>
           <a:p>
-            <a:pPr>
+            <a:pPr algn="l">
               <a:spcBef>
                 <a:spcPts val="200"/>
               </a:spcBef>
               <a:defRPr sz="1200" b="0" i="0" u="none">
                 <a:solidFill>
-                  <a:srgbClr val="FFCC4D"/>
+                  <a:srgbClr val="D8B4FE"/>
                 </a:solidFill>
                 <a:latin typeface="Georgia"/>
               </a:defRPr>
             </a:pPr>
             <a:r>
-              <a:t>Communion (2)</a:t>
+              <a:t>Announcements</a:t>
             </a:r>
           </a:p>
         </p:txBody>
@@ -15924,7 +16341,7 @@
         <p:spPr>
           <a:xfrm>
             <a:off x="914400" y="530352"/>
-            <a:ext cx="16459200" cy="8613648"/>
+            <a:ext cx="16459200" cy="8750808"/>
           </a:xfrm>
           <a:prstGeom prst="rect">
             <a:avLst/>
@@ -15932,64 +16349,24 @@
           <a:noFill/>
         </p:spPr>
         <p:txBody>
-          <a:bodyPr wrap="square" lIns="109728" rIns="109728" tIns="73152" bIns="73152" anchor="ctr">
-            <a:noAutofit/>
-          </a:bodyPr>
-          <a:lstStyle/>
-          <a:p>
-            <a:pPr algn="ctr">
-              <a:spcBef>
-                <a:spcPts val="600"/>
-              </a:spcBef>
+          <a:bodyPr wrap="square" lIns="109728" rIns="109728" tIns="73152" bIns="73152">
+            <a:noAutofit/>
+          </a:bodyPr>
+          <a:lstStyle/>
+          <a:p>
+            <a:pPr algn="ctr">
               <a:spcAft>
-                <a:spcPts val="800"/>
+                <a:spcPts val="500"/>
               </a:spcAft>
-            </a:pPr>
-            <a:r>
-              <a:rPr sz="5500" b="1">
-                <a:solidFill>
-                  <a:srgbClr val="F8B300"/>
+              <a:defRPr sz="5500" b="1" i="0" u="none">
+                <a:solidFill>
+                  <a:srgbClr val="FFFFFF"/>
                 </a:solidFill>
                 <a:latin typeface="Georgia"/>
-              </a:rPr>
-              <a:t>Priest: </a:t>
-            </a:r>
-            <a:r>
-              <a:rPr sz="5500" b="1">
-                <a:solidFill>
-                  <a:srgbClr val="FFFFFF"/>
-                </a:solidFill>
-                <a:latin typeface="Georgia"/>
-              </a:rPr>
-              <a:t>Let us pray.</a:t>
-            </a:r>
-          </a:p>
-          <a:p>
-            <a:pPr algn="ctr">
-              <a:spcBef>
-                <a:spcPts val="600"/>
-              </a:spcBef>
-              <a:spcAft>
-                <a:spcPts val="800"/>
-              </a:spcAft>
-            </a:pPr>
-            <a:r>
-              <a:rPr sz="5500" b="1">
-                <a:solidFill>
-                  <a:srgbClr val="FFFFFF"/>
-                </a:solidFill>
-                <a:latin typeface="Georgia"/>
-              </a:rPr>
-              <a:t>All: </a:t>
-            </a:r>
-            <a:r>
-              <a:rPr sz="5500" b="1">
-                <a:solidFill>
-                  <a:srgbClr val="FFFFFF"/>
-                </a:solidFill>
-                <a:latin typeface="Georgia"/>
-              </a:rPr>
-              <a:t>Amen.</a:t>
+              </a:defRPr>
+            </a:pPr>
+            <a:r>
+              <a:t>Welcome newcomers!</a:t>
             </a:r>
           </a:p>
         </p:txBody>
@@ -16029,7 +16406,7 @@
               </a:defRPr>
             </a:pPr>
             <a:r>
-              <a:t>The Communion Rite</a:t>
+              <a:t>Announcements</a:t>
             </a:r>
           </a:p>
         </p:txBody>
@@ -16047,17 +16424,9 @@
   <p:cSld>
     <p:bg>
       <p:bgPr>
-        <a:gradFill rotWithShape="1">
-          <a:gsLst>
-            <a:gs pos="0">
-              <a:srgbClr val="0C0B11"/>
-            </a:gs>
-            <a:gs pos="100000">
-              <a:srgbClr val="5F586C"/>
-            </a:gs>
-          </a:gsLst>
-          <a:lin scaled="0" ang="0"/>
-        </a:gradFill>
+        <a:solidFill>
+          <a:srgbClr val="211733"/>
+        </a:solidFill>
         <a:effectLst/>
       </p:bgPr>
     </p:bg>
@@ -16070,116 +16439,14 @@
       <p:grpSpPr/>
       <p:sp>
         <p:nvSpPr>
-          <p:cNvPr id="2" name="Rounded Rectangle 1"/>
-          <p:cNvSpPr/>
-          <p:nvPr/>
-        </p:nvSpPr>
-        <p:spPr>
-          <a:xfrm>
-            <a:off x="6856171" y="1269187"/>
-            <a:ext cx="10943539" cy="6128308"/>
-          </a:xfrm>
-          <a:prstGeom prst="roundRect">
-            <a:avLst>
-              <a:gd name="adj" fmla="val 16670"/>
-            </a:avLst>
-          </a:prstGeom>
-          <a:solidFill>
-            <a:srgbClr val="211733">
-              <a:alpha val="44706"/>
-            </a:srgbClr>
-          </a:solidFill>
-          <a:ln w="14299" cap="sq">
-            <a:solidFill>
-              <a:srgbClr val="6C6678">
-                <a:alpha val="44706"/>
-              </a:srgbClr>
-            </a:solidFill>
-          </a:ln>
-        </p:spPr>
-        <p:style>
-          <a:lnRef idx="1">
-            <a:schemeClr val="accent1"/>
-          </a:lnRef>
-          <a:fillRef idx="3">
-            <a:schemeClr val="accent1"/>
-          </a:fillRef>
-          <a:effectRef idx="2">
-            <a:schemeClr val="accent1"/>
-          </a:effectRef>
-          <a:fontRef idx="minor">
-            <a:schemeClr val="lt1"/>
-          </a:fontRef>
-        </p:style>
-        <p:txBody>
-          <a:bodyPr rtlCol="0" anchor="ctr"/>
-          <a:lstStyle/>
-          <a:p>
-            <a:pPr algn="ctr"/>
-          </a:p>
-        </p:txBody>
-      </p:sp>
-      <p:sp>
-        <p:nvSpPr>
-          <p:cNvPr id="3" name="Rounded Rectangle 2"/>
-          <p:cNvSpPr/>
-          <p:nvPr/>
-        </p:nvSpPr>
-        <p:spPr>
-          <a:xfrm>
-            <a:off x="900684" y="8503005"/>
-            <a:ext cx="16486632" cy="1112824"/>
-          </a:xfrm>
-          <a:prstGeom prst="roundRect">
-            <a:avLst>
-              <a:gd name="adj" fmla="val 16670"/>
-            </a:avLst>
-          </a:prstGeom>
-          <a:solidFill>
-            <a:srgbClr val="161122">
-              <a:alpha val="60784"/>
-            </a:srgbClr>
-          </a:solidFill>
-          <a:ln w="14299" cap="sq">
-            <a:solidFill>
-              <a:srgbClr val="161122">
-                <a:alpha val="60784"/>
-              </a:srgbClr>
-            </a:solidFill>
-          </a:ln>
-        </p:spPr>
-        <p:style>
-          <a:lnRef idx="1">
-            <a:schemeClr val="accent1"/>
-          </a:lnRef>
-          <a:fillRef idx="3">
-            <a:schemeClr val="accent1"/>
-          </a:fillRef>
-          <a:effectRef idx="2">
-            <a:schemeClr val="accent1"/>
-          </a:effectRef>
-          <a:fontRef idx="minor">
-            <a:schemeClr val="lt1"/>
-          </a:fontRef>
-        </p:style>
-        <p:txBody>
-          <a:bodyPr rtlCol="0" anchor="ctr"/>
-          <a:lstStyle/>
-          <a:p>
-            <a:pPr algn="ctr"/>
-          </a:p>
-        </p:txBody>
-      </p:sp>
-      <p:sp>
-        <p:nvSpPr>
-          <p:cNvPr id="4" name="TextBox 3"/>
+          <p:cNvPr id="2" name="TextBox 1"/>
           <p:cNvSpPr txBox="1"/>
           <p:nvPr/>
         </p:nvSpPr>
         <p:spPr>
           <a:xfrm>
-            <a:off x="1284732" y="2390241"/>
-            <a:ext cx="4209897" cy="638251"/>
+            <a:off x="914400" y="530352"/>
+            <a:ext cx="16459200" cy="8750808"/>
           </a:xfrm>
           <a:prstGeom prst="rect">
             <a:avLst/>
@@ -16187,38 +16454,38 @@
           <a:noFill/>
         </p:spPr>
         <p:txBody>
-          <a:bodyPr wrap="square" lIns="109728" rIns="109728" tIns="73152" bIns="73152" anchor="ctr">
-            <a:noAutofit/>
-          </a:bodyPr>
-          <a:lstStyle/>
-          <a:p>
-            <a:pPr algn="ctr">
-              <a:lnSpc>
-                <a:spcPct val="108000"/>
-              </a:lnSpc>
-              <a:defRPr sz="3700" b="1" i="0" u="none">
-                <a:solidFill>
-                  <a:srgbClr val="E8D4FE"/>
-                </a:solidFill>
-                <a:latin typeface="Calibri"/>
-              </a:defRPr>
-            </a:pPr>
-            <a:r>
-              <a:t>MASS CELEBRANT:</a:t>
-            </a:r>
-          </a:p>
-        </p:txBody>
-      </p:sp>
-      <p:sp>
-        <p:nvSpPr>
-          <p:cNvPr id="5" name="TextBox 4"/>
+          <a:bodyPr wrap="square" lIns="109728" rIns="109728" tIns="73152" bIns="73152">
+            <a:noAutofit/>
+          </a:bodyPr>
+          <a:lstStyle/>
+          <a:p>
+            <a:pPr algn="ctr">
+              <a:spcAft>
+                <a:spcPts val="500"/>
+              </a:spcAft>
+              <a:defRPr sz="5500" b="1" i="0" u="none">
+                <a:solidFill>
+                  <a:srgbClr val="FFFFFF"/>
+                </a:solidFill>
+                <a:latin typeface="Georgia"/>
+              </a:defRPr>
+            </a:pPr>
+            <a:r>
+              <a:t>Sacrament of Confession</a:t>
+            </a:r>
+          </a:p>
+        </p:txBody>
+      </p:sp>
+      <p:sp>
+        <p:nvSpPr>
+          <p:cNvPr id="3" name="TextBox 2"/>
           <p:cNvSpPr txBox="1"/>
           <p:nvPr/>
         </p:nvSpPr>
         <p:spPr>
           <a:xfrm>
-            <a:off x="267004" y="3053181"/>
-            <a:ext cx="6589166" cy="1057046"/>
+            <a:off x="914400" y="9418320"/>
+            <a:ext cx="16459200" cy="777240"/>
           </a:xfrm>
           <a:prstGeom prst="rect">
             <a:avLst/>
@@ -16226,180 +16493,25 @@
           <a:noFill/>
         </p:spPr>
         <p:txBody>
-          <a:bodyPr wrap="square" lIns="109728" rIns="109728" tIns="73152" bIns="73152" anchor="ctr">
-            <a:noAutofit/>
-          </a:bodyPr>
-          <a:lstStyle/>
-          <a:p>
-            <a:pPr algn="ctr">
-              <a:lnSpc>
-                <a:spcPct val="108000"/>
-              </a:lnSpc>
-              <a:defRPr sz="3400" b="1" i="0" u="none">
-                <a:solidFill>
-                  <a:srgbClr val="FFFFFF"/>
-                </a:solidFill>
-                <a:latin typeface="Calibri"/>
-              </a:defRPr>
-            </a:pPr>
-            <a:r>
-              <a:t>Rev. Fr. Jonrey Lauron, RCJ · Divino Gabriel</a:t>
-            </a:r>
-          </a:p>
-        </p:txBody>
-      </p:sp>
-      <p:sp>
-        <p:nvSpPr>
-          <p:cNvPr id="6" name="TextBox 5"/>
-          <p:cNvSpPr txBox="1"/>
-          <p:nvPr/>
-        </p:nvSpPr>
-        <p:spPr>
-          <a:xfrm>
-            <a:off x="267004" y="4429353"/>
-            <a:ext cx="6589166" cy="868680"/>
-          </a:xfrm>
-          <a:prstGeom prst="rect">
-            <a:avLst/>
-          </a:prstGeom>
-          <a:noFill/>
-        </p:spPr>
-        <p:txBody>
-          <a:bodyPr wrap="square" lIns="109728" rIns="109728" tIns="73152" bIns="73152" anchor="ctr">
-            <a:noAutofit/>
-          </a:bodyPr>
-          <a:lstStyle/>
-          <a:p>
-            <a:pPr algn="ctr">
-              <a:lnSpc>
-                <a:spcPct val="108000"/>
-              </a:lnSpc>
-              <a:defRPr sz="4700" b="1" i="1" u="none">
-                <a:solidFill>
-                  <a:srgbClr val="FFFFFF"/>
-                </a:solidFill>
-                <a:latin typeface="Calibri"/>
-              </a:defRPr>
-            </a:pPr>
-            <a:r>
-              <a:t>YEAR A · 21 JUNE 2026</a:t>
-            </a:r>
-          </a:p>
-        </p:txBody>
-      </p:sp>
-      <p:sp>
-        <p:nvSpPr>
-          <p:cNvPr id="7" name="TextBox 6"/>
-          <p:cNvSpPr txBox="1"/>
-          <p:nvPr/>
-        </p:nvSpPr>
-        <p:spPr>
-          <a:xfrm>
-            <a:off x="6900062" y="2390241"/>
-            <a:ext cx="10775289" cy="2422245"/>
-          </a:xfrm>
-          <a:prstGeom prst="rect">
-            <a:avLst/>
-          </a:prstGeom>
-          <a:noFill/>
-        </p:spPr>
-        <p:txBody>
-          <a:bodyPr wrap="square" lIns="109728" rIns="109728" tIns="73152" bIns="73152" anchor="ctr">
-            <a:noAutofit/>
-          </a:bodyPr>
-          <a:lstStyle/>
-          <a:p>
-            <a:pPr algn="ctr">
-              <a:lnSpc>
-                <a:spcPct val="108000"/>
-              </a:lnSpc>
-              <a:defRPr sz="3900" b="0" i="0" u="none">
-                <a:solidFill>
-                  <a:srgbClr val="FEF5E4"/>
-                </a:solidFill>
-                <a:latin typeface="Calibri"/>
-              </a:defRPr>
-            </a:pPr>
-            <a:r>
-              <a:t>“Fear no one.”</a:t>
-            </a:r>
-          </a:p>
-        </p:txBody>
-      </p:sp>
-      <p:sp>
-        <p:nvSpPr>
-          <p:cNvPr id="8" name="TextBox 7"/>
-          <p:cNvSpPr txBox="1"/>
-          <p:nvPr/>
-        </p:nvSpPr>
-        <p:spPr>
-          <a:xfrm>
-            <a:off x="9378086" y="5801868"/>
-            <a:ext cx="5819241" cy="705002"/>
-          </a:xfrm>
-          <a:prstGeom prst="rect">
-            <a:avLst/>
-          </a:prstGeom>
-          <a:noFill/>
-        </p:spPr>
-        <p:txBody>
-          <a:bodyPr wrap="square" lIns="109728" rIns="109728" tIns="73152" bIns="73152" anchor="ctr">
-            <a:noAutofit/>
-          </a:bodyPr>
-          <a:lstStyle/>
-          <a:p>
-            <a:pPr algn="ctr">
-              <a:lnSpc>
-                <a:spcPct val="108000"/>
-              </a:lnSpc>
-              <a:defRPr sz="3500" b="1" i="0" u="none">
-                <a:solidFill>
-                  <a:srgbClr val="DDBDFE"/>
-                </a:solidFill>
-                <a:latin typeface="Calibri"/>
-              </a:defRPr>
-            </a:pPr>
-            <a:r>
-              <a:t>GOSPEL (MATTHEW 10:26–33)</a:t>
-            </a:r>
-          </a:p>
-        </p:txBody>
-      </p:sp>
-      <p:sp>
-        <p:nvSpPr>
-          <p:cNvPr id="9" name="TextBox 8"/>
-          <p:cNvSpPr txBox="1"/>
-          <p:nvPr/>
-        </p:nvSpPr>
-        <p:spPr>
-          <a:xfrm>
-            <a:off x="3195828" y="8411565"/>
-            <a:ext cx="12362688" cy="1162202"/>
-          </a:xfrm>
-          <a:prstGeom prst="rect">
-            <a:avLst/>
-          </a:prstGeom>
-          <a:noFill/>
-        </p:spPr>
-        <p:txBody>
-          <a:bodyPr wrap="square" lIns="109728" rIns="109728" tIns="73152" bIns="73152" anchor="ctr">
-            <a:noAutofit/>
-          </a:bodyPr>
-          <a:lstStyle/>
-          <a:p>
-            <a:pPr algn="ctr">
-              <a:lnSpc>
-                <a:spcPct val="108000"/>
-              </a:lnSpc>
-              <a:defRPr sz="6600" b="1" i="0" u="none">
-                <a:solidFill>
-                  <a:srgbClr val="FFFFFF"/>
-                </a:solidFill>
-                <a:latin typeface="Calibri"/>
-              </a:defRPr>
-            </a:pPr>
-            <a:r>
-              <a:t>12th Sunday in Ordinary Time</a:t>
+          <a:bodyPr wrap="square" lIns="109728" rIns="109728" tIns="73152" bIns="73152">
+            <a:noAutofit/>
+          </a:bodyPr>
+          <a:lstStyle/>
+          <a:p/>
+          <a:p>
+            <a:pPr algn="l">
+              <a:spcBef>
+                <a:spcPts val="200"/>
+              </a:spcBef>
+              <a:defRPr sz="1200" b="0" i="0" u="none">
+                <a:solidFill>
+                  <a:srgbClr val="D8B4FE"/>
+                </a:solidFill>
+                <a:latin typeface="Georgia"/>
+              </a:defRPr>
+            </a:pPr>
+            <a:r>
+              <a:t>Announcements</a:t>
             </a:r>
           </a:p>
         </p:txBody>
@@ -16439,7 +16551,7 @@
         <p:spPr>
           <a:xfrm>
             <a:off x="914400" y="530352"/>
-            <a:ext cx="16459200" cy="1051560"/>
+            <a:ext cx="16459200" cy="8750808"/>
           </a:xfrm>
           <a:prstGeom prst="rect">
             <a:avLst/>
@@ -16447,21 +16559,24 @@
           <a:noFill/>
         </p:spPr>
         <p:txBody>
-          <a:bodyPr wrap="square" lIns="109728" rIns="109728" tIns="73152" bIns="73152" anchor="t">
-            <a:noAutofit/>
-          </a:bodyPr>
-          <a:lstStyle/>
-          <a:p>
-            <a:pPr algn="ctr">
+          <a:bodyPr wrap="square" lIns="109728" rIns="109728" tIns="73152" bIns="73152">
+            <a:noAutofit/>
+          </a:bodyPr>
+          <a:lstStyle/>
+          <a:p>
+            <a:pPr algn="ctr">
+              <a:spcAft>
+                <a:spcPts val="500"/>
+              </a:spcAft>
               <a:defRPr sz="5500" b="1" i="0" u="none">
                 <a:solidFill>
-                  <a:srgbClr val="D8B4FE"/>
+                  <a:srgbClr val="FFFFFF"/>
                 </a:solidFill>
                 <a:latin typeface="Georgia"/>
               </a:defRPr>
             </a:pPr>
             <a:r>
-              <a:t>MASS COLLECTION</a:t>
+              <a:t>Updates and Announcements</a:t>
             </a:r>
           </a:p>
         </p:txBody>
@@ -16469,97 +16584,6 @@
       <p:sp>
         <p:nvSpPr>
           <p:cNvPr id="3" name="TextBox 2"/>
-          <p:cNvSpPr txBox="1"/>
-          <p:nvPr/>
-        </p:nvSpPr>
-        <p:spPr>
-          <a:xfrm>
-            <a:off x="914400" y="1581912"/>
-            <a:ext cx="16459200" cy="7104888"/>
-          </a:xfrm>
-          <a:prstGeom prst="rect">
-            <a:avLst/>
-          </a:prstGeom>
-          <a:noFill/>
-        </p:spPr>
-        <p:txBody>
-          <a:bodyPr wrap="square" lIns="109728" rIns="109728" tIns="73152" bIns="73152" anchor="ctr">
-            <a:noAutofit/>
-          </a:bodyPr>
-          <a:lstStyle/>
-          <a:p>
-            <a:pPr algn="ctr">
-              <a:defRPr sz="5500" b="1" i="0" u="none">
-                <a:solidFill>
-                  <a:srgbClr val="FFFFFF"/>
-                </a:solidFill>
-                <a:latin typeface="Georgia"/>
-              </a:defRPr>
-            </a:pPr>
-            <a:r>
-              <a:t>₱9,000</a:t>
-            </a:r>
-          </a:p>
-        </p:txBody>
-      </p:sp>
-      <p:sp>
-        <p:nvSpPr>
-          <p:cNvPr id="4" name="TextBox 3"/>
-          <p:cNvSpPr txBox="1"/>
-          <p:nvPr/>
-        </p:nvSpPr>
-        <p:spPr>
-          <a:xfrm>
-            <a:off x="914400" y="8869680"/>
-            <a:ext cx="16459200" cy="868680"/>
-          </a:xfrm>
-          <a:prstGeom prst="rect">
-            <a:avLst/>
-          </a:prstGeom>
-          <a:noFill/>
-        </p:spPr>
-        <p:txBody>
-          <a:bodyPr wrap="square" lIns="109728" rIns="109728" tIns="73152" bIns="73152">
-            <a:noAutofit/>
-          </a:bodyPr>
-          <a:lstStyle/>
-          <a:p>
-            <a:pPr algn="ctr">
-              <a:spcAft>
-                <a:spcPts val="200"/>
-              </a:spcAft>
-              <a:defRPr sz="1500" b="0" i="0" u="none">
-                <a:solidFill>
-                  <a:srgbClr val="FFFFFF"/>
-                </a:solidFill>
-                <a:latin typeface="Georgia"/>
-              </a:defRPr>
-            </a:pPr>
-            <a:r>
-              <a:t>Sunday, June 14, 2026</a:t>
-            </a:r>
-          </a:p>
-          <a:p>
-            <a:pPr algn="ctr">
-              <a:spcAft>
-                <a:spcPts val="200"/>
-              </a:spcAft>
-              <a:defRPr sz="1500" b="0" i="0" u="none">
-                <a:solidFill>
-                  <a:srgbClr val="FFFFFF"/>
-                </a:solidFill>
-                <a:latin typeface="Georgia"/>
-              </a:defRPr>
-            </a:pPr>
-            <a:r>
-              <a:t>Thank you for your generosity.</a:t>
-            </a:r>
-          </a:p>
-        </p:txBody>
-      </p:sp>
-      <p:sp>
-        <p:nvSpPr>
-          <p:cNvPr id="5" name="TextBox 4"/>
           <p:cNvSpPr txBox="1"/>
           <p:nvPr/>
         </p:nvSpPr>
@@ -16592,7 +16616,7 @@
               </a:defRPr>
             </a:pPr>
             <a:r>
-              <a:t>Mass Collection</a:t>
+              <a:t>Announcements</a:t>
             </a:r>
           </a:p>
         </p:txBody>
@@ -16632,7 +16656,7 @@
         <p:spPr>
           <a:xfrm>
             <a:off x="914400" y="530352"/>
-            <a:ext cx="16459200" cy="8750808"/>
+            <a:ext cx="16459200" cy="8613648"/>
           </a:xfrm>
           <a:prstGeom prst="rect">
             <a:avLst/>
@@ -16640,56 +16664,176 @@
           <a:noFill/>
         </p:spPr>
         <p:txBody>
-          <a:bodyPr wrap="square" lIns="109728" rIns="109728" tIns="73152" bIns="73152">
-            <a:noAutofit/>
-          </a:bodyPr>
-          <a:lstStyle/>
-          <a:p>
-            <a:pPr algn="ctr">
+          <a:bodyPr wrap="square" lIns="109728" rIns="109728" tIns="73152" bIns="73152" anchor="ctr">
+            <a:noAutofit/>
+          </a:bodyPr>
+          <a:lstStyle/>
+          <a:p>
+            <a:pPr algn="ctr">
+              <a:spcBef>
+                <a:spcPts val="600"/>
+              </a:spcBef>
               <a:spcAft>
-                <a:spcPts val="500"/>
+                <a:spcPts val="800"/>
               </a:spcAft>
-              <a:defRPr sz="5500" b="1" i="0" u="none">
-                <a:solidFill>
-                  <a:srgbClr val="FFFFFF"/>
+            </a:pPr>
+            <a:r>
+              <a:rPr sz="5500" b="1">
+                <a:solidFill>
+                  <a:srgbClr val="F8B300"/>
                 </a:solidFill>
                 <a:latin typeface="Georgia"/>
-              </a:defRPr>
-            </a:pPr>
-            <a:r>
-              <a:t>FOOD SPONSORS</a:t>
-            </a:r>
-          </a:p>
-          <a:p>
-            <a:pPr algn="ctr">
+              </a:rPr>
+              <a:t>Priest: </a:t>
+            </a:r>
+            <a:r>
+              <a:rPr sz="5500" b="1">
+                <a:solidFill>
+                  <a:srgbClr val="FFFFFF"/>
+                </a:solidFill>
+                <a:latin typeface="Georgia"/>
+              </a:rPr>
+              <a:t>The Lord be with you.</a:t>
+            </a:r>
+          </a:p>
+          <a:p>
+            <a:pPr algn="ctr">
+              <a:spcBef>
+                <a:spcPts val="600"/>
+              </a:spcBef>
               <a:spcAft>
-                <a:spcPts val="500"/>
+                <a:spcPts val="800"/>
               </a:spcAft>
-              <a:defRPr sz="5500" b="0" i="0" u="none">
+            </a:pPr>
+            <a:r>
+              <a:rPr sz="5500" b="1">
                 <a:solidFill>
                   <a:srgbClr val="FFFFFF"/>
                 </a:solidFill>
                 <a:latin typeface="Georgia"/>
-              </a:defRPr>
-            </a:pPr>
-            <a:r>
-              <a:t>The community thanks our food sponsors.</a:t>
-            </a:r>
-          </a:p>
-          <a:p>
-            <a:pPr algn="ctr">
+              </a:rPr>
+              <a:t>All: </a:t>
+            </a:r>
+            <a:r>
+              <a:rPr sz="5500" b="1">
+                <a:solidFill>
+                  <a:srgbClr val="FFFFFF"/>
+                </a:solidFill>
+                <a:latin typeface="Georgia"/>
+              </a:rPr>
+              <a:t>And with your spirit.</a:t>
+            </a:r>
+          </a:p>
+          <a:p>
+            <a:pPr algn="ctr">
+              <a:spcBef>
+                <a:spcPts val="600"/>
+              </a:spcBef>
               <a:spcAft>
-                <a:spcPts val="500"/>
+                <a:spcPts val="800"/>
               </a:spcAft>
-              <a:defRPr sz="5500" b="0" i="0" u="none">
-                <a:solidFill>
-                  <a:srgbClr val="FFFFFF"/>
+            </a:pPr>
+            <a:r>
+              <a:rPr sz="5500" b="1">
+                <a:solidFill>
+                  <a:srgbClr val="F8B300"/>
                 </a:solidFill>
                 <a:latin typeface="Georgia"/>
-              </a:defRPr>
-            </a:pPr>
-            <a:r>
-              <a:t>• keshi</a:t>
+              </a:rPr>
+              <a:t>Priest: </a:t>
+            </a:r>
+            <a:r>
+              <a:rPr sz="5500" b="1">
+                <a:solidFill>
+                  <a:srgbClr val="FFFFFF"/>
+                </a:solidFill>
+                <a:latin typeface="Georgia"/>
+              </a:rPr>
+              <a:t>May almighty God bless you, the Father, and the Son, and the Holy Spirit.</a:t>
+            </a:r>
+          </a:p>
+          <a:p>
+            <a:pPr algn="ctr">
+              <a:spcBef>
+                <a:spcPts val="600"/>
+              </a:spcBef>
+              <a:spcAft>
+                <a:spcPts val="800"/>
+              </a:spcAft>
+            </a:pPr>
+            <a:r>
+              <a:rPr sz="5500" b="1">
+                <a:solidFill>
+                  <a:srgbClr val="FFFFFF"/>
+                </a:solidFill>
+                <a:latin typeface="Georgia"/>
+              </a:rPr>
+              <a:t>All: </a:t>
+            </a:r>
+            <a:r>
+              <a:rPr sz="5500" b="1">
+                <a:solidFill>
+                  <a:srgbClr val="FFFFFF"/>
+                </a:solidFill>
+                <a:latin typeface="Georgia"/>
+              </a:rPr>
+              <a:t>Amen.</a:t>
+            </a:r>
+          </a:p>
+          <a:p>
+            <a:pPr algn="ctr">
+              <a:spcBef>
+                <a:spcPts val="600"/>
+              </a:spcBef>
+              <a:spcAft>
+                <a:spcPts val="800"/>
+              </a:spcAft>
+            </a:pPr>
+            <a:r>
+              <a:rPr sz="5500" b="1">
+                <a:solidFill>
+                  <a:srgbClr val="F8B300"/>
+                </a:solidFill>
+                <a:latin typeface="Georgia"/>
+              </a:rPr>
+              <a:t>Priest: </a:t>
+            </a:r>
+            <a:r>
+              <a:rPr sz="5500" b="1">
+                <a:solidFill>
+                  <a:srgbClr val="FFFFFF"/>
+                </a:solidFill>
+                <a:latin typeface="Georgia"/>
+              </a:rPr>
+              <a:t>Go in peace, glorifying the Lord by your life.</a:t>
+            </a:r>
+          </a:p>
+          <a:p>
+            <a:pPr algn="ctr">
+              <a:spcBef>
+                <a:spcPts val="600"/>
+              </a:spcBef>
+              <a:spcAft>
+                <a:spcPts val="800"/>
+              </a:spcAft>
+            </a:pPr>
+            <a:r>
+              <a:rPr sz="5500" b="1">
+                <a:solidFill>
+                  <a:srgbClr val="FFFFFF"/>
+                </a:solidFill>
+                <a:latin typeface="Georgia"/>
+              </a:rPr>
+              <a:t>All: </a:t>
+            </a:r>
+            <a:r>
+              <a:rPr sz="5500" b="1">
+                <a:solidFill>
+                  <a:srgbClr val="FFFFFF"/>
+                </a:solidFill>
+                <a:latin typeface="Georgia"/>
+              </a:rPr>
+              <a:t>Thanks be to God.</a:t>
             </a:r>
           </a:p>
         </p:txBody>
@@ -16729,7 +16873,7 @@
               </a:defRPr>
             </a:pPr>
             <a:r>
-              <a:t>Food Sponsors</a:t>
+              <a:t>Final Blessing</a:t>
             </a:r>
           </a:p>
         </p:txBody>
@@ -16917,7 +17061,7 @@
     <p:bg>
       <p:bgPr>
         <a:solidFill>
-          <a:srgbClr val="211733"/>
+          <a:srgbClr val="000000"/>
         </a:solidFill>
         <a:effectLst/>
       </p:bgPr>
@@ -16937,8 +17081,8 @@
         </p:nvSpPr>
         <p:spPr>
           <a:xfrm>
-            <a:off x="914400" y="530352"/>
-            <a:ext cx="16459200" cy="8750808"/>
+            <a:off x="914400" y="109728"/>
+            <a:ext cx="16459200" cy="868680"/>
           </a:xfrm>
           <a:prstGeom prst="rect">
             <a:avLst/>
@@ -16951,19 +17095,15 @@
           </a:bodyPr>
           <a:lstStyle/>
           <a:p>
-            <a:pPr algn="ctr">
-              <a:spcAft>
-                <a:spcPts val="500"/>
-              </a:spcAft>
-              <a:defRPr sz="5500" b="1" i="0" u="none">
-                <a:solidFill>
-                  <a:srgbClr val="FFFFFF"/>
+            <a:pPr algn="ctr"/>
+            <a:r>
+              <a:rPr sz="3850" b="1" u="sng">
+                <a:solidFill>
+                  <a:srgbClr val="FFCC4D"/>
                 </a:solidFill>
                 <a:latin typeface="Georgia"/>
-              </a:defRPr>
-            </a:pPr>
-            <a:r>
-              <a:t>CHURCH ANNOUNCEMENTS</a:t>
+              </a:rPr>
+              <a:t>We Are Called</a:t>
             </a:r>
           </a:p>
         </p:txBody>
@@ -16976,6 +17116,93 @@
         </p:nvSpPr>
         <p:spPr>
           <a:xfrm>
+            <a:off x="0" y="1069848"/>
+            <a:ext cx="18288000" cy="8348472"/>
+          </a:xfrm>
+          <a:prstGeom prst="rect">
+            <a:avLst/>
+          </a:prstGeom>
+          <a:noFill/>
+        </p:spPr>
+        <p:txBody>
+          <a:bodyPr wrap="square" lIns="0" rIns="0" tIns="73152" bIns="73152" anchor="ctr">
+            <a:noAutofit/>
+          </a:bodyPr>
+          <a:lstStyle/>
+          <a:p>
+            <a:pPr algn="ctr">
+              <a:lnSpc>
+                <a:spcPct val="70000"/>
+              </a:lnSpc>
+            </a:pPr>
+            <a:r>
+              <a:rPr sz="7500" b="1" i="0">
+                <a:solidFill>
+                  <a:srgbClr val="FFFFFF"/>
+                </a:solidFill>
+                <a:latin typeface="Poppins"/>
+              </a:rPr>
+              <a:t>WE ARE CALLED TO ACT WITH JUSTICE,</a:t>
+            </a:r>
+          </a:p>
+          <a:p>
+            <a:pPr algn="ctr">
+              <a:lnSpc>
+                <a:spcPct val="70000"/>
+              </a:lnSpc>
+            </a:pPr>
+            <a:r>
+              <a:rPr sz="7500" b="1" i="0">
+                <a:solidFill>
+                  <a:srgbClr val="FFFFFF"/>
+                </a:solidFill>
+                <a:latin typeface="Poppins"/>
+              </a:rPr>
+              <a:t>WE ARE CALLED TO LOVE TENDERLY;</a:t>
+            </a:r>
+          </a:p>
+          <a:p>
+            <a:pPr algn="ctr">
+              <a:lnSpc>
+                <a:spcPct val="70000"/>
+              </a:lnSpc>
+            </a:pPr>
+            <a:r>
+              <a:rPr sz="7500" b="1" i="0">
+                <a:solidFill>
+                  <a:srgbClr val="FFFFFF"/>
+                </a:solidFill>
+                <a:latin typeface="Poppins"/>
+              </a:rPr>
+              <a:t>WE ARE CALLED TO SERVE ONE ANOTHER,</a:t>
+            </a:r>
+          </a:p>
+          <a:p>
+            <a:pPr algn="ctr">
+              <a:lnSpc>
+                <a:spcPct val="70000"/>
+              </a:lnSpc>
+            </a:pPr>
+            <a:r>
+              <a:rPr sz="7500" b="1" i="0">
+                <a:solidFill>
+                  <a:srgbClr val="FFFFFF"/>
+                </a:solidFill>
+                <a:latin typeface="Poppins"/>
+              </a:rPr>
+              <a:t>TO WALK HUMBLY WITH GOD.</a:t>
+            </a:r>
+          </a:p>
+        </p:txBody>
+      </p:sp>
+      <p:sp>
+        <p:nvSpPr>
+          <p:cNvPr id="4" name="TextBox 3"/>
+          <p:cNvSpPr txBox="1"/>
+          <p:nvPr/>
+        </p:nvSpPr>
+        <p:spPr>
+          <a:xfrm>
             <a:off x="914400" y="9418320"/>
             <a:ext cx="16459200" cy="777240"/>
           </a:xfrm>
@@ -16991,19 +17218,19 @@
           <a:lstStyle/>
           <a:p/>
           <a:p>
-            <a:pPr algn="l">
+            <a:pPr>
               <a:spcBef>
                 <a:spcPts val="200"/>
               </a:spcBef>
               <a:defRPr sz="1200" b="0" i="0" u="none">
                 <a:solidFill>
-                  <a:srgbClr val="D8B4FE"/>
+                  <a:srgbClr val="FFCC4D"/>
                 </a:solidFill>
                 <a:latin typeface="Georgia"/>
               </a:defRPr>
             </a:pPr>
             <a:r>
-              <a:t>Announcements</a:t>
+              <a:t>Recessional</a:t>
             </a:r>
           </a:p>
         </p:txBody>
@@ -17022,7 +17249,7 @@
     <p:bg>
       <p:bgPr>
         <a:solidFill>
-          <a:srgbClr val="211733"/>
+          <a:srgbClr val="000000"/>
         </a:solidFill>
         <a:effectLst/>
       </p:bgPr>
@@ -17042,8 +17269,8 @@
         </p:nvSpPr>
         <p:spPr>
           <a:xfrm>
-            <a:off x="914400" y="530352"/>
-            <a:ext cx="16459200" cy="8750808"/>
+            <a:off x="0" y="0"/>
+            <a:ext cx="18288000" cy="10287000"/>
           </a:xfrm>
           <a:prstGeom prst="rect">
             <a:avLst/>
@@ -17051,24 +17278,40 @@
           <a:noFill/>
         </p:spPr>
         <p:txBody>
-          <a:bodyPr wrap="square" lIns="109728" rIns="109728" tIns="73152" bIns="73152">
-            <a:noAutofit/>
-          </a:bodyPr>
-          <a:lstStyle/>
-          <a:p>
-            <a:pPr algn="ctr">
-              <a:spcAft>
-                <a:spcPts val="500"/>
-              </a:spcAft>
-              <a:defRPr sz="5500" b="1" i="0" u="none">
-                <a:solidFill>
-                  <a:srgbClr val="FFFFFF"/>
-                </a:solidFill>
-                <a:latin typeface="Georgia"/>
-              </a:defRPr>
-            </a:pPr>
-            <a:r>
-              <a:t>Welcome newcomers!</a:t>
+          <a:bodyPr wrap="square" lIns="0" rIns="0" tIns="73152" bIns="73152" anchor="ctr">
+            <a:noAutofit/>
+          </a:bodyPr>
+          <a:lstStyle/>
+          <a:p>
+            <a:pPr algn="ctr">
+              <a:lnSpc>
+                <a:spcPct val="70000"/>
+              </a:lnSpc>
+            </a:pPr>
+            <a:r>
+              <a:rPr sz="6600" b="1" i="0">
+                <a:solidFill>
+                  <a:srgbClr val="FFFFFF"/>
+                </a:solidFill>
+                <a:latin typeface="Poppins"/>
+              </a:rPr>
+              <a:t>COME! LIVE IN THE LIGHT!</a:t>
+            </a:r>
+          </a:p>
+          <a:p>
+            <a:pPr algn="ctr">
+              <a:lnSpc>
+                <a:spcPct val="70000"/>
+              </a:lnSpc>
+            </a:pPr>
+            <a:r>
+              <a:rPr sz="6600" b="1" i="0">
+                <a:solidFill>
+                  <a:srgbClr val="FFFFFF"/>
+                </a:solidFill>
+                <a:latin typeface="Poppins"/>
+              </a:rPr>
+              <a:t>SHINE WITH THE JOY AND THE LOVE OF THE LORD!</a:t>
             </a:r>
           </a:p>
         </p:txBody>
@@ -17096,19 +17339,19 @@
           <a:lstStyle/>
           <a:p/>
           <a:p>
-            <a:pPr algn="l">
+            <a:pPr>
               <a:spcBef>
                 <a:spcPts val="200"/>
               </a:spcBef>
               <a:defRPr sz="1200" b="0" i="0" u="none">
                 <a:solidFill>
-                  <a:srgbClr val="D8B4FE"/>
+                  <a:srgbClr val="FFCC4D"/>
                 </a:solidFill>
                 <a:latin typeface="Georgia"/>
               </a:defRPr>
             </a:pPr>
             <a:r>
-              <a:t>Announcements</a:t>
+              <a:t>Recessional</a:t>
             </a:r>
           </a:p>
         </p:txBody>
@@ -17127,7 +17370,7 @@
     <p:bg>
       <p:bgPr>
         <a:solidFill>
-          <a:srgbClr val="211733"/>
+          <a:srgbClr val="000000"/>
         </a:solidFill>
         <a:effectLst/>
       </p:bgPr>
@@ -17147,8 +17390,8 @@
         </p:nvSpPr>
         <p:spPr>
           <a:xfrm>
-            <a:off x="914400" y="530352"/>
-            <a:ext cx="16459200" cy="8750808"/>
+            <a:off x="0" y="0"/>
+            <a:ext cx="18288000" cy="10287000"/>
           </a:xfrm>
           <a:prstGeom prst="rect">
             <a:avLst/>
@@ -17156,24 +17399,72 @@
           <a:noFill/>
         </p:spPr>
         <p:txBody>
-          <a:bodyPr wrap="square" lIns="109728" rIns="109728" tIns="73152" bIns="73152">
-            <a:noAutofit/>
-          </a:bodyPr>
-          <a:lstStyle/>
-          <a:p>
-            <a:pPr algn="ctr">
-              <a:spcAft>
-                <a:spcPts val="500"/>
-              </a:spcAft>
-              <a:defRPr sz="5500" b="1" i="0" u="none">
-                <a:solidFill>
-                  <a:srgbClr val="FFFFFF"/>
-                </a:solidFill>
-                <a:latin typeface="Georgia"/>
-              </a:defRPr>
-            </a:pPr>
-            <a:r>
-              <a:t>Sacrament of Confession</a:t>
+          <a:bodyPr wrap="square" lIns="0" rIns="0" tIns="73152" bIns="73152" anchor="ctr">
+            <a:noAutofit/>
+          </a:bodyPr>
+          <a:lstStyle/>
+          <a:p>
+            <a:pPr algn="ctr">
+              <a:lnSpc>
+                <a:spcPct val="70000"/>
+              </a:lnSpc>
+            </a:pPr>
+            <a:r>
+              <a:rPr sz="7500" b="1" i="0">
+                <a:solidFill>
+                  <a:srgbClr val="FFFFFF"/>
+                </a:solidFill>
+                <a:latin typeface="Poppins"/>
+              </a:rPr>
+              <a:t>GOD OF DAYBREAK, GOD OF SHADOW,</a:t>
+            </a:r>
+          </a:p>
+          <a:p>
+            <a:pPr algn="ctr">
+              <a:lnSpc>
+                <a:spcPct val="70000"/>
+              </a:lnSpc>
+            </a:pPr>
+            <a:r>
+              <a:rPr sz="7500" b="1" i="0">
+                <a:solidFill>
+                  <a:srgbClr val="FFFFFF"/>
+                </a:solidFill>
+                <a:latin typeface="Poppins"/>
+              </a:rPr>
+              <a:t>COME INTO OUR RESTLESS LIVES;</a:t>
+            </a:r>
+          </a:p>
+          <a:p>
+            <a:pPr algn="ctr">
+              <a:lnSpc>
+                <a:spcPct val="70000"/>
+              </a:lnSpc>
+            </a:pPr>
+            <a:r>
+              <a:rPr sz="7500" b="1" i="0">
+                <a:solidFill>
+                  <a:srgbClr val="FFFFFF"/>
+                </a:solidFill>
+                <a:latin typeface="Poppins"/>
+              </a:rPr>
+              <a:t>LIFT FROM US THE FEAR OF SHADOWS,</a:t>
+            </a:r>
+          </a:p>
+          <a:p>
+            <a:pPr algn="ctr">
+              <a:lnSpc>
+                <a:spcPct val="70000"/>
+              </a:lnSpc>
+            </a:pPr>
+            <a:r>
+              <a:rPr sz="7500" b="1" i="0">
+                <a:solidFill>
+                  <a:srgbClr val="FFFFFF"/>
+                </a:solidFill>
+                <a:latin typeface="Poppins"/>
+              </a:rPr>
+              <a:t>THAT WE MAY ARISE WITH LIGHT.</a:t>
             </a:r>
           </a:p>
         </p:txBody>
@@ -17201,19 +17492,19 @@
           <a:lstStyle/>
           <a:p/>
           <a:p>
-            <a:pPr algn="l">
+            <a:pPr>
               <a:spcBef>
                 <a:spcPts val="200"/>
               </a:spcBef>
               <a:defRPr sz="1200" b="0" i="0" u="none">
                 <a:solidFill>
-                  <a:srgbClr val="D8B4FE"/>
+                  <a:srgbClr val="FFCC4D"/>
                 </a:solidFill>
                 <a:latin typeface="Georgia"/>
               </a:defRPr>
             </a:pPr>
             <a:r>
-              <a:t>Announcements</a:t>
+              <a:t>Recessional</a:t>
             </a:r>
           </a:p>
         </p:txBody>
@@ -17232,7 +17523,7 @@
     <p:bg>
       <p:bgPr>
         <a:solidFill>
-          <a:srgbClr val="211733"/>
+          <a:srgbClr val="000000"/>
         </a:solidFill>
         <a:effectLst/>
       </p:bgPr>
@@ -17252,8 +17543,8 @@
         </p:nvSpPr>
         <p:spPr>
           <a:xfrm>
-            <a:off x="914400" y="530352"/>
-            <a:ext cx="16459200" cy="8750808"/>
+            <a:off x="0" y="0"/>
+            <a:ext cx="18288000" cy="10287000"/>
           </a:xfrm>
           <a:prstGeom prst="rect">
             <a:avLst/>
@@ -17261,24 +17552,24 @@
           <a:noFill/>
         </p:spPr>
         <p:txBody>
-          <a:bodyPr wrap="square" lIns="109728" rIns="109728" tIns="73152" bIns="73152">
-            <a:noAutofit/>
-          </a:bodyPr>
-          <a:lstStyle/>
-          <a:p>
-            <a:pPr algn="ctr">
-              <a:spcAft>
-                <a:spcPts val="500"/>
-              </a:spcAft>
-              <a:defRPr sz="5500" b="1" i="0" u="none">
-                <a:solidFill>
-                  <a:srgbClr val="FFFFFF"/>
-                </a:solidFill>
-                <a:latin typeface="Georgia"/>
-              </a:defRPr>
-            </a:pPr>
-            <a:r>
-              <a:t>Updates and Announcements</a:t>
+          <a:bodyPr wrap="square" lIns="0" rIns="0" tIns="73152" bIns="73152" anchor="ctr">
+            <a:noAutofit/>
+          </a:bodyPr>
+          <a:lstStyle/>
+          <a:p>
+            <a:pPr algn="ctr">
+              <a:lnSpc>
+                <a:spcPct val="70000"/>
+              </a:lnSpc>
+            </a:pPr>
+            <a:r>
+              <a:rPr sz="7500" b="1" i="0">
+                <a:solidFill>
+                  <a:srgbClr val="FFFFFF"/>
+                </a:solidFill>
+                <a:latin typeface="Poppins"/>
+              </a:rPr>
+              <a:t>WE ARE CALLED TO ACT WITH JUSTICE...</a:t>
             </a:r>
           </a:p>
         </p:txBody>
@@ -17306,19 +17597,19 @@
           <a:lstStyle/>
           <a:p/>
           <a:p>
-            <a:pPr algn="l">
+            <a:pPr>
               <a:spcBef>
                 <a:spcPts val="200"/>
               </a:spcBef>
               <a:defRPr sz="1200" b="0" i="0" u="none">
                 <a:solidFill>
-                  <a:srgbClr val="D8B4FE"/>
+                  <a:srgbClr val="FFCC4D"/>
                 </a:solidFill>
                 <a:latin typeface="Georgia"/>
               </a:defRPr>
             </a:pPr>
             <a:r>
-              <a:t>Announcements</a:t>
+              <a:t>Recessional</a:t>
             </a:r>
           </a:p>
         </p:txBody>
@@ -17337,7 +17628,7 @@
     <p:bg>
       <p:bgPr>
         <a:solidFill>
-          <a:srgbClr val="211733"/>
+          <a:srgbClr val="000000"/>
         </a:solidFill>
         <a:effectLst/>
       </p:bgPr>
@@ -17357,8 +17648,8 @@
         </p:nvSpPr>
         <p:spPr>
           <a:xfrm>
-            <a:off x="914400" y="530352"/>
-            <a:ext cx="16459200" cy="8613648"/>
+            <a:off x="0" y="0"/>
+            <a:ext cx="18288000" cy="10287000"/>
           </a:xfrm>
           <a:prstGeom prst="rect">
             <a:avLst/>
@@ -17366,176 +17657,24 @@
           <a:noFill/>
         </p:spPr>
         <p:txBody>
-          <a:bodyPr wrap="square" lIns="109728" rIns="109728" tIns="73152" bIns="73152" anchor="ctr">
-            <a:noAutofit/>
-          </a:bodyPr>
-          <a:lstStyle/>
-          <a:p>
-            <a:pPr algn="ctr">
-              <a:spcBef>
-                <a:spcPts val="600"/>
-              </a:spcBef>
-              <a:spcAft>
-                <a:spcPts val="800"/>
-              </a:spcAft>
-            </a:pPr>
-            <a:r>
-              <a:rPr sz="5500" b="1">
-                <a:solidFill>
-                  <a:srgbClr val="F8B300"/>
-                </a:solidFill>
-                <a:latin typeface="Georgia"/>
-              </a:rPr>
-              <a:t>Priest: </a:t>
-            </a:r>
-            <a:r>
-              <a:rPr sz="5500" b="1">
-                <a:solidFill>
-                  <a:srgbClr val="FFFFFF"/>
-                </a:solidFill>
-                <a:latin typeface="Georgia"/>
-              </a:rPr>
-              <a:t>The Lord be with you.</a:t>
-            </a:r>
-          </a:p>
-          <a:p>
-            <a:pPr algn="ctr">
-              <a:spcBef>
-                <a:spcPts val="600"/>
-              </a:spcBef>
-              <a:spcAft>
-                <a:spcPts val="800"/>
-              </a:spcAft>
-            </a:pPr>
-            <a:r>
-              <a:rPr sz="5500" b="1">
-                <a:solidFill>
-                  <a:srgbClr val="FFFFFF"/>
-                </a:solidFill>
-                <a:latin typeface="Georgia"/>
-              </a:rPr>
-              <a:t>All: </a:t>
-            </a:r>
-            <a:r>
-              <a:rPr sz="5500" b="1">
-                <a:solidFill>
-                  <a:srgbClr val="FFFFFF"/>
-                </a:solidFill>
-                <a:latin typeface="Georgia"/>
-              </a:rPr>
-              <a:t>And with your spirit.</a:t>
-            </a:r>
-          </a:p>
-          <a:p>
-            <a:pPr algn="ctr">
-              <a:spcBef>
-                <a:spcPts val="600"/>
-              </a:spcBef>
-              <a:spcAft>
-                <a:spcPts val="800"/>
-              </a:spcAft>
-            </a:pPr>
-            <a:r>
-              <a:rPr sz="5500" b="1">
-                <a:solidFill>
-                  <a:srgbClr val="F8B300"/>
-                </a:solidFill>
-                <a:latin typeface="Georgia"/>
-              </a:rPr>
-              <a:t>Priest: </a:t>
-            </a:r>
-            <a:r>
-              <a:rPr sz="5500" b="1">
-                <a:solidFill>
-                  <a:srgbClr val="FFFFFF"/>
-                </a:solidFill>
-                <a:latin typeface="Georgia"/>
-              </a:rPr>
-              <a:t>May almighty God bless you, the Father, and the Son, and the Holy Spirit.</a:t>
-            </a:r>
-          </a:p>
-          <a:p>
-            <a:pPr algn="ctr">
-              <a:spcBef>
-                <a:spcPts val="600"/>
-              </a:spcBef>
-              <a:spcAft>
-                <a:spcPts val="800"/>
-              </a:spcAft>
-            </a:pPr>
-            <a:r>
-              <a:rPr sz="5500" b="1">
-                <a:solidFill>
-                  <a:srgbClr val="FFFFFF"/>
-                </a:solidFill>
-                <a:latin typeface="Georgia"/>
-              </a:rPr>
-              <a:t>All: </a:t>
-            </a:r>
-            <a:r>
-              <a:rPr sz="5500" b="1">
-                <a:solidFill>
-                  <a:srgbClr val="FFFFFF"/>
-                </a:solidFill>
-                <a:latin typeface="Georgia"/>
-              </a:rPr>
-              <a:t>Amen.</a:t>
-            </a:r>
-          </a:p>
-          <a:p>
-            <a:pPr algn="ctr">
-              <a:spcBef>
-                <a:spcPts val="600"/>
-              </a:spcBef>
-              <a:spcAft>
-                <a:spcPts val="800"/>
-              </a:spcAft>
-            </a:pPr>
-            <a:r>
-              <a:rPr sz="5500" b="1">
-                <a:solidFill>
-                  <a:srgbClr val="F8B300"/>
-                </a:solidFill>
-                <a:latin typeface="Georgia"/>
-              </a:rPr>
-              <a:t>Priest: </a:t>
-            </a:r>
-            <a:r>
-              <a:rPr sz="5500" b="1">
-                <a:solidFill>
-                  <a:srgbClr val="FFFFFF"/>
-                </a:solidFill>
-                <a:latin typeface="Georgia"/>
-              </a:rPr>
-              <a:t>Go in peace, glorifying the Lord by your life.</a:t>
-            </a:r>
-          </a:p>
-          <a:p>
-            <a:pPr algn="ctr">
-              <a:spcBef>
-                <a:spcPts val="600"/>
-              </a:spcBef>
-              <a:spcAft>
-                <a:spcPts val="800"/>
-              </a:spcAft>
-            </a:pPr>
-            <a:r>
-              <a:rPr sz="5500" b="1">
-                <a:solidFill>
-                  <a:srgbClr val="FFFFFF"/>
-                </a:solidFill>
-                <a:latin typeface="Georgia"/>
-              </a:rPr>
-              <a:t>All: </a:t>
-            </a:r>
-            <a:r>
-              <a:rPr sz="5500" b="1">
-                <a:solidFill>
-                  <a:srgbClr val="FFFFFF"/>
-                </a:solidFill>
-                <a:latin typeface="Georgia"/>
-              </a:rPr>
-              <a:t>Thanks be to God.</a:t>
+          <a:bodyPr wrap="square" lIns="0" rIns="0" tIns="73152" bIns="73152" anchor="ctr">
+            <a:noAutofit/>
+          </a:bodyPr>
+          <a:lstStyle/>
+          <a:p>
+            <a:pPr algn="ctr">
+              <a:lnSpc>
+                <a:spcPct val="70000"/>
+              </a:lnSpc>
+            </a:pPr>
+            <a:r>
+              <a:rPr sz="7500" b="1" i="0">
+                <a:solidFill>
+                  <a:srgbClr val="FFFFFF"/>
+                </a:solidFill>
+                <a:latin typeface="Poppins"/>
+              </a:rPr>
+              <a:t>COME! LIVE IN THE LIGHT!...</a:t>
             </a:r>
           </a:p>
         </p:txBody>
@@ -17563,19 +17702,19 @@
           <a:lstStyle/>
           <a:p/>
           <a:p>
-            <a:pPr algn="l">
+            <a:pPr>
               <a:spcBef>
                 <a:spcPts val="200"/>
               </a:spcBef>
               <a:defRPr sz="1200" b="0" i="0" u="none">
                 <a:solidFill>
-                  <a:srgbClr val="D8B4FE"/>
+                  <a:srgbClr val="FFCC4D"/>
                 </a:solidFill>
                 <a:latin typeface="Georgia"/>
               </a:defRPr>
             </a:pPr>
             <a:r>
-              <a:t>Final Blessing</a:t>
+              <a:t>Recessional</a:t>
             </a:r>
           </a:p>
         </p:txBody>
@@ -17614,8 +17753,8 @@
         </p:nvSpPr>
         <p:spPr>
           <a:xfrm>
-            <a:off x="914400" y="109728"/>
-            <a:ext cx="16459200" cy="868680"/>
+            <a:off x="0" y="0"/>
+            <a:ext cx="18288000" cy="10287000"/>
           </a:xfrm>
           <a:prstGeom prst="rect">
             <a:avLst/>
@@ -17623,20 +17762,72 @@
           <a:noFill/>
         </p:spPr>
         <p:txBody>
-          <a:bodyPr wrap="square" lIns="109728" rIns="109728" tIns="73152" bIns="73152">
-            <a:noAutofit/>
-          </a:bodyPr>
-          <a:lstStyle/>
-          <a:p>
-            <a:pPr algn="ctr"/>
-            <a:r>
-              <a:rPr sz="3850" b="1" u="sng">
-                <a:solidFill>
-                  <a:srgbClr val="FFCC4D"/>
-                </a:solidFill>
-                <a:latin typeface="Georgia"/>
-              </a:rPr>
-              <a:t>We Are Called</a:t>
+          <a:bodyPr wrap="square" lIns="0" rIns="0" tIns="73152" bIns="73152" anchor="ctr">
+            <a:noAutofit/>
+          </a:bodyPr>
+          <a:lstStyle/>
+          <a:p>
+            <a:pPr algn="ctr">
+              <a:lnSpc>
+                <a:spcPct val="70000"/>
+              </a:lnSpc>
+            </a:pPr>
+            <a:r>
+              <a:rPr sz="7400" b="1" i="0">
+                <a:solidFill>
+                  <a:srgbClr val="FFFFFF"/>
+                </a:solidFill>
+                <a:latin typeface="Poppins"/>
+              </a:rPr>
+              <a:t>GOD OF NEWNESS, GOD OF FRESHNESS,</a:t>
+            </a:r>
+          </a:p>
+          <a:p>
+            <a:pPr algn="ctr">
+              <a:lnSpc>
+                <a:spcPct val="70000"/>
+              </a:lnSpc>
+            </a:pPr>
+            <a:r>
+              <a:rPr sz="7400" b="1" i="0">
+                <a:solidFill>
+                  <a:srgbClr val="FFFFFF"/>
+                </a:solidFill>
+                <a:latin typeface="Poppins"/>
+              </a:rPr>
+              <a:t>COME INTO OUR MORNING SONG:</a:t>
+            </a:r>
+          </a:p>
+          <a:p>
+            <a:pPr algn="ctr">
+              <a:lnSpc>
+                <a:spcPct val="70000"/>
+              </a:lnSpc>
+            </a:pPr>
+            <a:r>
+              <a:rPr sz="7400" b="1" i="0">
+                <a:solidFill>
+                  <a:srgbClr val="FFFFFF"/>
+                </a:solidFill>
+                <a:latin typeface="Poppins"/>
+              </a:rPr>
+              <a:t>GIVE TO US A NEW BEGINNING,</a:t>
+            </a:r>
+          </a:p>
+          <a:p>
+            <a:pPr algn="ctr">
+              <a:lnSpc>
+                <a:spcPct val="70000"/>
+              </a:lnSpc>
+            </a:pPr>
+            <a:r>
+              <a:rPr sz="7400" b="1" i="0">
+                <a:solidFill>
+                  <a:srgbClr val="FFFFFF"/>
+                </a:solidFill>
+                <a:latin typeface="Poppins"/>
+              </a:rPr>
+              <a:t>SEND US FORTH WITH HEARTS MADE STRONG.</a:t>
             </a:r>
           </a:p>
         </p:txBody>
@@ -17644,93 +17835,6 @@
       <p:sp>
         <p:nvSpPr>
           <p:cNvPr id="3" name="TextBox 2"/>
-          <p:cNvSpPr txBox="1"/>
-          <p:nvPr/>
-        </p:nvSpPr>
-        <p:spPr>
-          <a:xfrm>
-            <a:off x="0" y="1069848"/>
-            <a:ext cx="18288000" cy="8348472"/>
-          </a:xfrm>
-          <a:prstGeom prst="rect">
-            <a:avLst/>
-          </a:prstGeom>
-          <a:noFill/>
-        </p:spPr>
-        <p:txBody>
-          <a:bodyPr wrap="square" lIns="0" rIns="0" tIns="73152" bIns="73152" anchor="ctr">
-            <a:noAutofit/>
-          </a:bodyPr>
-          <a:lstStyle/>
-          <a:p>
-            <a:pPr algn="ctr">
-              <a:lnSpc>
-                <a:spcPct val="70000"/>
-              </a:lnSpc>
-            </a:pPr>
-            <a:r>
-              <a:rPr sz="7500" b="1" i="0">
-                <a:solidFill>
-                  <a:srgbClr val="FFFFFF"/>
-                </a:solidFill>
-                <a:latin typeface="Poppins"/>
-              </a:rPr>
-              <a:t>WE ARE CALLED TO ACT WITH JUSTICE,</a:t>
-            </a:r>
-          </a:p>
-          <a:p>
-            <a:pPr algn="ctr">
-              <a:lnSpc>
-                <a:spcPct val="70000"/>
-              </a:lnSpc>
-            </a:pPr>
-            <a:r>
-              <a:rPr sz="7500" b="1" i="0">
-                <a:solidFill>
-                  <a:srgbClr val="FFFFFF"/>
-                </a:solidFill>
-                <a:latin typeface="Poppins"/>
-              </a:rPr>
-              <a:t>WE ARE CALLED TO LOVE TENDERLY;</a:t>
-            </a:r>
-          </a:p>
-          <a:p>
-            <a:pPr algn="ctr">
-              <a:lnSpc>
-                <a:spcPct val="70000"/>
-              </a:lnSpc>
-            </a:pPr>
-            <a:r>
-              <a:rPr sz="7500" b="1" i="0">
-                <a:solidFill>
-                  <a:srgbClr val="FFFFFF"/>
-                </a:solidFill>
-                <a:latin typeface="Poppins"/>
-              </a:rPr>
-              <a:t>WE ARE CALLED TO SERVE ONE ANOTHER,</a:t>
-            </a:r>
-          </a:p>
-          <a:p>
-            <a:pPr algn="ctr">
-              <a:lnSpc>
-                <a:spcPct val="70000"/>
-              </a:lnSpc>
-            </a:pPr>
-            <a:r>
-              <a:rPr sz="7500" b="1" i="0">
-                <a:solidFill>
-                  <a:srgbClr val="FFFFFF"/>
-                </a:solidFill>
-                <a:latin typeface="Poppins"/>
-              </a:rPr>
-              <a:t>TO WALK HUMBLY WITH GOD.</a:t>
-            </a:r>
-          </a:p>
-        </p:txBody>
-      </p:sp>
-      <p:sp>
-        <p:nvSpPr>
-          <p:cNvPr id="4" name="TextBox 3"/>
           <p:cNvSpPr txBox="1"/>
           <p:nvPr/>
         </p:nvSpPr>
@@ -17822,29 +17926,13 @@
               </a:lnSpc>
             </a:pPr>
             <a:r>
-              <a:rPr sz="6600" b="1" i="0">
+              <a:rPr sz="7500" b="1" i="0">
                 <a:solidFill>
                   <a:srgbClr val="FFFFFF"/>
                 </a:solidFill>
                 <a:latin typeface="Poppins"/>
               </a:rPr>
-              <a:t>COME! LIVE IN THE LIGHT!</a:t>
-            </a:r>
-          </a:p>
-          <a:p>
-            <a:pPr algn="ctr">
-              <a:lnSpc>
-                <a:spcPct val="70000"/>
-              </a:lnSpc>
-            </a:pPr>
-            <a:r>
-              <a:rPr sz="6600" b="1" i="0">
-                <a:solidFill>
-                  <a:srgbClr val="FFFFFF"/>
-                </a:solidFill>
-                <a:latin typeface="Poppins"/>
-              </a:rPr>
-              <a:t>SHINE WITH THE JOY AND THE LOVE OF THE LORD!</a:t>
+              <a:t>WE ARE CALLED TO ACT WITH JUSTICE...</a:t>
             </a:r>
           </a:p>
         </p:txBody>
@@ -17949,55 +18037,7 @@
                 </a:solidFill>
                 <a:latin typeface="Poppins"/>
               </a:rPr>
-              <a:t>GOD OF DAYBREAK, GOD OF SHADOW,</a:t>
-            </a:r>
-          </a:p>
-          <a:p>
-            <a:pPr algn="ctr">
-              <a:lnSpc>
-                <a:spcPct val="70000"/>
-              </a:lnSpc>
-            </a:pPr>
-            <a:r>
-              <a:rPr sz="7500" b="1" i="0">
-                <a:solidFill>
-                  <a:srgbClr val="FFFFFF"/>
-                </a:solidFill>
-                <a:latin typeface="Poppins"/>
-              </a:rPr>
-              <a:t>COME INTO OUR RESTLESS LIVES;</a:t>
-            </a:r>
-          </a:p>
-          <a:p>
-            <a:pPr algn="ctr">
-              <a:lnSpc>
-                <a:spcPct val="70000"/>
-              </a:lnSpc>
-            </a:pPr>
-            <a:r>
-              <a:rPr sz="7500" b="1" i="0">
-                <a:solidFill>
-                  <a:srgbClr val="FFFFFF"/>
-                </a:solidFill>
-                <a:latin typeface="Poppins"/>
-              </a:rPr>
-              <a:t>LIFT FROM US THE FEAR OF SHADOWS,</a:t>
-            </a:r>
-          </a:p>
-          <a:p>
-            <a:pPr algn="ctr">
-              <a:lnSpc>
-                <a:spcPct val="70000"/>
-              </a:lnSpc>
-            </a:pPr>
-            <a:r>
-              <a:rPr sz="7500" b="1" i="0">
-                <a:solidFill>
-                  <a:srgbClr val="FFFFFF"/>
-                </a:solidFill>
-                <a:latin typeface="Poppins"/>
-              </a:rPr>
-              <a:t>THAT WE MAY ARISE WITH LIGHT.</a:t>
+              <a:t>COME! LIVE IN THE LIGHT!...</a:t>
             </a:r>
           </a:p>
         </p:txBody>
@@ -18055,9 +18095,17 @@
   <p:cSld>
     <p:bg>
       <p:bgPr>
-        <a:solidFill>
-          <a:srgbClr val="000000"/>
-        </a:solidFill>
+        <a:gradFill rotWithShape="1">
+          <a:gsLst>
+            <a:gs pos="0">
+              <a:srgbClr val="0C0B11"/>
+            </a:gs>
+            <a:gs pos="100000">
+              <a:srgbClr val="5F586C"/>
+            </a:gs>
+          </a:gsLst>
+          <a:lin scaled="0" ang="0"/>
+        </a:gradFill>
         <a:effectLst/>
       </p:bgPr>
     </p:bg>
@@ -18070,14 +18118,116 @@
       <p:grpSpPr/>
       <p:sp>
         <p:nvSpPr>
-          <p:cNvPr id="2" name="TextBox 1"/>
+          <p:cNvPr id="2" name="Rounded Rectangle 1"/>
+          <p:cNvSpPr/>
+          <p:nvPr/>
+        </p:nvSpPr>
+        <p:spPr>
+          <a:xfrm>
+            <a:off x="6856171" y="1269187"/>
+            <a:ext cx="10943539" cy="6128308"/>
+          </a:xfrm>
+          <a:prstGeom prst="roundRect">
+            <a:avLst>
+              <a:gd name="adj" fmla="val 16670"/>
+            </a:avLst>
+          </a:prstGeom>
+          <a:solidFill>
+            <a:srgbClr val="211733">
+              <a:alpha val="44706"/>
+            </a:srgbClr>
+          </a:solidFill>
+          <a:ln w="14299" cap="sq">
+            <a:solidFill>
+              <a:srgbClr val="6C6678">
+                <a:alpha val="44706"/>
+              </a:srgbClr>
+            </a:solidFill>
+          </a:ln>
+        </p:spPr>
+        <p:style>
+          <a:lnRef idx="1">
+            <a:schemeClr val="accent1"/>
+          </a:lnRef>
+          <a:fillRef idx="3">
+            <a:schemeClr val="accent1"/>
+          </a:fillRef>
+          <a:effectRef idx="2">
+            <a:schemeClr val="accent1"/>
+          </a:effectRef>
+          <a:fontRef idx="minor">
+            <a:schemeClr val="lt1"/>
+          </a:fontRef>
+        </p:style>
+        <p:txBody>
+          <a:bodyPr rtlCol="0" anchor="ctr"/>
+          <a:lstStyle/>
+          <a:p>
+            <a:pPr algn="ctr"/>
+          </a:p>
+        </p:txBody>
+      </p:sp>
+      <p:sp>
+        <p:nvSpPr>
+          <p:cNvPr id="3" name="Rounded Rectangle 2"/>
+          <p:cNvSpPr/>
+          <p:nvPr/>
+        </p:nvSpPr>
+        <p:spPr>
+          <a:xfrm>
+            <a:off x="900684" y="8503005"/>
+            <a:ext cx="16486632" cy="1112824"/>
+          </a:xfrm>
+          <a:prstGeom prst="roundRect">
+            <a:avLst>
+              <a:gd name="adj" fmla="val 16670"/>
+            </a:avLst>
+          </a:prstGeom>
+          <a:solidFill>
+            <a:srgbClr val="161122">
+              <a:alpha val="60784"/>
+            </a:srgbClr>
+          </a:solidFill>
+          <a:ln w="14299" cap="sq">
+            <a:solidFill>
+              <a:srgbClr val="161122">
+                <a:alpha val="60784"/>
+              </a:srgbClr>
+            </a:solidFill>
+          </a:ln>
+        </p:spPr>
+        <p:style>
+          <a:lnRef idx="1">
+            <a:schemeClr val="accent1"/>
+          </a:lnRef>
+          <a:fillRef idx="3">
+            <a:schemeClr val="accent1"/>
+          </a:fillRef>
+          <a:effectRef idx="2">
+            <a:schemeClr val="accent1"/>
+          </a:effectRef>
+          <a:fontRef idx="minor">
+            <a:schemeClr val="lt1"/>
+          </a:fontRef>
+        </p:style>
+        <p:txBody>
+          <a:bodyPr rtlCol="0" anchor="ctr"/>
+          <a:lstStyle/>
+          <a:p>
+            <a:pPr algn="ctr"/>
+          </a:p>
+        </p:txBody>
+      </p:sp>
+      <p:sp>
+        <p:nvSpPr>
+          <p:cNvPr id="4" name="TextBox 3"/>
           <p:cNvSpPr txBox="1"/>
           <p:nvPr/>
         </p:nvSpPr>
         <p:spPr>
           <a:xfrm>
-            <a:off x="0" y="0"/>
-            <a:ext cx="18288000" cy="10287000"/>
+            <a:off x="1284732" y="2390241"/>
+            <a:ext cx="4209897" cy="638251"/>
           </a:xfrm>
           <a:prstGeom prst="rect">
             <a:avLst/>
@@ -18085,38 +18235,38 @@
           <a:noFill/>
         </p:spPr>
         <p:txBody>
-          <a:bodyPr wrap="square" lIns="0" rIns="0" tIns="73152" bIns="73152" anchor="ctr">
-            <a:noAutofit/>
-          </a:bodyPr>
-          <a:lstStyle/>
-          <a:p>
-            <a:pPr algn="ctr">
-              <a:lnSpc>
-                <a:spcPct val="70000"/>
-              </a:lnSpc>
-            </a:pPr>
-            <a:r>
-              <a:rPr sz="7500" b="1" i="0">
-                <a:solidFill>
-                  <a:srgbClr val="FFFFFF"/>
-                </a:solidFill>
-                <a:latin typeface="Poppins"/>
-              </a:rPr>
-              <a:t>WE ARE CALLED TO ACT WITH JUSTICE...</a:t>
-            </a:r>
-          </a:p>
-        </p:txBody>
-      </p:sp>
-      <p:sp>
-        <p:nvSpPr>
-          <p:cNvPr id="3" name="TextBox 2"/>
+          <a:bodyPr wrap="square" lIns="109728" rIns="109728" tIns="73152" bIns="73152" anchor="ctr">
+            <a:noAutofit/>
+          </a:bodyPr>
+          <a:lstStyle/>
+          <a:p>
+            <a:pPr algn="ctr">
+              <a:lnSpc>
+                <a:spcPct val="108000"/>
+              </a:lnSpc>
+              <a:defRPr sz="3700" b="1" i="0" u="none">
+                <a:solidFill>
+                  <a:srgbClr val="E8D4FE"/>
+                </a:solidFill>
+                <a:latin typeface="Calibri"/>
+              </a:defRPr>
+            </a:pPr>
+            <a:r>
+              <a:t>MASS CELEBRANT:</a:t>
+            </a:r>
+          </a:p>
+        </p:txBody>
+      </p:sp>
+      <p:sp>
+        <p:nvSpPr>
+          <p:cNvPr id="5" name="TextBox 4"/>
           <p:cNvSpPr txBox="1"/>
           <p:nvPr/>
         </p:nvSpPr>
         <p:spPr>
           <a:xfrm>
-            <a:off x="914400" y="9418320"/>
-            <a:ext cx="16459200" cy="777240"/>
+            <a:off x="267004" y="3053181"/>
+            <a:ext cx="6589166" cy="1057046"/>
           </a:xfrm>
           <a:prstGeom prst="rect">
             <a:avLst/>
@@ -18124,65 +18274,38 @@
           <a:noFill/>
         </p:spPr>
         <p:txBody>
-          <a:bodyPr wrap="square" lIns="109728" rIns="109728" tIns="73152" bIns="73152">
-            <a:noAutofit/>
-          </a:bodyPr>
-          <a:lstStyle/>
-          <a:p/>
-          <a:p>
-            <a:pPr>
-              <a:spcBef>
-                <a:spcPts val="200"/>
-              </a:spcBef>
-              <a:defRPr sz="1200" b="0" i="0" u="none">
-                <a:solidFill>
-                  <a:srgbClr val="FFCC4D"/>
-                </a:solidFill>
-                <a:latin typeface="Georgia"/>
-              </a:defRPr>
-            </a:pPr>
-            <a:r>
-              <a:t>Recessional</a:t>
-            </a:r>
-          </a:p>
-        </p:txBody>
-      </p:sp>
-    </p:spTree>
-  </p:cSld>
-  <p:clrMapOvr>
-    <a:masterClrMapping/>
-  </p:clrMapOvr>
-</p:sld>
-</file>
-
-<file path=ppt/slides/slide79.xml><?xml version="1.0" encoding="utf-8"?>
-<p:sld xmlns:a="http://schemas.openxmlformats.org/drawingml/2006/main" xmlns:p="http://schemas.openxmlformats.org/presentationml/2006/main" xmlns:r="http://schemas.openxmlformats.org/officeDocument/2006/relationships">
-  <p:cSld>
-    <p:bg>
-      <p:bgPr>
-        <a:solidFill>
-          <a:srgbClr val="000000"/>
-        </a:solidFill>
-        <a:effectLst/>
-      </p:bgPr>
-    </p:bg>
-    <p:spTree>
-      <p:nvGrpSpPr>
-        <p:cNvPr id="1" name=""/>
-        <p:cNvGrpSpPr/>
-        <p:nvPr/>
-      </p:nvGrpSpPr>
-      <p:grpSpPr/>
-      <p:sp>
-        <p:nvSpPr>
-          <p:cNvPr id="2" name="TextBox 1"/>
+          <a:bodyPr wrap="square" lIns="109728" rIns="109728" tIns="73152" bIns="73152" anchor="ctr">
+            <a:noAutofit/>
+          </a:bodyPr>
+          <a:lstStyle/>
+          <a:p>
+            <a:pPr algn="ctr">
+              <a:lnSpc>
+                <a:spcPct val="108000"/>
+              </a:lnSpc>
+              <a:defRPr sz="3600" b="1" i="0" u="none">
+                <a:solidFill>
+                  <a:srgbClr val="FFFFFF"/>
+                </a:solidFill>
+                <a:latin typeface="Calibri"/>
+              </a:defRPr>
+            </a:pPr>
+            <a:r>
+              <a:t>Rev. Fr. Jonrey Lauron, RCJ</a:t>
+            </a:r>
+          </a:p>
+        </p:txBody>
+      </p:sp>
+      <p:sp>
+        <p:nvSpPr>
+          <p:cNvPr id="6" name="TextBox 5"/>
           <p:cNvSpPr txBox="1"/>
           <p:nvPr/>
         </p:nvSpPr>
         <p:spPr>
           <a:xfrm>
-            <a:off x="0" y="0"/>
-            <a:ext cx="18288000" cy="10287000"/>
+            <a:off x="267004" y="4429353"/>
+            <a:ext cx="6589166" cy="868680"/>
           </a:xfrm>
           <a:prstGeom prst="rect">
             <a:avLst/>
@@ -18190,38 +18313,38 @@
           <a:noFill/>
         </p:spPr>
         <p:txBody>
-          <a:bodyPr wrap="square" lIns="0" rIns="0" tIns="73152" bIns="73152" anchor="ctr">
-            <a:noAutofit/>
-          </a:bodyPr>
-          <a:lstStyle/>
-          <a:p>
-            <a:pPr algn="ctr">
-              <a:lnSpc>
-                <a:spcPct val="70000"/>
-              </a:lnSpc>
-            </a:pPr>
-            <a:r>
-              <a:rPr sz="7500" b="1" i="0">
-                <a:solidFill>
-                  <a:srgbClr val="FFFFFF"/>
-                </a:solidFill>
-                <a:latin typeface="Poppins"/>
-              </a:rPr>
-              <a:t>COME! LIVE IN THE LIGHT!...</a:t>
-            </a:r>
-          </a:p>
-        </p:txBody>
-      </p:sp>
-      <p:sp>
-        <p:nvSpPr>
-          <p:cNvPr id="3" name="TextBox 2"/>
+          <a:bodyPr wrap="square" lIns="109728" rIns="109728" tIns="73152" bIns="73152" anchor="ctr">
+            <a:noAutofit/>
+          </a:bodyPr>
+          <a:lstStyle/>
+          <a:p>
+            <a:pPr algn="ctr">
+              <a:lnSpc>
+                <a:spcPct val="108000"/>
+              </a:lnSpc>
+              <a:defRPr sz="4700" b="1" i="1" u="none">
+                <a:solidFill>
+                  <a:srgbClr val="FFFFFF"/>
+                </a:solidFill>
+                <a:latin typeface="Calibri"/>
+              </a:defRPr>
+            </a:pPr>
+            <a:r>
+              <a:t>YEAR A · 21 JUNE 2026</a:t>
+            </a:r>
+          </a:p>
+        </p:txBody>
+      </p:sp>
+      <p:sp>
+        <p:nvSpPr>
+          <p:cNvPr id="7" name="TextBox 6"/>
           <p:cNvSpPr txBox="1"/>
           <p:nvPr/>
         </p:nvSpPr>
         <p:spPr>
           <a:xfrm>
-            <a:off x="914400" y="9418320"/>
-            <a:ext cx="16459200" cy="777240"/>
+            <a:off x="6900062" y="2390241"/>
+            <a:ext cx="10775289" cy="2422245"/>
           </a:xfrm>
           <a:prstGeom prst="rect">
             <a:avLst/>
@@ -18229,25 +18352,102 @@
           <a:noFill/>
         </p:spPr>
         <p:txBody>
-          <a:bodyPr wrap="square" lIns="109728" rIns="109728" tIns="73152" bIns="73152">
-            <a:noAutofit/>
-          </a:bodyPr>
-          <a:lstStyle/>
-          <a:p/>
-          <a:p>
-            <a:pPr>
-              <a:spcBef>
-                <a:spcPts val="200"/>
-              </a:spcBef>
-              <a:defRPr sz="1200" b="0" i="0" u="none">
-                <a:solidFill>
-                  <a:srgbClr val="FFCC4D"/>
-                </a:solidFill>
-                <a:latin typeface="Georgia"/>
-              </a:defRPr>
-            </a:pPr>
-            <a:r>
-              <a:t>Recessional</a:t>
+          <a:bodyPr wrap="square" lIns="109728" rIns="109728" tIns="73152" bIns="73152" anchor="ctr">
+            <a:noAutofit/>
+          </a:bodyPr>
+          <a:lstStyle/>
+          <a:p>
+            <a:pPr algn="ctr">
+              <a:lnSpc>
+                <a:spcPct val="108000"/>
+              </a:lnSpc>
+              <a:defRPr sz="3900" b="0" i="0" u="none">
+                <a:solidFill>
+                  <a:srgbClr val="FEF5E4"/>
+                </a:solidFill>
+                <a:latin typeface="Calibri"/>
+              </a:defRPr>
+            </a:pPr>
+            <a:r>
+              <a:t>“Fear no one.”</a:t>
+            </a:r>
+          </a:p>
+        </p:txBody>
+      </p:sp>
+      <p:sp>
+        <p:nvSpPr>
+          <p:cNvPr id="8" name="TextBox 7"/>
+          <p:cNvSpPr txBox="1"/>
+          <p:nvPr/>
+        </p:nvSpPr>
+        <p:spPr>
+          <a:xfrm>
+            <a:off x="9378086" y="5801868"/>
+            <a:ext cx="5819241" cy="705002"/>
+          </a:xfrm>
+          <a:prstGeom prst="rect">
+            <a:avLst/>
+          </a:prstGeom>
+          <a:noFill/>
+        </p:spPr>
+        <p:txBody>
+          <a:bodyPr wrap="square" lIns="109728" rIns="109728" tIns="73152" bIns="73152" anchor="ctr">
+            <a:noAutofit/>
+          </a:bodyPr>
+          <a:lstStyle/>
+          <a:p>
+            <a:pPr algn="ctr">
+              <a:lnSpc>
+                <a:spcPct val="108000"/>
+              </a:lnSpc>
+              <a:defRPr sz="3500" b="1" i="0" u="none">
+                <a:solidFill>
+                  <a:srgbClr val="DDBDFE"/>
+                </a:solidFill>
+                <a:latin typeface="Calibri"/>
+              </a:defRPr>
+            </a:pPr>
+            <a:r>
+              <a:t>GOSPEL (MATTHEW 10:26–33)</a:t>
+            </a:r>
+          </a:p>
+        </p:txBody>
+      </p:sp>
+      <p:sp>
+        <p:nvSpPr>
+          <p:cNvPr id="9" name="TextBox 8"/>
+          <p:cNvSpPr txBox="1"/>
+          <p:nvPr/>
+        </p:nvSpPr>
+        <p:spPr>
+          <a:xfrm>
+            <a:off x="3195828" y="8411565"/>
+            <a:ext cx="12362688" cy="1162202"/>
+          </a:xfrm>
+          <a:prstGeom prst="rect">
+            <a:avLst/>
+          </a:prstGeom>
+          <a:noFill/>
+        </p:spPr>
+        <p:txBody>
+          <a:bodyPr wrap="square" lIns="109728" rIns="109728" tIns="73152" bIns="73152" anchor="ctr">
+            <a:noAutofit/>
+          </a:bodyPr>
+          <a:lstStyle/>
+          <a:p>
+            <a:pPr algn="ctr">
+              <a:lnSpc>
+                <a:spcPct val="108000"/>
+              </a:lnSpc>
+              <a:defRPr sz="6600" b="1" i="0" u="none">
+                <a:solidFill>
+                  <a:srgbClr val="FFFFFF"/>
+                </a:solidFill>
+                <a:latin typeface="Calibri"/>
+              </a:defRPr>
+            </a:pPr>
+            <a:r>
+              <a:t>12th Sunday in Ordinary Time</a:t>
             </a:r>
           </a:p>
         </p:txBody>
@@ -18453,7 +18653,7 @@
               <a:lnSpc>
                 <a:spcPct val="108000"/>
               </a:lnSpc>
-              <a:defRPr sz="3400" b="1" i="0" u="none">
+              <a:defRPr sz="3600" b="1" i="0" u="none">
                 <a:solidFill>
                   <a:srgbClr val="FFFFFF"/>
                 </a:solidFill>
@@ -18461,740 +18661,7 @@
               </a:defRPr>
             </a:pPr>
             <a:r>
-              <a:t>Rev. Fr. Jonrey Lauron, RCJ · Divino Gabriel</a:t>
-            </a:r>
-          </a:p>
-        </p:txBody>
-      </p:sp>
-      <p:sp>
-        <p:nvSpPr>
-          <p:cNvPr id="6" name="TextBox 5"/>
-          <p:cNvSpPr txBox="1"/>
-          <p:nvPr/>
-        </p:nvSpPr>
-        <p:spPr>
-          <a:xfrm>
-            <a:off x="267004" y="4429353"/>
-            <a:ext cx="6589166" cy="868680"/>
-          </a:xfrm>
-          <a:prstGeom prst="rect">
-            <a:avLst/>
-          </a:prstGeom>
-          <a:noFill/>
-        </p:spPr>
-        <p:txBody>
-          <a:bodyPr wrap="square" lIns="109728" rIns="109728" tIns="73152" bIns="73152" anchor="ctr">
-            <a:noAutofit/>
-          </a:bodyPr>
-          <a:lstStyle/>
-          <a:p>
-            <a:pPr algn="ctr">
-              <a:lnSpc>
-                <a:spcPct val="108000"/>
-              </a:lnSpc>
-              <a:defRPr sz="4700" b="1" i="1" u="none">
-                <a:solidFill>
-                  <a:srgbClr val="FFFFFF"/>
-                </a:solidFill>
-                <a:latin typeface="Calibri"/>
-              </a:defRPr>
-            </a:pPr>
-            <a:r>
-              <a:t>YEAR A · 21 JUNE 2026</a:t>
-            </a:r>
-          </a:p>
-        </p:txBody>
-      </p:sp>
-      <p:sp>
-        <p:nvSpPr>
-          <p:cNvPr id="7" name="TextBox 6"/>
-          <p:cNvSpPr txBox="1"/>
-          <p:nvPr/>
-        </p:nvSpPr>
-        <p:spPr>
-          <a:xfrm>
-            <a:off x="6900062" y="2390241"/>
-            <a:ext cx="10775289" cy="2422245"/>
-          </a:xfrm>
-          <a:prstGeom prst="rect">
-            <a:avLst/>
-          </a:prstGeom>
-          <a:noFill/>
-        </p:spPr>
-        <p:txBody>
-          <a:bodyPr wrap="square" lIns="109728" rIns="109728" tIns="73152" bIns="73152" anchor="ctr">
-            <a:noAutofit/>
-          </a:bodyPr>
-          <a:lstStyle/>
-          <a:p>
-            <a:pPr algn="ctr">
-              <a:lnSpc>
-                <a:spcPct val="108000"/>
-              </a:lnSpc>
-              <a:defRPr sz="3900" b="0" i="0" u="none">
-                <a:solidFill>
-                  <a:srgbClr val="FEF5E4"/>
-                </a:solidFill>
-                <a:latin typeface="Calibri"/>
-              </a:defRPr>
-            </a:pPr>
-            <a:r>
-              <a:t>“Fear no one.”</a:t>
-            </a:r>
-          </a:p>
-        </p:txBody>
-      </p:sp>
-      <p:sp>
-        <p:nvSpPr>
-          <p:cNvPr id="8" name="TextBox 7"/>
-          <p:cNvSpPr txBox="1"/>
-          <p:nvPr/>
-        </p:nvSpPr>
-        <p:spPr>
-          <a:xfrm>
-            <a:off x="9378086" y="5801868"/>
-            <a:ext cx="5819241" cy="705002"/>
-          </a:xfrm>
-          <a:prstGeom prst="rect">
-            <a:avLst/>
-          </a:prstGeom>
-          <a:noFill/>
-        </p:spPr>
-        <p:txBody>
-          <a:bodyPr wrap="square" lIns="109728" rIns="109728" tIns="73152" bIns="73152" anchor="ctr">
-            <a:noAutofit/>
-          </a:bodyPr>
-          <a:lstStyle/>
-          <a:p>
-            <a:pPr algn="ctr">
-              <a:lnSpc>
-                <a:spcPct val="108000"/>
-              </a:lnSpc>
-              <a:defRPr sz="3500" b="1" i="0" u="none">
-                <a:solidFill>
-                  <a:srgbClr val="DDBDFE"/>
-                </a:solidFill>
-                <a:latin typeface="Calibri"/>
-              </a:defRPr>
-            </a:pPr>
-            <a:r>
-              <a:t>GOSPEL (MATTHEW 10:26–33)</a:t>
-            </a:r>
-          </a:p>
-        </p:txBody>
-      </p:sp>
-      <p:sp>
-        <p:nvSpPr>
-          <p:cNvPr id="9" name="TextBox 8"/>
-          <p:cNvSpPr txBox="1"/>
-          <p:nvPr/>
-        </p:nvSpPr>
-        <p:spPr>
-          <a:xfrm>
-            <a:off x="3195828" y="8411565"/>
-            <a:ext cx="12362688" cy="1162202"/>
-          </a:xfrm>
-          <a:prstGeom prst="rect">
-            <a:avLst/>
-          </a:prstGeom>
-          <a:noFill/>
-        </p:spPr>
-        <p:txBody>
-          <a:bodyPr wrap="square" lIns="109728" rIns="109728" tIns="73152" bIns="73152" anchor="ctr">
-            <a:noAutofit/>
-          </a:bodyPr>
-          <a:lstStyle/>
-          <a:p>
-            <a:pPr algn="ctr">
-              <a:lnSpc>
-                <a:spcPct val="108000"/>
-              </a:lnSpc>
-              <a:defRPr sz="6600" b="1" i="0" u="none">
-                <a:solidFill>
-                  <a:srgbClr val="FFFFFF"/>
-                </a:solidFill>
-                <a:latin typeface="Calibri"/>
-              </a:defRPr>
-            </a:pPr>
-            <a:r>
-              <a:t>12th Sunday in Ordinary Time</a:t>
-            </a:r>
-          </a:p>
-        </p:txBody>
-      </p:sp>
-    </p:spTree>
-  </p:cSld>
-  <p:clrMapOvr>
-    <a:masterClrMapping/>
-  </p:clrMapOvr>
-</p:sld>
-</file>
-
-<file path=ppt/slides/slide80.xml><?xml version="1.0" encoding="utf-8"?>
-<p:sld xmlns:a="http://schemas.openxmlformats.org/drawingml/2006/main" xmlns:p="http://schemas.openxmlformats.org/presentationml/2006/main" xmlns:r="http://schemas.openxmlformats.org/officeDocument/2006/relationships">
-  <p:cSld>
-    <p:bg>
-      <p:bgPr>
-        <a:solidFill>
-          <a:srgbClr val="000000"/>
-        </a:solidFill>
-        <a:effectLst/>
-      </p:bgPr>
-    </p:bg>
-    <p:spTree>
-      <p:nvGrpSpPr>
-        <p:cNvPr id="1" name=""/>
-        <p:cNvGrpSpPr/>
-        <p:nvPr/>
-      </p:nvGrpSpPr>
-      <p:grpSpPr/>
-      <p:sp>
-        <p:nvSpPr>
-          <p:cNvPr id="2" name="TextBox 1"/>
-          <p:cNvSpPr txBox="1"/>
-          <p:nvPr/>
-        </p:nvSpPr>
-        <p:spPr>
-          <a:xfrm>
-            <a:off x="0" y="0"/>
-            <a:ext cx="18288000" cy="10287000"/>
-          </a:xfrm>
-          <a:prstGeom prst="rect">
-            <a:avLst/>
-          </a:prstGeom>
-          <a:noFill/>
-        </p:spPr>
-        <p:txBody>
-          <a:bodyPr wrap="square" lIns="0" rIns="0" tIns="73152" bIns="73152" anchor="ctr">
-            <a:noAutofit/>
-          </a:bodyPr>
-          <a:lstStyle/>
-          <a:p>
-            <a:pPr algn="ctr">
-              <a:lnSpc>
-                <a:spcPct val="70000"/>
-              </a:lnSpc>
-            </a:pPr>
-            <a:r>
-              <a:rPr sz="7400" b="1" i="0">
-                <a:solidFill>
-                  <a:srgbClr val="FFFFFF"/>
-                </a:solidFill>
-                <a:latin typeface="Poppins"/>
-              </a:rPr>
-              <a:t>GOD OF NEWNESS, GOD OF FRESHNESS,</a:t>
-            </a:r>
-          </a:p>
-          <a:p>
-            <a:pPr algn="ctr">
-              <a:lnSpc>
-                <a:spcPct val="70000"/>
-              </a:lnSpc>
-            </a:pPr>
-            <a:r>
-              <a:rPr sz="7400" b="1" i="0">
-                <a:solidFill>
-                  <a:srgbClr val="FFFFFF"/>
-                </a:solidFill>
-                <a:latin typeface="Poppins"/>
-              </a:rPr>
-              <a:t>COME INTO OUR MORNING SONG:</a:t>
-            </a:r>
-          </a:p>
-          <a:p>
-            <a:pPr algn="ctr">
-              <a:lnSpc>
-                <a:spcPct val="70000"/>
-              </a:lnSpc>
-            </a:pPr>
-            <a:r>
-              <a:rPr sz="7400" b="1" i="0">
-                <a:solidFill>
-                  <a:srgbClr val="FFFFFF"/>
-                </a:solidFill>
-                <a:latin typeface="Poppins"/>
-              </a:rPr>
-              <a:t>GIVE TO US A NEW BEGINNING,</a:t>
-            </a:r>
-          </a:p>
-          <a:p>
-            <a:pPr algn="ctr">
-              <a:lnSpc>
-                <a:spcPct val="70000"/>
-              </a:lnSpc>
-            </a:pPr>
-            <a:r>
-              <a:rPr sz="7400" b="1" i="0">
-                <a:solidFill>
-                  <a:srgbClr val="FFFFFF"/>
-                </a:solidFill>
-                <a:latin typeface="Poppins"/>
-              </a:rPr>
-              <a:t>SEND US FORTH WITH HEARTS MADE STRONG.</a:t>
-            </a:r>
-          </a:p>
-        </p:txBody>
-      </p:sp>
-      <p:sp>
-        <p:nvSpPr>
-          <p:cNvPr id="3" name="TextBox 2"/>
-          <p:cNvSpPr txBox="1"/>
-          <p:nvPr/>
-        </p:nvSpPr>
-        <p:spPr>
-          <a:xfrm>
-            <a:off x="914400" y="9418320"/>
-            <a:ext cx="16459200" cy="777240"/>
-          </a:xfrm>
-          <a:prstGeom prst="rect">
-            <a:avLst/>
-          </a:prstGeom>
-          <a:noFill/>
-        </p:spPr>
-        <p:txBody>
-          <a:bodyPr wrap="square" lIns="109728" rIns="109728" tIns="73152" bIns="73152">
-            <a:noAutofit/>
-          </a:bodyPr>
-          <a:lstStyle/>
-          <a:p/>
-          <a:p>
-            <a:pPr>
-              <a:spcBef>
-                <a:spcPts val="200"/>
-              </a:spcBef>
-              <a:defRPr sz="1200" b="0" i="0" u="none">
-                <a:solidFill>
-                  <a:srgbClr val="FFCC4D"/>
-                </a:solidFill>
-                <a:latin typeface="Georgia"/>
-              </a:defRPr>
-            </a:pPr>
-            <a:r>
-              <a:t>Recessional</a:t>
-            </a:r>
-          </a:p>
-        </p:txBody>
-      </p:sp>
-    </p:spTree>
-  </p:cSld>
-  <p:clrMapOvr>
-    <a:masterClrMapping/>
-  </p:clrMapOvr>
-</p:sld>
-</file>
-
-<file path=ppt/slides/slide81.xml><?xml version="1.0" encoding="utf-8"?>
-<p:sld xmlns:a="http://schemas.openxmlformats.org/drawingml/2006/main" xmlns:p="http://schemas.openxmlformats.org/presentationml/2006/main" xmlns:r="http://schemas.openxmlformats.org/officeDocument/2006/relationships">
-  <p:cSld>
-    <p:bg>
-      <p:bgPr>
-        <a:solidFill>
-          <a:srgbClr val="000000"/>
-        </a:solidFill>
-        <a:effectLst/>
-      </p:bgPr>
-    </p:bg>
-    <p:spTree>
-      <p:nvGrpSpPr>
-        <p:cNvPr id="1" name=""/>
-        <p:cNvGrpSpPr/>
-        <p:nvPr/>
-      </p:nvGrpSpPr>
-      <p:grpSpPr/>
-      <p:sp>
-        <p:nvSpPr>
-          <p:cNvPr id="2" name="TextBox 1"/>
-          <p:cNvSpPr txBox="1"/>
-          <p:nvPr/>
-        </p:nvSpPr>
-        <p:spPr>
-          <a:xfrm>
-            <a:off x="0" y="0"/>
-            <a:ext cx="18288000" cy="10287000"/>
-          </a:xfrm>
-          <a:prstGeom prst="rect">
-            <a:avLst/>
-          </a:prstGeom>
-          <a:noFill/>
-        </p:spPr>
-        <p:txBody>
-          <a:bodyPr wrap="square" lIns="0" rIns="0" tIns="73152" bIns="73152" anchor="ctr">
-            <a:noAutofit/>
-          </a:bodyPr>
-          <a:lstStyle/>
-          <a:p>
-            <a:pPr algn="ctr">
-              <a:lnSpc>
-                <a:spcPct val="70000"/>
-              </a:lnSpc>
-            </a:pPr>
-            <a:r>
-              <a:rPr sz="7500" b="1" i="0">
-                <a:solidFill>
-                  <a:srgbClr val="FFFFFF"/>
-                </a:solidFill>
-                <a:latin typeface="Poppins"/>
-              </a:rPr>
-              <a:t>WE ARE CALLED TO ACT WITH JUSTICE...</a:t>
-            </a:r>
-          </a:p>
-        </p:txBody>
-      </p:sp>
-      <p:sp>
-        <p:nvSpPr>
-          <p:cNvPr id="3" name="TextBox 2"/>
-          <p:cNvSpPr txBox="1"/>
-          <p:nvPr/>
-        </p:nvSpPr>
-        <p:spPr>
-          <a:xfrm>
-            <a:off x="914400" y="9418320"/>
-            <a:ext cx="16459200" cy="777240"/>
-          </a:xfrm>
-          <a:prstGeom prst="rect">
-            <a:avLst/>
-          </a:prstGeom>
-          <a:noFill/>
-        </p:spPr>
-        <p:txBody>
-          <a:bodyPr wrap="square" lIns="109728" rIns="109728" tIns="73152" bIns="73152">
-            <a:noAutofit/>
-          </a:bodyPr>
-          <a:lstStyle/>
-          <a:p/>
-          <a:p>
-            <a:pPr>
-              <a:spcBef>
-                <a:spcPts val="200"/>
-              </a:spcBef>
-              <a:defRPr sz="1200" b="0" i="0" u="none">
-                <a:solidFill>
-                  <a:srgbClr val="FFCC4D"/>
-                </a:solidFill>
-                <a:latin typeface="Georgia"/>
-              </a:defRPr>
-            </a:pPr>
-            <a:r>
-              <a:t>Recessional</a:t>
-            </a:r>
-          </a:p>
-        </p:txBody>
-      </p:sp>
-    </p:spTree>
-  </p:cSld>
-  <p:clrMapOvr>
-    <a:masterClrMapping/>
-  </p:clrMapOvr>
-</p:sld>
-</file>
-
-<file path=ppt/slides/slide82.xml><?xml version="1.0" encoding="utf-8"?>
-<p:sld xmlns:a="http://schemas.openxmlformats.org/drawingml/2006/main" xmlns:p="http://schemas.openxmlformats.org/presentationml/2006/main" xmlns:r="http://schemas.openxmlformats.org/officeDocument/2006/relationships">
-  <p:cSld>
-    <p:bg>
-      <p:bgPr>
-        <a:solidFill>
-          <a:srgbClr val="000000"/>
-        </a:solidFill>
-        <a:effectLst/>
-      </p:bgPr>
-    </p:bg>
-    <p:spTree>
-      <p:nvGrpSpPr>
-        <p:cNvPr id="1" name=""/>
-        <p:cNvGrpSpPr/>
-        <p:nvPr/>
-      </p:nvGrpSpPr>
-      <p:grpSpPr/>
-      <p:sp>
-        <p:nvSpPr>
-          <p:cNvPr id="2" name="TextBox 1"/>
-          <p:cNvSpPr txBox="1"/>
-          <p:nvPr/>
-        </p:nvSpPr>
-        <p:spPr>
-          <a:xfrm>
-            <a:off x="0" y="0"/>
-            <a:ext cx="18288000" cy="10287000"/>
-          </a:xfrm>
-          <a:prstGeom prst="rect">
-            <a:avLst/>
-          </a:prstGeom>
-          <a:noFill/>
-        </p:spPr>
-        <p:txBody>
-          <a:bodyPr wrap="square" lIns="0" rIns="0" tIns="73152" bIns="73152" anchor="ctr">
-            <a:noAutofit/>
-          </a:bodyPr>
-          <a:lstStyle/>
-          <a:p>
-            <a:pPr algn="ctr">
-              <a:lnSpc>
-                <a:spcPct val="70000"/>
-              </a:lnSpc>
-            </a:pPr>
-            <a:r>
-              <a:rPr sz="7500" b="1" i="0">
-                <a:solidFill>
-                  <a:srgbClr val="FFFFFF"/>
-                </a:solidFill>
-                <a:latin typeface="Poppins"/>
-              </a:rPr>
-              <a:t>COME! LIVE IN THE LIGHT!...</a:t>
-            </a:r>
-          </a:p>
-        </p:txBody>
-      </p:sp>
-      <p:sp>
-        <p:nvSpPr>
-          <p:cNvPr id="3" name="TextBox 2"/>
-          <p:cNvSpPr txBox="1"/>
-          <p:nvPr/>
-        </p:nvSpPr>
-        <p:spPr>
-          <a:xfrm>
-            <a:off x="914400" y="9418320"/>
-            <a:ext cx="16459200" cy="777240"/>
-          </a:xfrm>
-          <a:prstGeom prst="rect">
-            <a:avLst/>
-          </a:prstGeom>
-          <a:noFill/>
-        </p:spPr>
-        <p:txBody>
-          <a:bodyPr wrap="square" lIns="109728" rIns="109728" tIns="73152" bIns="73152">
-            <a:noAutofit/>
-          </a:bodyPr>
-          <a:lstStyle/>
-          <a:p/>
-          <a:p>
-            <a:pPr>
-              <a:spcBef>
-                <a:spcPts val="200"/>
-              </a:spcBef>
-              <a:defRPr sz="1200" b="0" i="0" u="none">
-                <a:solidFill>
-                  <a:srgbClr val="FFCC4D"/>
-                </a:solidFill>
-                <a:latin typeface="Georgia"/>
-              </a:defRPr>
-            </a:pPr>
-            <a:r>
-              <a:t>Recessional</a:t>
-            </a:r>
-          </a:p>
-        </p:txBody>
-      </p:sp>
-    </p:spTree>
-  </p:cSld>
-  <p:clrMapOvr>
-    <a:masterClrMapping/>
-  </p:clrMapOvr>
-</p:sld>
-</file>
-
-<file path=ppt/slides/slide83.xml><?xml version="1.0" encoding="utf-8"?>
-<p:sld xmlns:a="http://schemas.openxmlformats.org/drawingml/2006/main" xmlns:p="http://schemas.openxmlformats.org/presentationml/2006/main" xmlns:r="http://schemas.openxmlformats.org/officeDocument/2006/relationships">
-  <p:cSld>
-    <p:bg>
-      <p:bgPr>
-        <a:gradFill rotWithShape="1">
-          <a:gsLst>
-            <a:gs pos="0">
-              <a:srgbClr val="0C0B11"/>
-            </a:gs>
-            <a:gs pos="100000">
-              <a:srgbClr val="5F586C"/>
-            </a:gs>
-          </a:gsLst>
-          <a:lin scaled="0" ang="0"/>
-        </a:gradFill>
-        <a:effectLst/>
-      </p:bgPr>
-    </p:bg>
-    <p:spTree>
-      <p:nvGrpSpPr>
-        <p:cNvPr id="1" name=""/>
-        <p:cNvGrpSpPr/>
-        <p:nvPr/>
-      </p:nvGrpSpPr>
-      <p:grpSpPr/>
-      <p:sp>
-        <p:nvSpPr>
-          <p:cNvPr id="2" name="Rounded Rectangle 1"/>
-          <p:cNvSpPr/>
-          <p:nvPr/>
-        </p:nvSpPr>
-        <p:spPr>
-          <a:xfrm>
-            <a:off x="6856171" y="1269187"/>
-            <a:ext cx="10943539" cy="6128308"/>
-          </a:xfrm>
-          <a:prstGeom prst="roundRect">
-            <a:avLst>
-              <a:gd name="adj" fmla="val 16670"/>
-            </a:avLst>
-          </a:prstGeom>
-          <a:solidFill>
-            <a:srgbClr val="211733">
-              <a:alpha val="44706"/>
-            </a:srgbClr>
-          </a:solidFill>
-          <a:ln w="14299" cap="sq">
-            <a:solidFill>
-              <a:srgbClr val="6C6678">
-                <a:alpha val="44706"/>
-              </a:srgbClr>
-            </a:solidFill>
-          </a:ln>
-        </p:spPr>
-        <p:style>
-          <a:lnRef idx="1">
-            <a:schemeClr val="accent1"/>
-          </a:lnRef>
-          <a:fillRef idx="3">
-            <a:schemeClr val="accent1"/>
-          </a:fillRef>
-          <a:effectRef idx="2">
-            <a:schemeClr val="accent1"/>
-          </a:effectRef>
-          <a:fontRef idx="minor">
-            <a:schemeClr val="lt1"/>
-          </a:fontRef>
-        </p:style>
-        <p:txBody>
-          <a:bodyPr rtlCol="0" anchor="ctr"/>
-          <a:lstStyle/>
-          <a:p>
-            <a:pPr algn="ctr"/>
-          </a:p>
-        </p:txBody>
-      </p:sp>
-      <p:sp>
-        <p:nvSpPr>
-          <p:cNvPr id="3" name="Rounded Rectangle 2"/>
-          <p:cNvSpPr/>
-          <p:nvPr/>
-        </p:nvSpPr>
-        <p:spPr>
-          <a:xfrm>
-            <a:off x="900684" y="8503005"/>
-            <a:ext cx="16486632" cy="1112824"/>
-          </a:xfrm>
-          <a:prstGeom prst="roundRect">
-            <a:avLst>
-              <a:gd name="adj" fmla="val 16670"/>
-            </a:avLst>
-          </a:prstGeom>
-          <a:solidFill>
-            <a:srgbClr val="161122">
-              <a:alpha val="60784"/>
-            </a:srgbClr>
-          </a:solidFill>
-          <a:ln w="14299" cap="sq">
-            <a:solidFill>
-              <a:srgbClr val="161122">
-                <a:alpha val="60784"/>
-              </a:srgbClr>
-            </a:solidFill>
-          </a:ln>
-        </p:spPr>
-        <p:style>
-          <a:lnRef idx="1">
-            <a:schemeClr val="accent1"/>
-          </a:lnRef>
-          <a:fillRef idx="3">
-            <a:schemeClr val="accent1"/>
-          </a:fillRef>
-          <a:effectRef idx="2">
-            <a:schemeClr val="accent1"/>
-          </a:effectRef>
-          <a:fontRef idx="minor">
-            <a:schemeClr val="lt1"/>
-          </a:fontRef>
-        </p:style>
-        <p:txBody>
-          <a:bodyPr rtlCol="0" anchor="ctr"/>
-          <a:lstStyle/>
-          <a:p>
-            <a:pPr algn="ctr"/>
-          </a:p>
-        </p:txBody>
-      </p:sp>
-      <p:sp>
-        <p:nvSpPr>
-          <p:cNvPr id="4" name="TextBox 3"/>
-          <p:cNvSpPr txBox="1"/>
-          <p:nvPr/>
-        </p:nvSpPr>
-        <p:spPr>
-          <a:xfrm>
-            <a:off x="1284732" y="2390241"/>
-            <a:ext cx="4209897" cy="638251"/>
-          </a:xfrm>
-          <a:prstGeom prst="rect">
-            <a:avLst/>
-          </a:prstGeom>
-          <a:noFill/>
-        </p:spPr>
-        <p:txBody>
-          <a:bodyPr wrap="square" lIns="109728" rIns="109728" tIns="73152" bIns="73152" anchor="ctr">
-            <a:noAutofit/>
-          </a:bodyPr>
-          <a:lstStyle/>
-          <a:p>
-            <a:pPr algn="ctr">
-              <a:lnSpc>
-                <a:spcPct val="108000"/>
-              </a:lnSpc>
-              <a:defRPr sz="3700" b="1" i="0" u="none">
-                <a:solidFill>
-                  <a:srgbClr val="E8D4FE"/>
-                </a:solidFill>
-                <a:latin typeface="Calibri"/>
-              </a:defRPr>
-            </a:pPr>
-            <a:r>
-              <a:t>MASS CELEBRANT:</a:t>
-            </a:r>
-          </a:p>
-        </p:txBody>
-      </p:sp>
-      <p:sp>
-        <p:nvSpPr>
-          <p:cNvPr id="5" name="TextBox 4"/>
-          <p:cNvSpPr txBox="1"/>
-          <p:nvPr/>
-        </p:nvSpPr>
-        <p:spPr>
-          <a:xfrm>
-            <a:off x="267004" y="3053181"/>
-            <a:ext cx="6589166" cy="1057046"/>
-          </a:xfrm>
-          <a:prstGeom prst="rect">
-            <a:avLst/>
-          </a:prstGeom>
-          <a:noFill/>
-        </p:spPr>
-        <p:txBody>
-          <a:bodyPr wrap="square" lIns="109728" rIns="109728" tIns="73152" bIns="73152" anchor="ctr">
-            <a:noAutofit/>
-          </a:bodyPr>
-          <a:lstStyle/>
-          <a:p>
-            <a:pPr algn="ctr">
-              <a:lnSpc>
-                <a:spcPct val="108000"/>
-              </a:lnSpc>
-              <a:defRPr sz="3400" b="1" i="0" u="none">
-                <a:solidFill>
-                  <a:srgbClr val="FFFFFF"/>
-                </a:solidFill>
-                <a:latin typeface="Calibri"/>
-              </a:defRPr>
-            </a:pPr>
-            <a:r>
-              <a:t>Rev. Fr. Jonrey Lauron, RCJ · Divino Gabriel</a:t>
+              <a:t>Rev. Fr. Jonrey Lauron, RCJ</a:t>
             </a:r>
           </a:p>
         </p:txBody>
